--- a/output/presentations/09-multi-agent-interop.pptx
+++ b/output/presentations/09-multi-agent-interop.pptx
@@ -2,22 +2,24 @@
 <file path=ppt/presentation.xml><?xml version="1.0" encoding="utf-8"?>
 <p:presentation xmlns:p="http://schemas.openxmlformats.org/presentationml/2006/main">
   <p:sldMasterIdLst>
-    <p:sldMasterId xmlns:r="http://schemas.openxmlformats.org/officeDocument/2006/relationships" id="2147483648" r:id="Rd0331d4785ee4079"/>
+    <p:sldMasterId xmlns:r="http://schemas.openxmlformats.org/officeDocument/2006/relationships" id="2147483648" r:id="R99a21bb895534dfd"/>
   </p:sldMasterIdLst>
   <p:notesMasterIdLst>
-    <p:notesMasterId xmlns:r="http://schemas.openxmlformats.org/officeDocument/2006/relationships" r:id="R1bd9b8594da74352"/>
+    <p:notesMasterId xmlns:r="http://schemas.openxmlformats.org/officeDocument/2006/relationships" r:id="R33285df59e7947c7"/>
   </p:notesMasterIdLst>
   <p:sldIdLst>
-    <p:sldId xmlns:r="http://schemas.openxmlformats.org/officeDocument/2006/relationships" id="256" r:id="R2ffbef51653c4bd9"/>
-    <p:sldId xmlns:r="http://schemas.openxmlformats.org/officeDocument/2006/relationships" id="257" r:id="Rbf1cd1be018f4a44"/>
-    <p:sldId xmlns:r="http://schemas.openxmlformats.org/officeDocument/2006/relationships" id="258" r:id="Re274d627fee74c86"/>
-    <p:sldId xmlns:r="http://schemas.openxmlformats.org/officeDocument/2006/relationships" id="259" r:id="R827885bb72c1400e"/>
-    <p:sldId xmlns:r="http://schemas.openxmlformats.org/officeDocument/2006/relationships" id="260" r:id="R7126e8fe86ae4fac"/>
-    <p:sldId xmlns:r="http://schemas.openxmlformats.org/officeDocument/2006/relationships" id="261" r:id="R76bcd8542137438d"/>
-    <p:sldId xmlns:r="http://schemas.openxmlformats.org/officeDocument/2006/relationships" id="262" r:id="R666051090a01448d"/>
-    <p:sldId xmlns:r="http://schemas.openxmlformats.org/officeDocument/2006/relationships" id="263" r:id="R950af6808d76458a"/>
-    <p:sldId xmlns:r="http://schemas.openxmlformats.org/officeDocument/2006/relationships" id="264" r:id="Rb14e08a5f4104e40"/>
-    <p:sldId xmlns:r="http://schemas.openxmlformats.org/officeDocument/2006/relationships" id="265" r:id="Rc394bf61375643af"/>
+    <p:sldId xmlns:r="http://schemas.openxmlformats.org/officeDocument/2006/relationships" id="256" r:id="R6e62fcae3d7d4979"/>
+    <p:sldId xmlns:r="http://schemas.openxmlformats.org/officeDocument/2006/relationships" id="257" r:id="R6edaa40d52d7404b"/>
+    <p:sldId xmlns:r="http://schemas.openxmlformats.org/officeDocument/2006/relationships" id="258" r:id="R17ec79946ed54473"/>
+    <p:sldId xmlns:r="http://schemas.openxmlformats.org/officeDocument/2006/relationships" id="259" r:id="Rca58282f72a64597"/>
+    <p:sldId xmlns:r="http://schemas.openxmlformats.org/officeDocument/2006/relationships" id="260" r:id="R49e805f8e7d5444a"/>
+    <p:sldId xmlns:r="http://schemas.openxmlformats.org/officeDocument/2006/relationships" id="261" r:id="Read5caf8aea0465e"/>
+    <p:sldId xmlns:r="http://schemas.openxmlformats.org/officeDocument/2006/relationships" id="262" r:id="R9a775328190b4e03"/>
+    <p:sldId xmlns:r="http://schemas.openxmlformats.org/officeDocument/2006/relationships" id="263" r:id="Rd154e3a8c0154868"/>
+    <p:sldId xmlns:r="http://schemas.openxmlformats.org/officeDocument/2006/relationships" id="264" r:id="R65be6f843da24f39"/>
+    <p:sldId xmlns:r="http://schemas.openxmlformats.org/officeDocument/2006/relationships" id="265" r:id="R97e0300dd8be4c13"/>
+    <p:sldId xmlns:r="http://schemas.openxmlformats.org/officeDocument/2006/relationships" id="266" r:id="Rc26bbc38bf604613"/>
+    <p:sldId xmlns:r="http://schemas.openxmlformats.org/officeDocument/2006/relationships" id="267" r:id="Rbc618e88274a43ed"/>
   </p:sldIdLst>
   <p:sldSz cx="12192000" cy="6858000"/>
   <p:notesSz cx="6858000" cy="9144000"/>
@@ -461,12 +463,52 @@
           </a:p>
           <a:p xmlns:a="http://schemas.openxmlformats.org/drawingml/2006/main">
             <a:r>
+              <a:t>Edition: 2026-09-09</a:t>
+            </a:r>
+          </a:p>
+          <a:p xmlns:a="http://schemas.openxmlformats.org/drawingml/2006/main">
+            <a:r>
+              <a:t/>
+            </a:r>
+          </a:p>
+          <a:p xmlns:a="http://schemas.openxmlformats.org/drawingml/2006/main">
+            <a:r>
               <a:t>[Sources]</a:t>
             </a:r>
           </a:p>
           <a:p xmlns:a="http://schemas.openxmlformats.org/drawingml/2006/main">
             <a:r>
-              <a:t>- Supplied source presentation: 09-multi-agent-interop.pdf</a:t>
+              <a:t>- Original source presentation: 09-multi-agent-interop.pdf</a:t>
+            </a:r>
+          </a:p>
+          <a:p xmlns:a="http://schemas.openxmlformats.org/drawingml/2006/main">
+            <a:r>
+              <a:t>- S6: A2A specification 1.0.0. Versioned protocol specification, accessed, 2026-09-09. https://a2a-protocol.org/v1.0.0/specification/ Separates the data model from JSON-RPC, gRPC, and HTTP/REST bindings. The course traces JSON-RPC.</a:t>
+            </a:r>
+          </a:p>
+          <a:p xmlns:a="http://schemas.openxmlformats.org/drawingml/2006/main">
+            <a:r>
+              <a:t/>
+            </a:r>
+          </a:p>
+          <a:p xmlns:a="http://schemas.openxmlformats.org/drawingml/2006/main">
+            <a:r>
+              <a:t>[Assessed practice]</a:t>
+            </a:r>
+          </a:p>
+          <a:p xmlns:a="http://schemas.openxmlformats.org/drawingml/2006/main">
+            <a:r>
+              <a:t>Trace a delegated catalog task from discovery to completion. Identify the caller, authorization decision, timeout owner, and artifact validator. No remote service deployment is required.</a:t>
+            </a:r>
+          </a:p>
+          <a:p xmlns:a="http://schemas.openxmlformats.org/drawingml/2006/main">
+            <a:r>
+              <a:t>Acceptance: Use A2A 1.0.0 terminology and distinguish the chosen binding from the abstract task model. Explain what happens after a failed or canceled task.</a:t>
+            </a:r>
+          </a:p>
+          <a:p xmlns:a="http://schemas.openxmlformats.org/drawingml/2006/main">
+            <a:r>
+              <a:t>Lab: labs/08_langgraph_approval_security.ipynb</a:t>
             </a:r>
           </a:p>
         </p:txBody>
@@ -536,6 +578,131 @@
           <a:lstStyle xmlns:a="http://schemas.openxmlformats.org/drawingml/2006/main"/>
           <a:p xmlns:a="http://schemas.openxmlformats.org/drawingml/2006/main">
             <a:r>
+              <a:t>Use as retrieval practice. Ask for an answer that defines, compares, traces, and evaluates.</a:t>
+            </a:r>
+          </a:p>
+          <a:p xmlns:a="http://schemas.openxmlformats.org/drawingml/2006/main">
+            <a:r>
+              <a:t/>
+            </a:r>
+          </a:p>
+          <a:p xmlns:a="http://schemas.openxmlformats.org/drawingml/2006/main">
+            <a:r>
+              <a:t>Edition: 2026-09-09</a:t>
+            </a:r>
+          </a:p>
+          <a:p xmlns:a="http://schemas.openxmlformats.org/drawingml/2006/main">
+            <a:r>
+              <a:t/>
+            </a:r>
+          </a:p>
+          <a:p xmlns:a="http://schemas.openxmlformats.org/drawingml/2006/main">
+            <a:r>
+              <a:t>[Sources]</a:t>
+            </a:r>
+          </a:p>
+          <a:p xmlns:a="http://schemas.openxmlformats.org/drawingml/2006/main">
+            <a:r>
+              <a:t>- Original source presentation: 09-multi-agent-interop.pdf</a:t>
+            </a:r>
+          </a:p>
+          <a:p xmlns:a="http://schemas.openxmlformats.org/drawingml/2006/main">
+            <a:r>
+              <a:t>- S6: A2A specification 1.0.0. Versioned protocol specification, accessed, 2026-09-09. https://a2a-protocol.org/v1.0.0/specification/ Separates the data model from JSON-RPC, gRPC, and HTTP/REST bindings. The course traces JSON-RPC.</a:t>
+            </a:r>
+          </a:p>
+          <a:p xmlns:a="http://schemas.openxmlformats.org/drawingml/2006/main">
+            <a:r>
+              <a:t/>
+            </a:r>
+          </a:p>
+          <a:p xmlns:a="http://schemas.openxmlformats.org/drawingml/2006/main">
+            <a:r>
+              <a:t>[Assessed practice]</a:t>
+            </a:r>
+          </a:p>
+          <a:p xmlns:a="http://schemas.openxmlformats.org/drawingml/2006/main">
+            <a:r>
+              <a:t>Trace a delegated catalog task from discovery to completion. Identify the caller, authorization decision, timeout owner, and artifact validator. No remote service deployment is required.</a:t>
+            </a:r>
+          </a:p>
+          <a:p xmlns:a="http://schemas.openxmlformats.org/drawingml/2006/main">
+            <a:r>
+              <a:t>Acceptance: Use A2A 1.0.0 terminology and distinguish the chosen binding from the abstract task model. Explain what happens after a failed or canceled task.</a:t>
+            </a:r>
+          </a:p>
+          <a:p xmlns:a="http://schemas.openxmlformats.org/drawingml/2006/main">
+            <a:r>
+              <a:t>Lab: labs/08_langgraph_approval_security.ipynb</a:t>
+            </a:r>
+          </a:p>
+        </p:txBody>
+      </p:sp>
+      <p:sp>
+        <p:nvSpPr>
+          <p:cNvPr id="4" name="Slide Number Placeholder 3"/>
+          <p:cNvSpPr>
+            <a:spLocks xmlns:a="http://schemas.openxmlformats.org/drawingml/2006/main" noGrp="1"/>
+          </p:cNvSpPr>
+          <p:nvPr>
+            <p:ph type="sldNum" idx="5"/>
+          </p:nvPr>
+        </p:nvSpPr>
+        <p:spPr/>
+        <p:txBody>
+          <a:bodyPr xmlns:a="http://schemas.openxmlformats.org/drawingml/2006/main"/>
+          <a:lstStyle xmlns:a="http://schemas.openxmlformats.org/drawingml/2006/main"/>
+          <a:p xmlns:a="http://schemas.openxmlformats.org/drawingml/2006/main"/>
+        </p:txBody>
+      </p:sp>
+    </p:spTree>
+  </p:cSld>
+  <p:clrMapOvr>
+    <a:masterClrMapping xmlns:a="http://schemas.openxmlformats.org/drawingml/2006/main"/>
+  </p:clrMapOvr>
+</p:notes>
+</file>
+
+<file path=ppt/notesSlides/notesSlide11.xml><?xml version="1.0" encoding="utf-8"?>
+<p:notes xmlns:p="http://schemas.openxmlformats.org/presentationml/2006/main">
+  <p:cSld>
+    <p:spTree>
+      <p:nvGrpSpPr>
+        <p:cNvPr id="1" name=""/>
+        <p:cNvGrpSpPr/>
+        <p:nvPr/>
+      </p:nvGrpSpPr>
+      <p:grpSpPr>
+        <a:xfrm xmlns:a="http://schemas.openxmlformats.org/drawingml/2006/main"/>
+      </p:grpSpPr>
+      <p:sp>
+        <p:nvSpPr>
+          <p:cNvPr id="2" name="Slide Image Placeholder 1"/>
+          <p:cNvSpPr>
+            <a:spLocks xmlns:a="http://schemas.openxmlformats.org/drawingml/2006/main" noGrp="1"/>
+          </p:cNvSpPr>
+          <p:nvPr>
+            <p:ph type="sldImg" idx="0"/>
+          </p:nvPr>
+        </p:nvSpPr>
+        <p:spPr/>
+      </p:sp>
+      <p:sp>
+        <p:nvSpPr>
+          <p:cNvPr id="3" name="Notes Placeholder 2"/>
+          <p:cNvSpPr>
+            <a:spLocks xmlns:a="http://schemas.openxmlformats.org/drawingml/2006/main" noGrp="1"/>
+          </p:cNvSpPr>
+          <p:nvPr>
+            <p:ph type="body" idx="1"/>
+          </p:nvPr>
+        </p:nvSpPr>
+        <p:spPr/>
+        <p:txBody>
+          <a:bodyPr xmlns:a="http://schemas.openxmlformats.org/drawingml/2006/main"/>
+          <a:lstStyle xmlns:a="http://schemas.openxmlformats.org/drawingml/2006/main"/>
+          <a:p xmlns:a="http://schemas.openxmlformats.org/drawingml/2006/main">
+            <a:r>
               <a:t>Close by restating the four durable ideas and linking forward to the next chapter.</a:t>
             </a:r>
           </a:p>
@@ -546,12 +713,177 @@
           </a:p>
           <a:p xmlns:a="http://schemas.openxmlformats.org/drawingml/2006/main">
             <a:r>
+              <a:t>Edition: 2026-09-09</a:t>
+            </a:r>
+          </a:p>
+          <a:p xmlns:a="http://schemas.openxmlformats.org/drawingml/2006/main">
+            <a:r>
+              <a:t/>
+            </a:r>
+          </a:p>
+          <a:p xmlns:a="http://schemas.openxmlformats.org/drawingml/2006/main">
+            <a:r>
               <a:t>[Sources]</a:t>
             </a:r>
           </a:p>
           <a:p xmlns:a="http://schemas.openxmlformats.org/drawingml/2006/main">
             <a:r>
-              <a:t>- Supplied source presentation: 09-multi-agent-interop.pdf</a:t>
+              <a:t>- Original source presentation: 09-multi-agent-interop.pdf</a:t>
+            </a:r>
+          </a:p>
+          <a:p xmlns:a="http://schemas.openxmlformats.org/drawingml/2006/main">
+            <a:r>
+              <a:t>- S6: A2A specification 1.0.0. Versioned protocol specification, accessed, 2026-09-09. https://a2a-protocol.org/v1.0.0/specification/ Separates the data model from JSON-RPC, gRPC, and HTTP/REST bindings. The course traces JSON-RPC.</a:t>
+            </a:r>
+          </a:p>
+          <a:p xmlns:a="http://schemas.openxmlformats.org/drawingml/2006/main">
+            <a:r>
+              <a:t/>
+            </a:r>
+          </a:p>
+          <a:p xmlns:a="http://schemas.openxmlformats.org/drawingml/2006/main">
+            <a:r>
+              <a:t>[Assessed practice]</a:t>
+            </a:r>
+          </a:p>
+          <a:p xmlns:a="http://schemas.openxmlformats.org/drawingml/2006/main">
+            <a:r>
+              <a:t>Trace a delegated catalog task from discovery to completion. Identify the caller, authorization decision, timeout owner, and artifact validator. No remote service deployment is required.</a:t>
+            </a:r>
+          </a:p>
+          <a:p xmlns:a="http://schemas.openxmlformats.org/drawingml/2006/main">
+            <a:r>
+              <a:t>Acceptance: Use A2A 1.0.0 terminology and distinguish the chosen binding from the abstract task model. Explain what happens after a failed or canceled task.</a:t>
+            </a:r>
+          </a:p>
+          <a:p xmlns:a="http://schemas.openxmlformats.org/drawingml/2006/main">
+            <a:r>
+              <a:t>Lab: labs/08_langgraph_approval_security.ipynb</a:t>
+            </a:r>
+          </a:p>
+        </p:txBody>
+      </p:sp>
+      <p:sp>
+        <p:nvSpPr>
+          <p:cNvPr id="4" name="Slide Number Placeholder 3"/>
+          <p:cNvSpPr>
+            <a:spLocks xmlns:a="http://schemas.openxmlformats.org/drawingml/2006/main" noGrp="1"/>
+          </p:cNvSpPr>
+          <p:nvPr>
+            <p:ph type="sldNum" idx="5"/>
+          </p:nvPr>
+        </p:nvSpPr>
+        <p:spPr/>
+        <p:txBody>
+          <a:bodyPr xmlns:a="http://schemas.openxmlformats.org/drawingml/2006/main"/>
+          <a:lstStyle xmlns:a="http://schemas.openxmlformats.org/drawingml/2006/main"/>
+          <a:p xmlns:a="http://schemas.openxmlformats.org/drawingml/2006/main"/>
+        </p:txBody>
+      </p:sp>
+    </p:spTree>
+  </p:cSld>
+  <p:clrMapOvr>
+    <a:masterClrMapping xmlns:a="http://schemas.openxmlformats.org/drawingml/2006/main"/>
+  </p:clrMapOvr>
+</p:notes>
+</file>
+
+<file path=ppt/notesSlides/notesSlide12.xml><?xml version="1.0" encoding="utf-8"?>
+<p:notes xmlns:p="http://schemas.openxmlformats.org/presentationml/2006/main">
+  <p:cSld>
+    <p:spTree>
+      <p:nvGrpSpPr>
+        <p:cNvPr id="1" name=""/>
+        <p:cNvGrpSpPr/>
+        <p:nvPr/>
+      </p:nvGrpSpPr>
+      <p:grpSpPr>
+        <a:xfrm xmlns:a="http://schemas.openxmlformats.org/drawingml/2006/main"/>
+      </p:grpSpPr>
+      <p:sp>
+        <p:nvSpPr>
+          <p:cNvPr id="2" name="Slide Image Placeholder 1"/>
+          <p:cNvSpPr>
+            <a:spLocks xmlns:a="http://schemas.openxmlformats.org/drawingml/2006/main" noGrp="1"/>
+          </p:cNvSpPr>
+          <p:nvPr>
+            <p:ph type="sldImg" idx="0"/>
+          </p:nvPr>
+        </p:nvSpPr>
+        <p:spPr/>
+      </p:sp>
+      <p:sp>
+        <p:nvSpPr>
+          <p:cNvPr id="3" name="Notes Placeholder 2"/>
+          <p:cNvSpPr>
+            <a:spLocks xmlns:a="http://schemas.openxmlformats.org/drawingml/2006/main" noGrp="1"/>
+          </p:cNvSpPr>
+          <p:nvPr>
+            <p:ph type="body" idx="1"/>
+          </p:nvPr>
+        </p:nvSpPr>
+        <p:spPr/>
+        <p:txBody>
+          <a:bodyPr xmlns:a="http://schemas.openxmlformats.org/drawingml/2006/main"/>
+          <a:lstStyle xmlns:a="http://schemas.openxmlformats.org/drawingml/2006/main"/>
+          <a:p xmlns:a="http://schemas.openxmlformats.org/drawingml/2006/main">
+            <a:r>
+              <a:t>Assess the submitted evidence with the stated acceptance check. Reading links and limitations follow.</a:t>
+            </a:r>
+          </a:p>
+          <a:p xmlns:a="http://schemas.openxmlformats.org/drawingml/2006/main">
+            <a:r>
+              <a:t/>
+            </a:r>
+          </a:p>
+          <a:p xmlns:a="http://schemas.openxmlformats.org/drawingml/2006/main">
+            <a:r>
+              <a:t>Edition: 2026-09-09</a:t>
+            </a:r>
+          </a:p>
+          <a:p xmlns:a="http://schemas.openxmlformats.org/drawingml/2006/main">
+            <a:r>
+              <a:t/>
+            </a:r>
+          </a:p>
+          <a:p xmlns:a="http://schemas.openxmlformats.org/drawingml/2006/main">
+            <a:r>
+              <a:t>[Sources]</a:t>
+            </a:r>
+          </a:p>
+          <a:p xmlns:a="http://schemas.openxmlformats.org/drawingml/2006/main">
+            <a:r>
+              <a:t>- Original source presentation: 09-multi-agent-interop.pdf</a:t>
+            </a:r>
+          </a:p>
+          <a:p xmlns:a="http://schemas.openxmlformats.org/drawingml/2006/main">
+            <a:r>
+              <a:t>- S6: A2A specification 1.0.0. Versioned protocol specification, accessed, 2026-09-09. https://a2a-protocol.org/v1.0.0/specification/ Separates the data model from JSON-RPC, gRPC, and HTTP/REST bindings. The course traces JSON-RPC.</a:t>
+            </a:r>
+          </a:p>
+          <a:p xmlns:a="http://schemas.openxmlformats.org/drawingml/2006/main">
+            <a:r>
+              <a:t/>
+            </a:r>
+          </a:p>
+          <a:p xmlns:a="http://schemas.openxmlformats.org/drawingml/2006/main">
+            <a:r>
+              <a:t>[Assessed practice]</a:t>
+            </a:r>
+          </a:p>
+          <a:p xmlns:a="http://schemas.openxmlformats.org/drawingml/2006/main">
+            <a:r>
+              <a:t>Trace a delegated catalog task from discovery to completion. Identify the caller, authorization decision, timeout owner, and artifact validator. No remote service deployment is required.</a:t>
+            </a:r>
+          </a:p>
+          <a:p xmlns:a="http://schemas.openxmlformats.org/drawingml/2006/main">
+            <a:r>
+              <a:t>Acceptance: Use A2A 1.0.0 terminology and distinguish the chosen binding from the abstract task model. Explain what happens after a failed or canceled task.</a:t>
+            </a:r>
+          </a:p>
+          <a:p xmlns:a="http://schemas.openxmlformats.org/drawingml/2006/main">
+            <a:r>
+              <a:t>Lab: labs/08_langgraph_approval_security.ipynb</a:t>
             </a:r>
           </a:p>
         </p:txBody>
@@ -631,12 +963,52 @@
           </a:p>
           <a:p xmlns:a="http://schemas.openxmlformats.org/drawingml/2006/main">
             <a:r>
+              <a:t>Edition: 2026-09-09</a:t>
+            </a:r>
+          </a:p>
+          <a:p xmlns:a="http://schemas.openxmlformats.org/drawingml/2006/main">
+            <a:r>
+              <a:t/>
+            </a:r>
+          </a:p>
+          <a:p xmlns:a="http://schemas.openxmlformats.org/drawingml/2006/main">
+            <a:r>
               <a:t>[Sources]</a:t>
             </a:r>
           </a:p>
           <a:p xmlns:a="http://schemas.openxmlformats.org/drawingml/2006/main">
             <a:r>
-              <a:t>- Supplied source presentation: 09-multi-agent-interop.pdf</a:t>
+              <a:t>- Original source presentation: 09-multi-agent-interop.pdf</a:t>
+            </a:r>
+          </a:p>
+          <a:p xmlns:a="http://schemas.openxmlformats.org/drawingml/2006/main">
+            <a:r>
+              <a:t>- S6: A2A specification 1.0.0. Versioned protocol specification, accessed, 2026-09-09. https://a2a-protocol.org/v1.0.0/specification/ Separates the data model from JSON-RPC, gRPC, and HTTP/REST bindings. The course traces JSON-RPC.</a:t>
+            </a:r>
+          </a:p>
+          <a:p xmlns:a="http://schemas.openxmlformats.org/drawingml/2006/main">
+            <a:r>
+              <a:t/>
+            </a:r>
+          </a:p>
+          <a:p xmlns:a="http://schemas.openxmlformats.org/drawingml/2006/main">
+            <a:r>
+              <a:t>[Assessed practice]</a:t>
+            </a:r>
+          </a:p>
+          <a:p xmlns:a="http://schemas.openxmlformats.org/drawingml/2006/main">
+            <a:r>
+              <a:t>Trace a delegated catalog task from discovery to completion. Identify the caller, authorization decision, timeout owner, and artifact validator. No remote service deployment is required.</a:t>
+            </a:r>
+          </a:p>
+          <a:p xmlns:a="http://schemas.openxmlformats.org/drawingml/2006/main">
+            <a:r>
+              <a:t>Acceptance: Use A2A 1.0.0 terminology and distinguish the chosen binding from the abstract task model. Explain what happens after a failed or canceled task.</a:t>
+            </a:r>
+          </a:p>
+          <a:p xmlns:a="http://schemas.openxmlformats.org/drawingml/2006/main">
+            <a:r>
+              <a:t>Lab: labs/08_langgraph_approval_security.ipynb</a:t>
             </a:r>
           </a:p>
         </p:txBody>
@@ -716,12 +1088,52 @@
           </a:p>
           <a:p xmlns:a="http://schemas.openxmlformats.org/drawingml/2006/main">
             <a:r>
+              <a:t>Edition: 2026-09-09</a:t>
+            </a:r>
+          </a:p>
+          <a:p xmlns:a="http://schemas.openxmlformats.org/drawingml/2006/main">
+            <a:r>
+              <a:t/>
+            </a:r>
+          </a:p>
+          <a:p xmlns:a="http://schemas.openxmlformats.org/drawingml/2006/main">
+            <a:r>
               <a:t>[Sources]</a:t>
             </a:r>
           </a:p>
           <a:p xmlns:a="http://schemas.openxmlformats.org/drawingml/2006/main">
             <a:r>
-              <a:t>- Supplied source presentation: 09-multi-agent-interop.pdf</a:t>
+              <a:t>- Original source presentation: 09-multi-agent-interop.pdf</a:t>
+            </a:r>
+          </a:p>
+          <a:p xmlns:a="http://schemas.openxmlformats.org/drawingml/2006/main">
+            <a:r>
+              <a:t>- S6: A2A specification 1.0.0. Versioned protocol specification, accessed, 2026-09-09. https://a2a-protocol.org/v1.0.0/specification/ Separates the data model from JSON-RPC, gRPC, and HTTP/REST bindings. The course traces JSON-RPC.</a:t>
+            </a:r>
+          </a:p>
+          <a:p xmlns:a="http://schemas.openxmlformats.org/drawingml/2006/main">
+            <a:r>
+              <a:t/>
+            </a:r>
+          </a:p>
+          <a:p xmlns:a="http://schemas.openxmlformats.org/drawingml/2006/main">
+            <a:r>
+              <a:t>[Assessed practice]</a:t>
+            </a:r>
+          </a:p>
+          <a:p xmlns:a="http://schemas.openxmlformats.org/drawingml/2006/main">
+            <a:r>
+              <a:t>Trace a delegated catalog task from discovery to completion. Identify the caller, authorization decision, timeout owner, and artifact validator. No remote service deployment is required.</a:t>
+            </a:r>
+          </a:p>
+          <a:p xmlns:a="http://schemas.openxmlformats.org/drawingml/2006/main">
+            <a:r>
+              <a:t>Acceptance: Use A2A 1.0.0 terminology and distinguish the chosen binding from the abstract task model. Explain what happens after a failed or canceled task.</a:t>
+            </a:r>
+          </a:p>
+          <a:p xmlns:a="http://schemas.openxmlformats.org/drawingml/2006/main">
+            <a:r>
+              <a:t>Lab: labs/08_langgraph_approval_security.ipynb</a:t>
             </a:r>
           </a:p>
         </p:txBody>
@@ -801,12 +1213,52 @@
           </a:p>
           <a:p xmlns:a="http://schemas.openxmlformats.org/drawingml/2006/main">
             <a:r>
+              <a:t>Edition: 2026-09-09</a:t>
+            </a:r>
+          </a:p>
+          <a:p xmlns:a="http://schemas.openxmlformats.org/drawingml/2006/main">
+            <a:r>
+              <a:t/>
+            </a:r>
+          </a:p>
+          <a:p xmlns:a="http://schemas.openxmlformats.org/drawingml/2006/main">
+            <a:r>
               <a:t>[Sources]</a:t>
             </a:r>
           </a:p>
           <a:p xmlns:a="http://schemas.openxmlformats.org/drawingml/2006/main">
             <a:r>
-              <a:t>- Supplied source presentation: 09-multi-agent-interop.pdf</a:t>
+              <a:t>- Original source presentation: 09-multi-agent-interop.pdf</a:t>
+            </a:r>
+          </a:p>
+          <a:p xmlns:a="http://schemas.openxmlformats.org/drawingml/2006/main">
+            <a:r>
+              <a:t>- S6: A2A specification 1.0.0. Versioned protocol specification, accessed, 2026-09-09. https://a2a-protocol.org/v1.0.0/specification/ Separates the data model from JSON-RPC, gRPC, and HTTP/REST bindings. The course traces JSON-RPC.</a:t>
+            </a:r>
+          </a:p>
+          <a:p xmlns:a="http://schemas.openxmlformats.org/drawingml/2006/main">
+            <a:r>
+              <a:t/>
+            </a:r>
+          </a:p>
+          <a:p xmlns:a="http://schemas.openxmlformats.org/drawingml/2006/main">
+            <a:r>
+              <a:t>[Assessed practice]</a:t>
+            </a:r>
+          </a:p>
+          <a:p xmlns:a="http://schemas.openxmlformats.org/drawingml/2006/main">
+            <a:r>
+              <a:t>Trace a delegated catalog task from discovery to completion. Identify the caller, authorization decision, timeout owner, and artifact validator. No remote service deployment is required.</a:t>
+            </a:r>
+          </a:p>
+          <a:p xmlns:a="http://schemas.openxmlformats.org/drawingml/2006/main">
+            <a:r>
+              <a:t>Acceptance: Use A2A 1.0.0 terminology and distinguish the chosen binding from the abstract task model. Explain what happens after a failed or canceled task.</a:t>
+            </a:r>
+          </a:p>
+          <a:p xmlns:a="http://schemas.openxmlformats.org/drawingml/2006/main">
+            <a:r>
+              <a:t>Lab: labs/08_langgraph_approval_security.ipynb</a:t>
             </a:r>
           </a:p>
         </p:txBody>
@@ -886,12 +1338,52 @@
           </a:p>
           <a:p xmlns:a="http://schemas.openxmlformats.org/drawingml/2006/main">
             <a:r>
+              <a:t>Edition: 2026-09-09</a:t>
+            </a:r>
+          </a:p>
+          <a:p xmlns:a="http://schemas.openxmlformats.org/drawingml/2006/main">
+            <a:r>
+              <a:t/>
+            </a:r>
+          </a:p>
+          <a:p xmlns:a="http://schemas.openxmlformats.org/drawingml/2006/main">
+            <a:r>
               <a:t>[Sources]</a:t>
             </a:r>
           </a:p>
           <a:p xmlns:a="http://schemas.openxmlformats.org/drawingml/2006/main">
             <a:r>
-              <a:t>- Supplied source presentation: 09-multi-agent-interop.pdf</a:t>
+              <a:t>- Original source presentation: 09-multi-agent-interop.pdf</a:t>
+            </a:r>
+          </a:p>
+          <a:p xmlns:a="http://schemas.openxmlformats.org/drawingml/2006/main">
+            <a:r>
+              <a:t>- S6: A2A specification 1.0.0. Versioned protocol specification, accessed, 2026-09-09. https://a2a-protocol.org/v1.0.0/specification/ Separates the data model from JSON-RPC, gRPC, and HTTP/REST bindings. The course traces JSON-RPC.</a:t>
+            </a:r>
+          </a:p>
+          <a:p xmlns:a="http://schemas.openxmlformats.org/drawingml/2006/main">
+            <a:r>
+              <a:t/>
+            </a:r>
+          </a:p>
+          <a:p xmlns:a="http://schemas.openxmlformats.org/drawingml/2006/main">
+            <a:r>
+              <a:t>[Assessed practice]</a:t>
+            </a:r>
+          </a:p>
+          <a:p xmlns:a="http://schemas.openxmlformats.org/drawingml/2006/main">
+            <a:r>
+              <a:t>Trace a delegated catalog task from discovery to completion. Identify the caller, authorization decision, timeout owner, and artifact validator. No remote service deployment is required.</a:t>
+            </a:r>
+          </a:p>
+          <a:p xmlns:a="http://schemas.openxmlformats.org/drawingml/2006/main">
+            <a:r>
+              <a:t>Acceptance: Use A2A 1.0.0 terminology and distinguish the chosen binding from the abstract task model. Explain what happens after a failed or canceled task.</a:t>
+            </a:r>
+          </a:p>
+          <a:p xmlns:a="http://schemas.openxmlformats.org/drawingml/2006/main">
+            <a:r>
+              <a:t>Lab: labs/08_langgraph_approval_security.ipynb</a:t>
             </a:r>
           </a:p>
         </p:txBody>
@@ -971,12 +1463,52 @@
           </a:p>
           <a:p xmlns:a="http://schemas.openxmlformats.org/drawingml/2006/main">
             <a:r>
+              <a:t>Edition: 2026-09-09</a:t>
+            </a:r>
+          </a:p>
+          <a:p xmlns:a="http://schemas.openxmlformats.org/drawingml/2006/main">
+            <a:r>
+              <a:t/>
+            </a:r>
+          </a:p>
+          <a:p xmlns:a="http://schemas.openxmlformats.org/drawingml/2006/main">
+            <a:r>
               <a:t>[Sources]</a:t>
             </a:r>
           </a:p>
           <a:p xmlns:a="http://schemas.openxmlformats.org/drawingml/2006/main">
             <a:r>
-              <a:t>- Supplied source presentation: 09-multi-agent-interop.pdf</a:t>
+              <a:t>- Original source presentation: 09-multi-agent-interop.pdf</a:t>
+            </a:r>
+          </a:p>
+          <a:p xmlns:a="http://schemas.openxmlformats.org/drawingml/2006/main">
+            <a:r>
+              <a:t>- S6: A2A specification 1.0.0. Versioned protocol specification, accessed, 2026-09-09. https://a2a-protocol.org/v1.0.0/specification/ Separates the data model from JSON-RPC, gRPC, and HTTP/REST bindings. The course traces JSON-RPC.</a:t>
+            </a:r>
+          </a:p>
+          <a:p xmlns:a="http://schemas.openxmlformats.org/drawingml/2006/main">
+            <a:r>
+              <a:t/>
+            </a:r>
+          </a:p>
+          <a:p xmlns:a="http://schemas.openxmlformats.org/drawingml/2006/main">
+            <a:r>
+              <a:t>[Assessed practice]</a:t>
+            </a:r>
+          </a:p>
+          <a:p xmlns:a="http://schemas.openxmlformats.org/drawingml/2006/main">
+            <a:r>
+              <a:t>Trace a delegated catalog task from discovery to completion. Identify the caller, authorization decision, timeout owner, and artifact validator. No remote service deployment is required.</a:t>
+            </a:r>
+          </a:p>
+          <a:p xmlns:a="http://schemas.openxmlformats.org/drawingml/2006/main">
+            <a:r>
+              <a:t>Acceptance: Use A2A 1.0.0 terminology and distinguish the chosen binding from the abstract task model. Explain what happens after a failed or canceled task.</a:t>
+            </a:r>
+          </a:p>
+          <a:p xmlns:a="http://schemas.openxmlformats.org/drawingml/2006/main">
+            <a:r>
+              <a:t>Lab: labs/08_langgraph_approval_security.ipynb</a:t>
             </a:r>
           </a:p>
         </p:txBody>
@@ -1056,12 +1588,52 @@
           </a:p>
           <a:p xmlns:a="http://schemas.openxmlformats.org/drawingml/2006/main">
             <a:r>
+              <a:t>Edition: 2026-09-09</a:t>
+            </a:r>
+          </a:p>
+          <a:p xmlns:a="http://schemas.openxmlformats.org/drawingml/2006/main">
+            <a:r>
+              <a:t/>
+            </a:r>
+          </a:p>
+          <a:p xmlns:a="http://schemas.openxmlformats.org/drawingml/2006/main">
+            <a:r>
               <a:t>[Sources]</a:t>
             </a:r>
           </a:p>
           <a:p xmlns:a="http://schemas.openxmlformats.org/drawingml/2006/main">
             <a:r>
-              <a:t>- Supplied source presentation: 09-multi-agent-interop.pdf</a:t>
+              <a:t>- Original source presentation: 09-multi-agent-interop.pdf</a:t>
+            </a:r>
+          </a:p>
+          <a:p xmlns:a="http://schemas.openxmlformats.org/drawingml/2006/main">
+            <a:r>
+              <a:t>- S6: A2A specification 1.0.0. Versioned protocol specification, accessed, 2026-09-09. https://a2a-protocol.org/v1.0.0/specification/ Separates the data model from JSON-RPC, gRPC, and HTTP/REST bindings. The course traces JSON-RPC.</a:t>
+            </a:r>
+          </a:p>
+          <a:p xmlns:a="http://schemas.openxmlformats.org/drawingml/2006/main">
+            <a:r>
+              <a:t/>
+            </a:r>
+          </a:p>
+          <a:p xmlns:a="http://schemas.openxmlformats.org/drawingml/2006/main">
+            <a:r>
+              <a:t>[Assessed practice]</a:t>
+            </a:r>
+          </a:p>
+          <a:p xmlns:a="http://schemas.openxmlformats.org/drawingml/2006/main">
+            <a:r>
+              <a:t>Trace a delegated catalog task from discovery to completion. Identify the caller, authorization decision, timeout owner, and artifact validator. No remote service deployment is required.</a:t>
+            </a:r>
+          </a:p>
+          <a:p xmlns:a="http://schemas.openxmlformats.org/drawingml/2006/main">
+            <a:r>
+              <a:t>Acceptance: Use A2A 1.0.0 terminology and distinguish the chosen binding from the abstract task model. Explain what happens after a failed or canceled task.</a:t>
+            </a:r>
+          </a:p>
+          <a:p xmlns:a="http://schemas.openxmlformats.org/drawingml/2006/main">
+            <a:r>
+              <a:t>Lab: labs/08_langgraph_approval_security.ipynb</a:t>
             </a:r>
           </a:p>
         </p:txBody>
@@ -1141,12 +1713,52 @@
           </a:p>
           <a:p xmlns:a="http://schemas.openxmlformats.org/drawingml/2006/main">
             <a:r>
+              <a:t>Edition: 2026-09-09</a:t>
+            </a:r>
+          </a:p>
+          <a:p xmlns:a="http://schemas.openxmlformats.org/drawingml/2006/main">
+            <a:r>
+              <a:t/>
+            </a:r>
+          </a:p>
+          <a:p xmlns:a="http://schemas.openxmlformats.org/drawingml/2006/main">
+            <a:r>
               <a:t>[Sources]</a:t>
             </a:r>
           </a:p>
           <a:p xmlns:a="http://schemas.openxmlformats.org/drawingml/2006/main">
             <a:r>
-              <a:t>- Supplied source presentation: 09-multi-agent-interop.pdf</a:t>
+              <a:t>- Original source presentation: 09-multi-agent-interop.pdf</a:t>
+            </a:r>
+          </a:p>
+          <a:p xmlns:a="http://schemas.openxmlformats.org/drawingml/2006/main">
+            <a:r>
+              <a:t>- S6: A2A specification 1.0.0. Versioned protocol specification, accessed, 2026-09-09. https://a2a-protocol.org/v1.0.0/specification/ Separates the data model from JSON-RPC, gRPC, and HTTP/REST bindings. The course traces JSON-RPC.</a:t>
+            </a:r>
+          </a:p>
+          <a:p xmlns:a="http://schemas.openxmlformats.org/drawingml/2006/main">
+            <a:r>
+              <a:t/>
+            </a:r>
+          </a:p>
+          <a:p xmlns:a="http://schemas.openxmlformats.org/drawingml/2006/main">
+            <a:r>
+              <a:t>[Assessed practice]</a:t>
+            </a:r>
+          </a:p>
+          <a:p xmlns:a="http://schemas.openxmlformats.org/drawingml/2006/main">
+            <a:r>
+              <a:t>Trace a delegated catalog task from discovery to completion. Identify the caller, authorization decision, timeout owner, and artifact validator. No remote service deployment is required.</a:t>
+            </a:r>
+          </a:p>
+          <a:p xmlns:a="http://schemas.openxmlformats.org/drawingml/2006/main">
+            <a:r>
+              <a:t>Acceptance: Use A2A 1.0.0 terminology and distinguish the chosen binding from the abstract task model. Explain what happens after a failed or canceled task.</a:t>
+            </a:r>
+          </a:p>
+          <a:p xmlns:a="http://schemas.openxmlformats.org/drawingml/2006/main">
+            <a:r>
+              <a:t>Lab: labs/08_langgraph_approval_security.ipynb</a:t>
             </a:r>
           </a:p>
         </p:txBody>
@@ -1216,7 +1828,7 @@
           <a:lstStyle xmlns:a="http://schemas.openxmlformats.org/drawingml/2006/main"/>
           <a:p xmlns:a="http://schemas.openxmlformats.org/drawingml/2006/main">
             <a:r>
-              <a:t>Use as retrieval practice. Ask for an answer that defines, compares, traces, and evaluates.</a:t>
+              <a:t>Explain the claim first, then use the numbered points as evidence and design consequences.</a:t>
             </a:r>
           </a:p>
           <a:p xmlns:a="http://schemas.openxmlformats.org/drawingml/2006/main">
@@ -1226,12 +1838,52 @@
           </a:p>
           <a:p xmlns:a="http://schemas.openxmlformats.org/drawingml/2006/main">
             <a:r>
+              <a:t>Edition: 2026-09-09</a:t>
+            </a:r>
+          </a:p>
+          <a:p xmlns:a="http://schemas.openxmlformats.org/drawingml/2006/main">
+            <a:r>
+              <a:t/>
+            </a:r>
+          </a:p>
+          <a:p xmlns:a="http://schemas.openxmlformats.org/drawingml/2006/main">
+            <a:r>
               <a:t>[Sources]</a:t>
             </a:r>
           </a:p>
           <a:p xmlns:a="http://schemas.openxmlformats.org/drawingml/2006/main">
             <a:r>
-              <a:t>- Supplied source presentation: 09-multi-agent-interop.pdf</a:t>
+              <a:t>- Original source presentation: 09-multi-agent-interop.pdf</a:t>
+            </a:r>
+          </a:p>
+          <a:p xmlns:a="http://schemas.openxmlformats.org/drawingml/2006/main">
+            <a:r>
+              <a:t>- S6: A2A specification 1.0.0. Versioned protocol specification, accessed, 2026-09-09. https://a2a-protocol.org/v1.0.0/specification/ Separates the data model from JSON-RPC, gRPC, and HTTP/REST bindings. The course traces JSON-RPC.</a:t>
+            </a:r>
+          </a:p>
+          <a:p xmlns:a="http://schemas.openxmlformats.org/drawingml/2006/main">
+            <a:r>
+              <a:t/>
+            </a:r>
+          </a:p>
+          <a:p xmlns:a="http://schemas.openxmlformats.org/drawingml/2006/main">
+            <a:r>
+              <a:t>[Assessed practice]</a:t>
+            </a:r>
+          </a:p>
+          <a:p xmlns:a="http://schemas.openxmlformats.org/drawingml/2006/main">
+            <a:r>
+              <a:t>Trace a delegated catalog task from discovery to completion. Identify the caller, authorization decision, timeout owner, and artifact validator. No remote service deployment is required.</a:t>
+            </a:r>
+          </a:p>
+          <a:p xmlns:a="http://schemas.openxmlformats.org/drawingml/2006/main">
+            <a:r>
+              <a:t>Acceptance: Use A2A 1.0.0 terminology and distinguish the chosen binding from the abstract task model. Explain what happens after a failed or canceled task.</a:t>
+            </a:r>
+          </a:p>
+          <a:p xmlns:a="http://schemas.openxmlformats.org/drawingml/2006/main">
+            <a:r>
+              <a:t>Lab: labs/08_langgraph_approval_security.ipynb</a:t>
             </a:r>
           </a:p>
         </p:txBody>
@@ -1299,7 +1951,7 @@
   </p:cSld>
   <p:clrMap bg1="lt1" tx1="dk1" bg2="lt2" tx2="dk2" accent1="accent1" accent2="accent2" accent3="accent3" accent4="accent4" accent5="accent5" accent6="accent6" hlink="hlink" folHlink="folHlink"/>
   <p:sldLayoutIdLst>
-    <p:sldLayoutId xmlns:r="http://schemas.openxmlformats.org/officeDocument/2006/relationships" id="2147483649" r:id="Rb54de1c8acef4f00"/>
+    <p:sldLayoutId xmlns:r="http://schemas.openxmlformats.org/officeDocument/2006/relationships" id="2147483649" r:id="R0124deb71e46414e"/>
   </p:sldLayoutIdLst>
   <p:txStyles>
     <p:titleStyle>
@@ -1850,7 +2502,7 @@
           <p:cNvPr id="8" name="title-accent">
             <a:extLst xmlns:a="http://schemas.openxmlformats.org/drawingml/2006/main">
               <a:ext uri="{FF2B5EF4-FFF2-40B4-BE49-F238E27FC236}">
-                <a16:creationId xmlns:a16="http://schemas.microsoft.com/office/drawing/2014/main" id="{9D880DB7-6749-4AFD-99EC-E315E9CF9A26}"/>
+                <a16:creationId xmlns:a16="http://schemas.microsoft.com/office/drawing/2014/main" id="{4C13C296-347A-4BA3-BD16-EF92F26735D2}"/>
               </a:ext>
             </a:extLst>
           </p:cNvPr>
@@ -1883,7 +2535,7 @@
           <p:cNvPr id="2" name="course-title">
             <a:extLst xmlns:a="http://schemas.openxmlformats.org/drawingml/2006/main">
               <a:ext uri="{FF2B5EF4-FFF2-40B4-BE49-F238E27FC236}">
-                <a16:creationId xmlns:a16="http://schemas.microsoft.com/office/drawing/2014/main" id="{AD1A8C95-6F14-4679-BAFD-CA27D49F5B56}"/>
+                <a16:creationId xmlns:a16="http://schemas.microsoft.com/office/drawing/2014/main" id="{B754B759-D211-4EAB-97C0-7D64C7BE4276}"/>
               </a:ext>
             </a:extLst>
           </p:cNvPr>
@@ -1941,7 +2593,7 @@
           <p:cNvPr id="3" name="chapter-number">
             <a:extLst xmlns:a="http://schemas.openxmlformats.org/drawingml/2006/main">
               <a:ext uri="{FF2B5EF4-FFF2-40B4-BE49-F238E27FC236}">
-                <a16:creationId xmlns:a16="http://schemas.microsoft.com/office/drawing/2014/main" id="{029F1896-BDB3-440C-BD93-B883A16D37EF}"/>
+                <a16:creationId xmlns:a16="http://schemas.microsoft.com/office/drawing/2014/main" id="{D2C1D506-BC19-4855-8E58-5A7BC0E7B7B0}"/>
               </a:ext>
             </a:extLst>
           </p:cNvPr>
@@ -1999,7 +2651,7 @@
           <p:cNvPr id="4" name="deck-title">
             <a:extLst xmlns:a="http://schemas.openxmlformats.org/drawingml/2006/main">
               <a:ext uri="{FF2B5EF4-FFF2-40B4-BE49-F238E27FC236}">
-                <a16:creationId xmlns:a16="http://schemas.microsoft.com/office/drawing/2014/main" id="{02DABF3F-73B1-435D-B961-6DBAE5E9C889}"/>
+                <a16:creationId xmlns:a16="http://schemas.microsoft.com/office/drawing/2014/main" id="{F03F254F-EDE5-489A-81E3-D20411279DDF}"/>
               </a:ext>
             </a:extLst>
           </p:cNvPr>
@@ -2057,7 +2709,7 @@
           <p:cNvPr id="5" name="deck-thesis">
             <a:extLst xmlns:a="http://schemas.openxmlformats.org/drawingml/2006/main">
               <a:ext uri="{FF2B5EF4-FFF2-40B4-BE49-F238E27FC236}">
-                <a16:creationId xmlns:a16="http://schemas.microsoft.com/office/drawing/2014/main" id="{670924B1-DA88-40F5-A813-477A6234CE90}"/>
+                <a16:creationId xmlns:a16="http://schemas.microsoft.com/office/drawing/2014/main" id="{98916907-88FA-4027-868D-0D12BAF87445}"/>
               </a:ext>
             </a:extLst>
           </p:cNvPr>
@@ -2115,7 +2767,7 @@
           <p:cNvPr id="6" name="title-marker">
             <a:extLst xmlns:a="http://schemas.openxmlformats.org/drawingml/2006/main">
               <a:ext uri="{FF2B5EF4-FFF2-40B4-BE49-F238E27FC236}">
-                <a16:creationId xmlns:a16="http://schemas.microsoft.com/office/drawing/2014/main" id="{FAFEB564-588E-4474-AB52-C7094305E4AE}"/>
+                <a16:creationId xmlns:a16="http://schemas.microsoft.com/office/drawing/2014/main" id="{1E1E4DFC-EF7A-450F-AF7F-F7CA10E4E642}"/>
               </a:ext>
             </a:extLst>
           </p:cNvPr>
@@ -2148,7 +2800,7 @@
           <p:cNvPr id="7" name="title-marker-text">
             <a:extLst xmlns:a="http://schemas.openxmlformats.org/drawingml/2006/main">
               <a:ext uri="{FF2B5EF4-FFF2-40B4-BE49-F238E27FC236}">
-                <a16:creationId xmlns:a16="http://schemas.microsoft.com/office/drawing/2014/main" id="{385A881A-E4A5-4930-9FBB-0A9DB1C5F6DD}"/>
+                <a16:creationId xmlns:a16="http://schemas.microsoft.com/office/drawing/2014/main" id="{4EFC669F-A21F-4588-B9D0-DC33C8BA547C}"/>
               </a:ext>
             </a:extLst>
           </p:cNvPr>
@@ -2227,7 +2879,7 @@
     </p:spTree>
     <p:extLst>
       <p:ext uri="{BB962C8B-B14F-4D97-AF65-F5344CB8AC3E}">
-        <p14:creationId xmlns:p14="http://schemas.microsoft.com/office/powerpoint/2010/main" val="1303029065"/>
+        <p14:creationId xmlns:p14="http://schemas.microsoft.com/office/powerpoint/2010/main" val="1553410055"/>
       </p:ext>
     </p:extLst>
   </p:cSld>
@@ -2235,6 +2887,996 @@
 </file>
 
 <file path=ppt/slides/slide10.xml><?xml version="1.0" encoding="utf-8"?>
+<p:sld xmlns:p="http://schemas.openxmlformats.org/presentationml/2006/main">
+  <p:cSld>
+    <p:bg>
+      <p:bgPr>
+        <a:solidFill xmlns:a="http://schemas.openxmlformats.org/drawingml/2006/main">
+          <a:srgbClr val="FFFFFF"/>
+        </a:solidFill>
+      </p:bgPr>
+    </p:bg>
+    <p:spTree>
+      <p:nvGrpSpPr>
+        <p:cNvPr id="1" name=""/>
+        <p:cNvGrpSpPr/>
+        <p:nvPr/>
+      </p:nvGrpSpPr>
+      <p:grpSpPr>
+        <a:xfrm xmlns:a="http://schemas.openxmlformats.org/drawingml/2006/main"/>
+      </p:grpSpPr>
+      <p:sp>
+        <p:nvSpPr>
+          <p:cNvPr id="18" name="accent-line">
+            <a:extLst xmlns:a="http://schemas.openxmlformats.org/drawingml/2006/main">
+              <a:ext uri="{FF2B5EF4-FFF2-40B4-BE49-F238E27FC236}">
+                <a16:creationId xmlns:a16="http://schemas.microsoft.com/office/drawing/2014/main" id="{E67DE810-9F6A-44B0-9BBF-A4D749CB9CC0}"/>
+              </a:ext>
+            </a:extLst>
+          </p:cNvPr>
+          <p:cNvSpPr>
+            <a:spLocks xmlns:a="http://schemas.openxmlformats.org/drawingml/2006/main" noGrp="1"/>
+          </p:cNvSpPr>
+          <p:nvPr/>
+        </p:nvSpPr>
+        <p:spPr>
+          <a:xfrm xmlns:a="http://schemas.openxmlformats.org/drawingml/2006/main">
+            <a:off x="390525" y="304800"/>
+            <a:ext cx="11410950" cy="66675"/>
+          </a:xfrm>
+          <a:prstGeom xmlns:a="http://schemas.openxmlformats.org/drawingml/2006/main" prst="rect">
+            <a:avLst/>
+          </a:prstGeom>
+          <a:solidFill xmlns:a="http://schemas.openxmlformats.org/drawingml/2006/main">
+            <a:srgbClr val="FFB45E"/>
+          </a:solidFill>
+          <a:ln xmlns:a="http://schemas.openxmlformats.org/drawingml/2006/main" w="0">
+            <a:solidFill>
+              <a:srgbClr val="FFB45E"/>
+            </a:solidFill>
+            <a:prstDash val="solid"/>
+          </a:ln>
+        </p:spPr>
+      </p:sp>
+      <p:sp>
+        <p:nvSpPr>
+          <p:cNvPr id="2" name="chapter-label">
+            <a:extLst xmlns:a="http://schemas.openxmlformats.org/drawingml/2006/main">
+              <a:ext uri="{FF2B5EF4-FFF2-40B4-BE49-F238E27FC236}">
+                <a16:creationId xmlns:a16="http://schemas.microsoft.com/office/drawing/2014/main" id="{E46BC77D-1499-4D11-8102-F9BD9CDA08E9}"/>
+              </a:ext>
+            </a:extLst>
+          </p:cNvPr>
+          <p:cNvSpPr>
+            <a:spLocks xmlns:a="http://schemas.openxmlformats.org/drawingml/2006/main" noGrp="1"/>
+          </p:cNvSpPr>
+          <p:nvPr/>
+        </p:nvSpPr>
+        <p:spPr>
+          <a:xfrm xmlns:a="http://schemas.openxmlformats.org/drawingml/2006/main">
+            <a:off x="390525" y="466725"/>
+            <a:ext cx="4953000" cy="323850"/>
+          </a:xfrm>
+          <a:prstGeom xmlns:a="http://schemas.openxmlformats.org/drawingml/2006/main" prst="rect">
+            <a:avLst/>
+          </a:prstGeom>
+          <a:noFill xmlns:a="http://schemas.openxmlformats.org/drawingml/2006/main"/>
+          <a:ln xmlns:a="http://schemas.openxmlformats.org/drawingml/2006/main" w="0">
+            <a:noFill/>
+            <a:prstDash val="solid"/>
+          </a:ln>
+        </p:spPr>
+        <p:txBody>
+          <a:bodyPr xmlns:a="http://schemas.openxmlformats.org/drawingml/2006/main" anchor="t">
+            <a:noAutofit/>
+          </a:bodyPr>
+          <a:lstStyle xmlns:a="http://schemas.openxmlformats.org/drawingml/2006/main"/>
+          <a:p xmlns:a="http://schemas.openxmlformats.org/drawingml/2006/main">
+            <a:pPr algn="l">
+              <a:defRPr sz="1275" b="1">
+                <a:solidFill>
+                  <a:srgbClr val="5B5B57"/>
+                </a:solidFill>
+                <a:latin typeface="Helvetica Neue"/>
+                <a:ea typeface="Helvetica Neue"/>
+                <a:cs typeface="Helvetica Neue"/>
+              </a:defRPr>
+            </a:pPr>
+            <a:r>
+              <a:rPr sz="1275" b="1">
+                <a:solidFill>
+                  <a:srgbClr val="5B5B57"/>
+                </a:solidFill>
+                <a:latin typeface="Helvetica Neue"/>
+                <a:ea typeface="Helvetica Neue"/>
+                <a:cs typeface="Helvetica Neue"/>
+              </a:rPr>
+              <a:t>EXAM CHECK  /  09</a:t>
+            </a:r>
+          </a:p>
+        </p:txBody>
+      </p:sp>
+      <p:sp>
+        <p:nvSpPr>
+          <p:cNvPr id="3" name="slide-number">
+            <a:extLst xmlns:a="http://schemas.openxmlformats.org/drawingml/2006/main">
+              <a:ext uri="{FF2B5EF4-FFF2-40B4-BE49-F238E27FC236}">
+                <a16:creationId xmlns:a16="http://schemas.microsoft.com/office/drawing/2014/main" id="{9DE65C67-F73E-4F30-9FE0-3D79B8C00200}"/>
+              </a:ext>
+            </a:extLst>
+          </p:cNvPr>
+          <p:cNvSpPr>
+            <a:spLocks xmlns:a="http://schemas.openxmlformats.org/drawingml/2006/main" noGrp="1"/>
+          </p:cNvSpPr>
+          <p:nvPr/>
+        </p:nvSpPr>
+        <p:spPr>
+          <a:xfrm xmlns:a="http://schemas.openxmlformats.org/drawingml/2006/main">
+            <a:off x="11049000" y="6286500"/>
+            <a:ext cx="742950" cy="266700"/>
+          </a:xfrm>
+          <a:prstGeom xmlns:a="http://schemas.openxmlformats.org/drawingml/2006/main" prst="rect">
+            <a:avLst/>
+          </a:prstGeom>
+          <a:noFill xmlns:a="http://schemas.openxmlformats.org/drawingml/2006/main"/>
+          <a:ln xmlns:a="http://schemas.openxmlformats.org/drawingml/2006/main" w="0">
+            <a:noFill/>
+            <a:prstDash val="solid"/>
+          </a:ln>
+        </p:spPr>
+        <p:txBody>
+          <a:bodyPr xmlns:a="http://schemas.openxmlformats.org/drawingml/2006/main" anchor="t">
+            <a:noAutofit/>
+          </a:bodyPr>
+          <a:lstStyle xmlns:a="http://schemas.openxmlformats.org/drawingml/2006/main"/>
+          <a:p xmlns:a="http://schemas.openxmlformats.org/drawingml/2006/main">
+            <a:pPr algn="r">
+              <a:defRPr sz="1200" b="0">
+                <a:solidFill>
+                  <a:srgbClr val="5B5B57"/>
+                </a:solidFill>
+                <a:latin typeface="Helvetica Neue"/>
+                <a:ea typeface="Helvetica Neue"/>
+                <a:cs typeface="Helvetica Neue"/>
+              </a:defRPr>
+            </a:pPr>
+            <a:r>
+              <a:rPr sz="1200" b="0">
+                <a:solidFill>
+                  <a:srgbClr val="5B5B57"/>
+                </a:solidFill>
+                <a:latin typeface="Helvetica Neue"/>
+                <a:ea typeface="Helvetica Neue"/>
+                <a:cs typeface="Helvetica Neue"/>
+              </a:rPr>
+              <a:t>10</a:t>
+            </a:r>
+          </a:p>
+        </p:txBody>
+      </p:sp>
+      <p:sp>
+        <p:nvSpPr>
+          <p:cNvPr id="4" name="chapter-footer">
+            <a:extLst xmlns:a="http://schemas.openxmlformats.org/drawingml/2006/main">
+              <a:ext uri="{FF2B5EF4-FFF2-40B4-BE49-F238E27FC236}">
+                <a16:creationId xmlns:a16="http://schemas.microsoft.com/office/drawing/2014/main" id="{6B4D132E-D500-4AF8-8B84-CFCED7F011E0}"/>
+              </a:ext>
+            </a:extLst>
+          </p:cNvPr>
+          <p:cNvSpPr>
+            <a:spLocks xmlns:a="http://schemas.openxmlformats.org/drawingml/2006/main" noGrp="1"/>
+          </p:cNvSpPr>
+          <p:nvPr/>
+        </p:nvSpPr>
+        <p:spPr>
+          <a:xfrm xmlns:a="http://schemas.openxmlformats.org/drawingml/2006/main">
+            <a:off x="390525" y="6286500"/>
+            <a:ext cx="8191500" cy="266700"/>
+          </a:xfrm>
+          <a:prstGeom xmlns:a="http://schemas.openxmlformats.org/drawingml/2006/main" prst="rect">
+            <a:avLst/>
+          </a:prstGeom>
+          <a:noFill xmlns:a="http://schemas.openxmlformats.org/drawingml/2006/main"/>
+          <a:ln xmlns:a="http://schemas.openxmlformats.org/drawingml/2006/main" w="0">
+            <a:noFill/>
+            <a:prstDash val="solid"/>
+          </a:ln>
+        </p:spPr>
+        <p:txBody>
+          <a:bodyPr xmlns:a="http://schemas.openxmlformats.org/drawingml/2006/main" anchor="t">
+            <a:noAutofit/>
+          </a:bodyPr>
+          <a:lstStyle xmlns:a="http://schemas.openxmlformats.org/drawingml/2006/main"/>
+          <a:p xmlns:a="http://schemas.openxmlformats.org/drawingml/2006/main">
+            <a:pPr algn="l">
+              <a:defRPr sz="1125" b="0">
+                <a:solidFill>
+                  <a:srgbClr val="5B5B57"/>
+                </a:solidFill>
+                <a:latin typeface="Helvetica Neue"/>
+                <a:ea typeface="Helvetica Neue"/>
+                <a:cs typeface="Helvetica Neue"/>
+              </a:defRPr>
+            </a:pPr>
+            <a:r>
+              <a:rPr sz="1125" b="0">
+                <a:solidFill>
+                  <a:srgbClr val="5B5B57"/>
+                </a:solidFill>
+                <a:latin typeface="Helvetica Neue"/>
+                <a:ea typeface="Helvetica Neue"/>
+                <a:cs typeface="Helvetica Neue"/>
+              </a:rPr>
+              <a:t>Multi-Agent Interoperability</a:t>
+            </a:r>
+          </a:p>
+        </p:txBody>
+      </p:sp>
+      <p:sp>
+        <p:nvSpPr>
+          <p:cNvPr id="5" name="exam-title">
+            <a:extLst xmlns:a="http://schemas.openxmlformats.org/drawingml/2006/main">
+              <a:ext uri="{FF2B5EF4-FFF2-40B4-BE49-F238E27FC236}">
+                <a16:creationId xmlns:a16="http://schemas.microsoft.com/office/drawing/2014/main" id="{177FF6A4-A088-471E-8D1F-0C516C3018A5}"/>
+              </a:ext>
+            </a:extLst>
+          </p:cNvPr>
+          <p:cNvSpPr>
+            <a:spLocks xmlns:a="http://schemas.openxmlformats.org/drawingml/2006/main" noGrp="1"/>
+          </p:cNvSpPr>
+          <p:nvPr/>
+        </p:nvSpPr>
+        <p:spPr>
+          <a:xfrm xmlns:a="http://schemas.openxmlformats.org/drawingml/2006/main">
+            <a:off x="390525" y="981075"/>
+            <a:ext cx="10668000" cy="781050"/>
+          </a:xfrm>
+          <a:prstGeom xmlns:a="http://schemas.openxmlformats.org/drawingml/2006/main" prst="rect">
+            <a:avLst/>
+          </a:prstGeom>
+          <a:noFill xmlns:a="http://schemas.openxmlformats.org/drawingml/2006/main"/>
+          <a:ln xmlns:a="http://schemas.openxmlformats.org/drawingml/2006/main" w="0">
+            <a:noFill/>
+            <a:prstDash val="solid"/>
+          </a:ln>
+        </p:spPr>
+        <p:txBody>
+          <a:bodyPr xmlns:a="http://schemas.openxmlformats.org/drawingml/2006/main" anchor="t">
+            <a:noAutofit/>
+          </a:bodyPr>
+          <a:lstStyle xmlns:a="http://schemas.openxmlformats.org/drawingml/2006/main"/>
+          <a:p xmlns:a="http://schemas.openxmlformats.org/drawingml/2006/main">
+            <a:pPr algn="l">
+              <a:defRPr sz="3150" b="1">
+                <a:solidFill>
+                  <a:srgbClr val="111111"/>
+                </a:solidFill>
+                <a:latin typeface="Helvetica Neue"/>
+                <a:ea typeface="Helvetica Neue"/>
+                <a:cs typeface="Helvetica Neue"/>
+              </a:defRPr>
+            </a:pPr>
+            <a:r>
+              <a:rPr sz="3150" b="1">
+                <a:solidFill>
+                  <a:srgbClr val="111111"/>
+                </a:solidFill>
+                <a:latin typeface="Helvetica Neue"/>
+                <a:ea typeface="Helvetica Neue"/>
+                <a:cs typeface="Helvetica Neue"/>
+              </a:rPr>
+              <a:t>Can you answer these without notes?</a:t>
+            </a:r>
+          </a:p>
+        </p:txBody>
+      </p:sp>
+      <p:sp>
+        <p:nvSpPr>
+          <p:cNvPr id="6" name="exam-number-1">
+            <a:extLst xmlns:a="http://schemas.openxmlformats.org/drawingml/2006/main">
+              <a:ext uri="{FF2B5EF4-FFF2-40B4-BE49-F238E27FC236}">
+                <a16:creationId xmlns:a16="http://schemas.microsoft.com/office/drawing/2014/main" id="{49D83903-3006-4B24-B2D8-A5BDE13737DD}"/>
+              </a:ext>
+            </a:extLst>
+          </p:cNvPr>
+          <p:cNvSpPr>
+            <a:spLocks xmlns:a="http://schemas.openxmlformats.org/drawingml/2006/main" noGrp="1"/>
+          </p:cNvSpPr>
+          <p:nvPr/>
+        </p:nvSpPr>
+        <p:spPr>
+          <a:xfrm xmlns:a="http://schemas.openxmlformats.org/drawingml/2006/main">
+            <a:off x="390525" y="2238375"/>
+            <a:ext cx="590550" cy="400050"/>
+          </a:xfrm>
+          <a:prstGeom xmlns:a="http://schemas.openxmlformats.org/drawingml/2006/main" prst="rect">
+            <a:avLst/>
+          </a:prstGeom>
+          <a:noFill xmlns:a="http://schemas.openxmlformats.org/drawingml/2006/main"/>
+          <a:ln xmlns:a="http://schemas.openxmlformats.org/drawingml/2006/main" w="0">
+            <a:noFill/>
+            <a:prstDash val="solid"/>
+          </a:ln>
+        </p:spPr>
+        <p:txBody>
+          <a:bodyPr xmlns:a="http://schemas.openxmlformats.org/drawingml/2006/main" anchor="t">
+            <a:noAutofit/>
+          </a:bodyPr>
+          <a:lstStyle xmlns:a="http://schemas.openxmlformats.org/drawingml/2006/main"/>
+          <a:p xmlns:a="http://schemas.openxmlformats.org/drawingml/2006/main">
+            <a:pPr algn="l">
+              <a:defRPr sz="1725" b="1">
+                <a:solidFill>
+                  <a:srgbClr val="FFB45E"/>
+                </a:solidFill>
+                <a:latin typeface="Helvetica Neue"/>
+                <a:ea typeface="Helvetica Neue"/>
+                <a:cs typeface="Helvetica Neue"/>
+              </a:defRPr>
+            </a:pPr>
+            <a:r>
+              <a:rPr sz="1725" b="1">
+                <a:solidFill>
+                  <a:srgbClr val="FFB45E"/>
+                </a:solidFill>
+                <a:latin typeface="Helvetica Neue"/>
+                <a:ea typeface="Helvetica Neue"/>
+                <a:cs typeface="Helvetica Neue"/>
+              </a:rPr>
+              <a:t>01</a:t>
+            </a:r>
+          </a:p>
+        </p:txBody>
+      </p:sp>
+      <p:sp>
+        <p:nvSpPr>
+          <p:cNvPr id="7" name="exam-question-1">
+            <a:extLst xmlns:a="http://schemas.openxmlformats.org/drawingml/2006/main">
+              <a:ext uri="{FF2B5EF4-FFF2-40B4-BE49-F238E27FC236}">
+                <a16:creationId xmlns:a16="http://schemas.microsoft.com/office/drawing/2014/main" id="{17BDD39A-37F8-48A0-84F5-AA6F8526D0F2}"/>
+              </a:ext>
+            </a:extLst>
+          </p:cNvPr>
+          <p:cNvSpPr>
+            <a:spLocks xmlns:a="http://schemas.openxmlformats.org/drawingml/2006/main" noGrp="1"/>
+          </p:cNvSpPr>
+          <p:nvPr/>
+        </p:nvSpPr>
+        <p:spPr>
+          <a:xfrm xmlns:a="http://schemas.openxmlformats.org/drawingml/2006/main">
+            <a:off x="1076325" y="2238375"/>
+            <a:ext cx="4762500" cy="895350"/>
+          </a:xfrm>
+          <a:prstGeom xmlns:a="http://schemas.openxmlformats.org/drawingml/2006/main" prst="rect">
+            <a:avLst/>
+          </a:prstGeom>
+          <a:noFill xmlns:a="http://schemas.openxmlformats.org/drawingml/2006/main"/>
+          <a:ln xmlns:a="http://schemas.openxmlformats.org/drawingml/2006/main" w="0">
+            <a:noFill/>
+            <a:prstDash val="solid"/>
+          </a:ln>
+        </p:spPr>
+        <p:txBody>
+          <a:bodyPr xmlns:a="http://schemas.openxmlformats.org/drawingml/2006/main" anchor="t">
+            <a:normAutofit fontScale="100000"/>
+          </a:bodyPr>
+          <a:lstStyle xmlns:a="http://schemas.openxmlformats.org/drawingml/2006/main"/>
+          <a:p xmlns:a="http://schemas.openxmlformats.org/drawingml/2006/main">
+            <a:pPr algn="l">
+              <a:defRPr sz="1575" b="1">
+                <a:solidFill>
+                  <a:srgbClr val="111111"/>
+                </a:solidFill>
+                <a:latin typeface="Helvetica Neue"/>
+                <a:ea typeface="Helvetica Neue"/>
+                <a:cs typeface="Helvetica Neue"/>
+              </a:defRPr>
+            </a:pPr>
+            <a:r>
+              <a:rPr sz="1575" b="1">
+                <a:solidFill>
+                  <a:srgbClr val="111111"/>
+                </a:solidFill>
+                <a:latin typeface="Helvetica Neue"/>
+                <a:ea typeface="Helvetica Neue"/>
+                <a:cs typeface="Helvetica Neue"/>
+              </a:rPr>
+              <a:t>Why is an agent not equivalent to a simple REST endpoint?</a:t>
+            </a:r>
+          </a:p>
+        </p:txBody>
+      </p:sp>
+      <p:sp>
+        <p:nvSpPr>
+          <p:cNvPr id="8" name="exam-number-2">
+            <a:extLst xmlns:a="http://schemas.openxmlformats.org/drawingml/2006/main">
+              <a:ext uri="{FF2B5EF4-FFF2-40B4-BE49-F238E27FC236}">
+                <a16:creationId xmlns:a16="http://schemas.microsoft.com/office/drawing/2014/main" id="{A3E09A5A-57AD-4EB0-AB6C-78CA58B3D99E}"/>
+              </a:ext>
+            </a:extLst>
+          </p:cNvPr>
+          <p:cNvSpPr>
+            <a:spLocks xmlns:a="http://schemas.openxmlformats.org/drawingml/2006/main" noGrp="1"/>
+          </p:cNvSpPr>
+          <p:nvPr/>
+        </p:nvSpPr>
+        <p:spPr>
+          <a:xfrm xmlns:a="http://schemas.openxmlformats.org/drawingml/2006/main">
+            <a:off x="6191250" y="2238375"/>
+            <a:ext cx="590550" cy="400050"/>
+          </a:xfrm>
+          <a:prstGeom xmlns:a="http://schemas.openxmlformats.org/drawingml/2006/main" prst="rect">
+            <a:avLst/>
+          </a:prstGeom>
+          <a:noFill xmlns:a="http://schemas.openxmlformats.org/drawingml/2006/main"/>
+          <a:ln xmlns:a="http://schemas.openxmlformats.org/drawingml/2006/main" w="0">
+            <a:noFill/>
+            <a:prstDash val="solid"/>
+          </a:ln>
+        </p:spPr>
+        <p:txBody>
+          <a:bodyPr xmlns:a="http://schemas.openxmlformats.org/drawingml/2006/main" anchor="t">
+            <a:noAutofit/>
+          </a:bodyPr>
+          <a:lstStyle xmlns:a="http://schemas.openxmlformats.org/drawingml/2006/main"/>
+          <a:p xmlns:a="http://schemas.openxmlformats.org/drawingml/2006/main">
+            <a:pPr algn="l">
+              <a:defRPr sz="1725" b="1">
+                <a:solidFill>
+                  <a:srgbClr val="FFB45E"/>
+                </a:solidFill>
+                <a:latin typeface="Helvetica Neue"/>
+                <a:ea typeface="Helvetica Neue"/>
+                <a:cs typeface="Helvetica Neue"/>
+              </a:defRPr>
+            </a:pPr>
+            <a:r>
+              <a:rPr sz="1725" b="1">
+                <a:solidFill>
+                  <a:srgbClr val="FFB45E"/>
+                </a:solidFill>
+                <a:latin typeface="Helvetica Neue"/>
+                <a:ea typeface="Helvetica Neue"/>
+                <a:cs typeface="Helvetica Neue"/>
+              </a:rPr>
+              <a:t>02</a:t>
+            </a:r>
+          </a:p>
+        </p:txBody>
+      </p:sp>
+      <p:sp>
+        <p:nvSpPr>
+          <p:cNvPr id="9" name="exam-question-2">
+            <a:extLst xmlns:a="http://schemas.openxmlformats.org/drawingml/2006/main">
+              <a:ext uri="{FF2B5EF4-FFF2-40B4-BE49-F238E27FC236}">
+                <a16:creationId xmlns:a16="http://schemas.microsoft.com/office/drawing/2014/main" id="{FDE8F345-EB7D-48AD-99A6-8FFD3F80F084}"/>
+              </a:ext>
+            </a:extLst>
+          </p:cNvPr>
+          <p:cNvSpPr>
+            <a:spLocks xmlns:a="http://schemas.openxmlformats.org/drawingml/2006/main" noGrp="1"/>
+          </p:cNvSpPr>
+          <p:nvPr/>
+        </p:nvSpPr>
+        <p:spPr>
+          <a:xfrm xmlns:a="http://schemas.openxmlformats.org/drawingml/2006/main">
+            <a:off x="6877050" y="2238375"/>
+            <a:ext cx="4762500" cy="895350"/>
+          </a:xfrm>
+          <a:prstGeom xmlns:a="http://schemas.openxmlformats.org/drawingml/2006/main" prst="rect">
+            <a:avLst/>
+          </a:prstGeom>
+          <a:noFill xmlns:a="http://schemas.openxmlformats.org/drawingml/2006/main"/>
+          <a:ln xmlns:a="http://schemas.openxmlformats.org/drawingml/2006/main" w="0">
+            <a:noFill/>
+            <a:prstDash val="solid"/>
+          </a:ln>
+        </p:spPr>
+        <p:txBody>
+          <a:bodyPr xmlns:a="http://schemas.openxmlformats.org/drawingml/2006/main" anchor="t">
+            <a:normAutofit fontScale="100000"/>
+          </a:bodyPr>
+          <a:lstStyle xmlns:a="http://schemas.openxmlformats.org/drawingml/2006/main"/>
+          <a:p xmlns:a="http://schemas.openxmlformats.org/drawingml/2006/main">
+            <a:pPr algn="l">
+              <a:defRPr sz="1575" b="1">
+                <a:solidFill>
+                  <a:srgbClr val="111111"/>
+                </a:solidFill>
+                <a:latin typeface="Helvetica Neue"/>
+                <a:ea typeface="Helvetica Neue"/>
+                <a:cs typeface="Helvetica Neue"/>
+              </a:defRPr>
+            </a:pPr>
+            <a:r>
+              <a:rPr sz="1575" b="1">
+                <a:solidFill>
+                  <a:srgbClr val="111111"/>
+                </a:solidFill>
+                <a:latin typeface="Helvetica Neue"/>
+                <a:ea typeface="Helvetica Neue"/>
+                <a:cs typeface="Helvetica Neue"/>
+              </a:rPr>
+              <a:t>What information belongs in an Agent Card?</a:t>
+            </a:r>
+          </a:p>
+        </p:txBody>
+      </p:sp>
+      <p:sp>
+        <p:nvSpPr>
+          <p:cNvPr id="10" name="exam-number-3">
+            <a:extLst xmlns:a="http://schemas.openxmlformats.org/drawingml/2006/main">
+              <a:ext uri="{FF2B5EF4-FFF2-40B4-BE49-F238E27FC236}">
+                <a16:creationId xmlns:a16="http://schemas.microsoft.com/office/drawing/2014/main" id="{623B6B21-46FC-4CE7-8D7D-615221468F01}"/>
+              </a:ext>
+            </a:extLst>
+          </p:cNvPr>
+          <p:cNvSpPr>
+            <a:spLocks xmlns:a="http://schemas.openxmlformats.org/drawingml/2006/main" noGrp="1"/>
+          </p:cNvSpPr>
+          <p:nvPr/>
+        </p:nvSpPr>
+        <p:spPr>
+          <a:xfrm xmlns:a="http://schemas.openxmlformats.org/drawingml/2006/main">
+            <a:off x="390525" y="3495675"/>
+            <a:ext cx="590550" cy="400050"/>
+          </a:xfrm>
+          <a:prstGeom xmlns:a="http://schemas.openxmlformats.org/drawingml/2006/main" prst="rect">
+            <a:avLst/>
+          </a:prstGeom>
+          <a:noFill xmlns:a="http://schemas.openxmlformats.org/drawingml/2006/main"/>
+          <a:ln xmlns:a="http://schemas.openxmlformats.org/drawingml/2006/main" w="0">
+            <a:noFill/>
+            <a:prstDash val="solid"/>
+          </a:ln>
+        </p:spPr>
+        <p:txBody>
+          <a:bodyPr xmlns:a="http://schemas.openxmlformats.org/drawingml/2006/main" anchor="t">
+            <a:noAutofit/>
+          </a:bodyPr>
+          <a:lstStyle xmlns:a="http://schemas.openxmlformats.org/drawingml/2006/main"/>
+          <a:p xmlns:a="http://schemas.openxmlformats.org/drawingml/2006/main">
+            <a:pPr algn="l">
+              <a:defRPr sz="1725" b="1">
+                <a:solidFill>
+                  <a:srgbClr val="FFB45E"/>
+                </a:solidFill>
+                <a:latin typeface="Helvetica Neue"/>
+                <a:ea typeface="Helvetica Neue"/>
+                <a:cs typeface="Helvetica Neue"/>
+              </a:defRPr>
+            </a:pPr>
+            <a:r>
+              <a:rPr sz="1725" b="1">
+                <a:solidFill>
+                  <a:srgbClr val="FFB45E"/>
+                </a:solidFill>
+                <a:latin typeface="Helvetica Neue"/>
+                <a:ea typeface="Helvetica Neue"/>
+                <a:cs typeface="Helvetica Neue"/>
+              </a:rPr>
+              <a:t>03</a:t>
+            </a:r>
+          </a:p>
+        </p:txBody>
+      </p:sp>
+      <p:sp>
+        <p:nvSpPr>
+          <p:cNvPr id="11" name="exam-question-3">
+            <a:extLst xmlns:a="http://schemas.openxmlformats.org/drawingml/2006/main">
+              <a:ext uri="{FF2B5EF4-FFF2-40B4-BE49-F238E27FC236}">
+                <a16:creationId xmlns:a16="http://schemas.microsoft.com/office/drawing/2014/main" id="{82A6945D-1F7C-43EB-B223-9C57F13C0157}"/>
+              </a:ext>
+            </a:extLst>
+          </p:cNvPr>
+          <p:cNvSpPr>
+            <a:spLocks xmlns:a="http://schemas.openxmlformats.org/drawingml/2006/main" noGrp="1"/>
+          </p:cNvSpPr>
+          <p:nvPr/>
+        </p:nvSpPr>
+        <p:spPr>
+          <a:xfrm xmlns:a="http://schemas.openxmlformats.org/drawingml/2006/main">
+            <a:off x="1076325" y="3495675"/>
+            <a:ext cx="4762500" cy="895350"/>
+          </a:xfrm>
+          <a:prstGeom xmlns:a="http://schemas.openxmlformats.org/drawingml/2006/main" prst="rect">
+            <a:avLst/>
+          </a:prstGeom>
+          <a:noFill xmlns:a="http://schemas.openxmlformats.org/drawingml/2006/main"/>
+          <a:ln xmlns:a="http://schemas.openxmlformats.org/drawingml/2006/main" w="0">
+            <a:noFill/>
+            <a:prstDash val="solid"/>
+          </a:ln>
+        </p:spPr>
+        <p:txBody>
+          <a:bodyPr xmlns:a="http://schemas.openxmlformats.org/drawingml/2006/main" anchor="t">
+            <a:normAutofit fontScale="100000"/>
+          </a:bodyPr>
+          <a:lstStyle xmlns:a="http://schemas.openxmlformats.org/drawingml/2006/main"/>
+          <a:p xmlns:a="http://schemas.openxmlformats.org/drawingml/2006/main">
+            <a:pPr algn="l">
+              <a:defRPr sz="1575" b="1">
+                <a:solidFill>
+                  <a:srgbClr val="111111"/>
+                </a:solidFill>
+                <a:latin typeface="Helvetica Neue"/>
+                <a:ea typeface="Helvetica Neue"/>
+                <a:cs typeface="Helvetica Neue"/>
+              </a:defRPr>
+            </a:pPr>
+            <a:r>
+              <a:rPr sz="1575" b="1">
+                <a:solidFill>
+                  <a:srgbClr val="111111"/>
+                </a:solidFill>
+                <a:latin typeface="Helvetica Neue"/>
+                <a:ea typeface="Helvetica Neue"/>
+                <a:cs typeface="Helvetica Neue"/>
+              </a:rPr>
+              <a:t>Define task, message, part, and artifact.</a:t>
+            </a:r>
+          </a:p>
+        </p:txBody>
+      </p:sp>
+      <p:sp>
+        <p:nvSpPr>
+          <p:cNvPr id="12" name="exam-number-4">
+            <a:extLst xmlns:a="http://schemas.openxmlformats.org/drawingml/2006/main">
+              <a:ext uri="{FF2B5EF4-FFF2-40B4-BE49-F238E27FC236}">
+                <a16:creationId xmlns:a16="http://schemas.microsoft.com/office/drawing/2014/main" id="{1850B2E4-865A-4C47-B46C-0AB03F836A53}"/>
+              </a:ext>
+            </a:extLst>
+          </p:cNvPr>
+          <p:cNvSpPr>
+            <a:spLocks xmlns:a="http://schemas.openxmlformats.org/drawingml/2006/main" noGrp="1"/>
+          </p:cNvSpPr>
+          <p:nvPr/>
+        </p:nvSpPr>
+        <p:spPr>
+          <a:xfrm xmlns:a="http://schemas.openxmlformats.org/drawingml/2006/main">
+            <a:off x="6191250" y="3495675"/>
+            <a:ext cx="590550" cy="400050"/>
+          </a:xfrm>
+          <a:prstGeom xmlns:a="http://schemas.openxmlformats.org/drawingml/2006/main" prst="rect">
+            <a:avLst/>
+          </a:prstGeom>
+          <a:noFill xmlns:a="http://schemas.openxmlformats.org/drawingml/2006/main"/>
+          <a:ln xmlns:a="http://schemas.openxmlformats.org/drawingml/2006/main" w="0">
+            <a:noFill/>
+            <a:prstDash val="solid"/>
+          </a:ln>
+        </p:spPr>
+        <p:txBody>
+          <a:bodyPr xmlns:a="http://schemas.openxmlformats.org/drawingml/2006/main" anchor="t">
+            <a:noAutofit/>
+          </a:bodyPr>
+          <a:lstStyle xmlns:a="http://schemas.openxmlformats.org/drawingml/2006/main"/>
+          <a:p xmlns:a="http://schemas.openxmlformats.org/drawingml/2006/main">
+            <a:pPr algn="l">
+              <a:defRPr sz="1725" b="1">
+                <a:solidFill>
+                  <a:srgbClr val="FFB45E"/>
+                </a:solidFill>
+                <a:latin typeface="Helvetica Neue"/>
+                <a:ea typeface="Helvetica Neue"/>
+                <a:cs typeface="Helvetica Neue"/>
+              </a:defRPr>
+            </a:pPr>
+            <a:r>
+              <a:rPr sz="1725" b="1">
+                <a:solidFill>
+                  <a:srgbClr val="FFB45E"/>
+                </a:solidFill>
+                <a:latin typeface="Helvetica Neue"/>
+                <a:ea typeface="Helvetica Neue"/>
+                <a:cs typeface="Helvetica Neue"/>
+              </a:rPr>
+              <a:t>04</a:t>
+            </a:r>
+          </a:p>
+        </p:txBody>
+      </p:sp>
+      <p:sp>
+        <p:nvSpPr>
+          <p:cNvPr id="13" name="exam-question-4">
+            <a:extLst xmlns:a="http://schemas.openxmlformats.org/drawingml/2006/main">
+              <a:ext uri="{FF2B5EF4-FFF2-40B4-BE49-F238E27FC236}">
+                <a16:creationId xmlns:a16="http://schemas.microsoft.com/office/drawing/2014/main" id="{E6DDEEC5-C6D2-4DB2-B418-6A0047B7E008}"/>
+              </a:ext>
+            </a:extLst>
+          </p:cNvPr>
+          <p:cNvSpPr>
+            <a:spLocks xmlns:a="http://schemas.openxmlformats.org/drawingml/2006/main" noGrp="1"/>
+          </p:cNvSpPr>
+          <p:nvPr/>
+        </p:nvSpPr>
+        <p:spPr>
+          <a:xfrm xmlns:a="http://schemas.openxmlformats.org/drawingml/2006/main">
+            <a:off x="6877050" y="3495675"/>
+            <a:ext cx="4762500" cy="895350"/>
+          </a:xfrm>
+          <a:prstGeom xmlns:a="http://schemas.openxmlformats.org/drawingml/2006/main" prst="rect">
+            <a:avLst/>
+          </a:prstGeom>
+          <a:noFill xmlns:a="http://schemas.openxmlformats.org/drawingml/2006/main"/>
+          <a:ln xmlns:a="http://schemas.openxmlformats.org/drawingml/2006/main" w="0">
+            <a:noFill/>
+            <a:prstDash val="solid"/>
+          </a:ln>
+        </p:spPr>
+        <p:txBody>
+          <a:bodyPr xmlns:a="http://schemas.openxmlformats.org/drawingml/2006/main" anchor="t">
+            <a:normAutofit fontScale="100000"/>
+          </a:bodyPr>
+          <a:lstStyle xmlns:a="http://schemas.openxmlformats.org/drawingml/2006/main"/>
+          <a:p xmlns:a="http://schemas.openxmlformats.org/drawingml/2006/main">
+            <a:pPr algn="l">
+              <a:defRPr sz="1575" b="1">
+                <a:solidFill>
+                  <a:srgbClr val="111111"/>
+                </a:solidFill>
+                <a:latin typeface="Helvetica Neue"/>
+                <a:ea typeface="Helvetica Neue"/>
+                <a:cs typeface="Helvetica Neue"/>
+              </a:defRPr>
+            </a:pPr>
+            <a:r>
+              <a:rPr sz="1575" b="1">
+                <a:solidFill>
+                  <a:srgbClr val="111111"/>
+                </a:solidFill>
+                <a:latin typeface="Helvetica Neue"/>
+                <a:ea typeface="Helvetica Neue"/>
+                <a:cs typeface="Helvetica Neue"/>
+              </a:rPr>
+              <a:t>How does A2A support long-running work?</a:t>
+            </a:r>
+          </a:p>
+        </p:txBody>
+      </p:sp>
+      <p:sp>
+        <p:nvSpPr>
+          <p:cNvPr id="14" name="exam-number-5">
+            <a:extLst xmlns:a="http://schemas.openxmlformats.org/drawingml/2006/main">
+              <a:ext uri="{FF2B5EF4-FFF2-40B4-BE49-F238E27FC236}">
+                <a16:creationId xmlns:a16="http://schemas.microsoft.com/office/drawing/2014/main" id="{B0C99E1F-DE9B-4778-89E4-538F39FFD83E}"/>
+              </a:ext>
+            </a:extLst>
+          </p:cNvPr>
+          <p:cNvSpPr>
+            <a:spLocks xmlns:a="http://schemas.openxmlformats.org/drawingml/2006/main" noGrp="1"/>
+          </p:cNvSpPr>
+          <p:nvPr/>
+        </p:nvSpPr>
+        <p:spPr>
+          <a:xfrm xmlns:a="http://schemas.openxmlformats.org/drawingml/2006/main">
+            <a:off x="390525" y="4752975"/>
+            <a:ext cx="590550" cy="400050"/>
+          </a:xfrm>
+          <a:prstGeom xmlns:a="http://schemas.openxmlformats.org/drawingml/2006/main" prst="rect">
+            <a:avLst/>
+          </a:prstGeom>
+          <a:noFill xmlns:a="http://schemas.openxmlformats.org/drawingml/2006/main"/>
+          <a:ln xmlns:a="http://schemas.openxmlformats.org/drawingml/2006/main" w="0">
+            <a:noFill/>
+            <a:prstDash val="solid"/>
+          </a:ln>
+        </p:spPr>
+        <p:txBody>
+          <a:bodyPr xmlns:a="http://schemas.openxmlformats.org/drawingml/2006/main" anchor="t">
+            <a:noAutofit/>
+          </a:bodyPr>
+          <a:lstStyle xmlns:a="http://schemas.openxmlformats.org/drawingml/2006/main"/>
+          <a:p xmlns:a="http://schemas.openxmlformats.org/drawingml/2006/main">
+            <a:pPr algn="l">
+              <a:defRPr sz="1725" b="1">
+                <a:solidFill>
+                  <a:srgbClr val="FFB45E"/>
+                </a:solidFill>
+                <a:latin typeface="Helvetica Neue"/>
+                <a:ea typeface="Helvetica Neue"/>
+                <a:cs typeface="Helvetica Neue"/>
+              </a:defRPr>
+            </a:pPr>
+            <a:r>
+              <a:rPr sz="1725" b="1">
+                <a:solidFill>
+                  <a:srgbClr val="FFB45E"/>
+                </a:solidFill>
+                <a:latin typeface="Helvetica Neue"/>
+                <a:ea typeface="Helvetica Neue"/>
+                <a:cs typeface="Helvetica Neue"/>
+              </a:rPr>
+              <a:t>05</a:t>
+            </a:r>
+          </a:p>
+        </p:txBody>
+      </p:sp>
+      <p:sp>
+        <p:nvSpPr>
+          <p:cNvPr id="15" name="exam-question-5">
+            <a:extLst xmlns:a="http://schemas.openxmlformats.org/drawingml/2006/main">
+              <a:ext uri="{FF2B5EF4-FFF2-40B4-BE49-F238E27FC236}">
+                <a16:creationId xmlns:a16="http://schemas.microsoft.com/office/drawing/2014/main" id="{863EAD78-1C58-4311-BA9F-0C53AEA47BA9}"/>
+              </a:ext>
+            </a:extLst>
+          </p:cNvPr>
+          <p:cNvSpPr>
+            <a:spLocks xmlns:a="http://schemas.openxmlformats.org/drawingml/2006/main" noGrp="1"/>
+          </p:cNvSpPr>
+          <p:nvPr/>
+        </p:nvSpPr>
+        <p:spPr>
+          <a:xfrm xmlns:a="http://schemas.openxmlformats.org/drawingml/2006/main">
+            <a:off x="1076325" y="4752975"/>
+            <a:ext cx="4762500" cy="895350"/>
+          </a:xfrm>
+          <a:prstGeom xmlns:a="http://schemas.openxmlformats.org/drawingml/2006/main" prst="rect">
+            <a:avLst/>
+          </a:prstGeom>
+          <a:noFill xmlns:a="http://schemas.openxmlformats.org/drawingml/2006/main"/>
+          <a:ln xmlns:a="http://schemas.openxmlformats.org/drawingml/2006/main" w="0">
+            <a:noFill/>
+            <a:prstDash val="solid"/>
+          </a:ln>
+        </p:spPr>
+        <p:txBody>
+          <a:bodyPr xmlns:a="http://schemas.openxmlformats.org/drawingml/2006/main" anchor="t">
+            <a:normAutofit fontScale="100000"/>
+          </a:bodyPr>
+          <a:lstStyle xmlns:a="http://schemas.openxmlformats.org/drawingml/2006/main"/>
+          <a:p xmlns:a="http://schemas.openxmlformats.org/drawingml/2006/main">
+            <a:pPr algn="l">
+              <a:defRPr sz="1575" b="1">
+                <a:solidFill>
+                  <a:srgbClr val="111111"/>
+                </a:solidFill>
+                <a:latin typeface="Helvetica Neue"/>
+                <a:ea typeface="Helvetica Neue"/>
+                <a:cs typeface="Helvetica Neue"/>
+              </a:defRPr>
+            </a:pPr>
+            <a:r>
+              <a:rPr sz="1575" b="1">
+                <a:solidFill>
+                  <a:srgbClr val="111111"/>
+                </a:solidFill>
+                <a:latin typeface="Helvetica Neue"/>
+                <a:ea typeface="Helvetica Neue"/>
+                <a:cs typeface="Helvetica Neue"/>
+              </a:rPr>
+              <a:t>Compare MCP and A2A with a concrete example.</a:t>
+            </a:r>
+          </a:p>
+        </p:txBody>
+      </p:sp>
+      <p:sp>
+        <p:nvSpPr>
+          <p:cNvPr id="16" name="exam-number-6">
+            <a:extLst xmlns:a="http://schemas.openxmlformats.org/drawingml/2006/main">
+              <a:ext uri="{FF2B5EF4-FFF2-40B4-BE49-F238E27FC236}">
+                <a16:creationId xmlns:a16="http://schemas.microsoft.com/office/drawing/2014/main" id="{6EC107E4-A560-46A6-9955-142206596E93}"/>
+              </a:ext>
+            </a:extLst>
+          </p:cNvPr>
+          <p:cNvSpPr>
+            <a:spLocks xmlns:a="http://schemas.openxmlformats.org/drawingml/2006/main" noGrp="1"/>
+          </p:cNvSpPr>
+          <p:nvPr/>
+        </p:nvSpPr>
+        <p:spPr>
+          <a:xfrm xmlns:a="http://schemas.openxmlformats.org/drawingml/2006/main">
+            <a:off x="6191250" y="4752975"/>
+            <a:ext cx="590550" cy="400050"/>
+          </a:xfrm>
+          <a:prstGeom xmlns:a="http://schemas.openxmlformats.org/drawingml/2006/main" prst="rect">
+            <a:avLst/>
+          </a:prstGeom>
+          <a:noFill xmlns:a="http://schemas.openxmlformats.org/drawingml/2006/main"/>
+          <a:ln xmlns:a="http://schemas.openxmlformats.org/drawingml/2006/main" w="0">
+            <a:noFill/>
+            <a:prstDash val="solid"/>
+          </a:ln>
+        </p:spPr>
+        <p:txBody>
+          <a:bodyPr xmlns:a="http://schemas.openxmlformats.org/drawingml/2006/main" anchor="t">
+            <a:noAutofit/>
+          </a:bodyPr>
+          <a:lstStyle xmlns:a="http://schemas.openxmlformats.org/drawingml/2006/main"/>
+          <a:p xmlns:a="http://schemas.openxmlformats.org/drawingml/2006/main">
+            <a:pPr algn="l">
+              <a:defRPr sz="1725" b="1">
+                <a:solidFill>
+                  <a:srgbClr val="FFB45E"/>
+                </a:solidFill>
+                <a:latin typeface="Helvetica Neue"/>
+                <a:ea typeface="Helvetica Neue"/>
+                <a:cs typeface="Helvetica Neue"/>
+              </a:defRPr>
+            </a:pPr>
+            <a:r>
+              <a:rPr sz="1725" b="1">
+                <a:solidFill>
+                  <a:srgbClr val="FFB45E"/>
+                </a:solidFill>
+                <a:latin typeface="Helvetica Neue"/>
+                <a:ea typeface="Helvetica Neue"/>
+                <a:cs typeface="Helvetica Neue"/>
+              </a:rPr>
+              <a:t>06</a:t>
+            </a:r>
+          </a:p>
+        </p:txBody>
+      </p:sp>
+      <p:sp>
+        <p:nvSpPr>
+          <p:cNvPr id="17" name="exam-question-6">
+            <a:extLst xmlns:a="http://schemas.openxmlformats.org/drawingml/2006/main">
+              <a:ext uri="{FF2B5EF4-FFF2-40B4-BE49-F238E27FC236}">
+                <a16:creationId xmlns:a16="http://schemas.microsoft.com/office/drawing/2014/main" id="{9DE5C0F5-5999-4047-89F2-A792A7C19BE1}"/>
+              </a:ext>
+            </a:extLst>
+          </p:cNvPr>
+          <p:cNvSpPr>
+            <a:spLocks xmlns:a="http://schemas.openxmlformats.org/drawingml/2006/main" noGrp="1"/>
+          </p:cNvSpPr>
+          <p:nvPr/>
+        </p:nvSpPr>
+        <p:spPr>
+          <a:xfrm xmlns:a="http://schemas.openxmlformats.org/drawingml/2006/main">
+            <a:off x="6877050" y="4752975"/>
+            <a:ext cx="4762500" cy="895350"/>
+          </a:xfrm>
+          <a:prstGeom xmlns:a="http://schemas.openxmlformats.org/drawingml/2006/main" prst="rect">
+            <a:avLst/>
+          </a:prstGeom>
+          <a:noFill xmlns:a="http://schemas.openxmlformats.org/drawingml/2006/main"/>
+          <a:ln xmlns:a="http://schemas.openxmlformats.org/drawingml/2006/main" w="0">
+            <a:noFill/>
+            <a:prstDash val="solid"/>
+          </a:ln>
+        </p:spPr>
+        <p:txBody>
+          <a:bodyPr xmlns:a="http://schemas.openxmlformats.org/drawingml/2006/main" anchor="t">
+            <a:normAutofit fontScale="100000"/>
+          </a:bodyPr>
+          <a:lstStyle xmlns:a="http://schemas.openxmlformats.org/drawingml/2006/main"/>
+          <a:p xmlns:a="http://schemas.openxmlformats.org/drawingml/2006/main">
+            <a:pPr algn="l">
+              <a:defRPr sz="1575" b="1">
+                <a:solidFill>
+                  <a:srgbClr val="111111"/>
+                </a:solidFill>
+                <a:latin typeface="Helvetica Neue"/>
+                <a:ea typeface="Helvetica Neue"/>
+                <a:cs typeface="Helvetica Neue"/>
+              </a:defRPr>
+            </a:pPr>
+            <a:r>
+              <a:rPr sz="1575" b="1">
+                <a:solidFill>
+                  <a:srgbClr val="111111"/>
+                </a:solidFill>
+                <a:latin typeface="Helvetica Neue"/>
+                <a:ea typeface="Helvetica Neue"/>
+                <a:cs typeface="Helvetica Neue"/>
+              </a:rPr>
+              <a:t>Which responsibilities remain in the application after it adopts an interoperability protocol?</a:t>
+            </a:r>
+          </a:p>
+        </p:txBody>
+      </p:sp>
+    </p:spTree>
+    <p:extLst>
+      <p:ext uri="{BB962C8B-B14F-4D97-AF65-F5344CB8AC3E}">
+        <p14:creationId xmlns:p14="http://schemas.microsoft.com/office/powerpoint/2010/main" val="2054828455"/>
+      </p:ext>
+    </p:extLst>
+  </p:cSld>
+</p:sld>
+</file>
+
+<file path=ppt/slides/slide11.xml><?xml version="1.0" encoding="utf-8"?>
 <p:sld xmlns:p="http://schemas.openxmlformats.org/presentationml/2006/main">
   <p:cSld>
     <p:bg>
@@ -2258,7 +3900,7 @@
           <p:cNvPr id="14" name="accent-line">
             <a:extLst xmlns:a="http://schemas.openxmlformats.org/drawingml/2006/main">
               <a:ext uri="{FF2B5EF4-FFF2-40B4-BE49-F238E27FC236}">
-                <a16:creationId xmlns:a16="http://schemas.microsoft.com/office/drawing/2014/main" id="{A6FE7ADA-9D50-41BE-B4CB-9B2B66287699}"/>
+                <a16:creationId xmlns:a16="http://schemas.microsoft.com/office/drawing/2014/main" id="{D1DD3924-4569-4D54-B18C-C881492A0C0B}"/>
               </a:ext>
             </a:extLst>
           </p:cNvPr>
@@ -2291,7 +3933,7 @@
           <p:cNvPr id="2" name="chapter-label">
             <a:extLst xmlns:a="http://schemas.openxmlformats.org/drawingml/2006/main">
               <a:ext uri="{FF2B5EF4-FFF2-40B4-BE49-F238E27FC236}">
-                <a16:creationId xmlns:a16="http://schemas.microsoft.com/office/drawing/2014/main" id="{01307E67-66E4-4631-8C5A-79D19162B451}"/>
+                <a16:creationId xmlns:a16="http://schemas.microsoft.com/office/drawing/2014/main" id="{D3CEDEFB-F004-4966-90C5-569632F24C12}"/>
               </a:ext>
             </a:extLst>
           </p:cNvPr>
@@ -2349,7 +3991,7 @@
           <p:cNvPr id="3" name="slide-number">
             <a:extLst xmlns:a="http://schemas.openxmlformats.org/drawingml/2006/main">
               <a:ext uri="{FF2B5EF4-FFF2-40B4-BE49-F238E27FC236}">
-                <a16:creationId xmlns:a16="http://schemas.microsoft.com/office/drawing/2014/main" id="{1C2A3CBE-749B-4791-88D7-4A7D50B5A9D0}"/>
+                <a16:creationId xmlns:a16="http://schemas.microsoft.com/office/drawing/2014/main" id="{02AF48CC-1D0C-49FA-8368-A8880079A4A4}"/>
               </a:ext>
             </a:extLst>
           </p:cNvPr>
@@ -2397,7 +4039,7 @@
                 <a:ea typeface="Helvetica Neue"/>
                 <a:cs typeface="Helvetica Neue"/>
               </a:rPr>
-              <a:t>10</a:t>
+              <a:t>11</a:t>
             </a:r>
           </a:p>
         </p:txBody>
@@ -2407,7 +4049,7 @@
           <p:cNvPr id="4" name="chapter-footer">
             <a:extLst xmlns:a="http://schemas.openxmlformats.org/drawingml/2006/main">
               <a:ext uri="{FF2B5EF4-FFF2-40B4-BE49-F238E27FC236}">
-                <a16:creationId xmlns:a16="http://schemas.microsoft.com/office/drawing/2014/main" id="{85AC5192-B16B-4A3C-941A-24C4580FEB70}"/>
+                <a16:creationId xmlns:a16="http://schemas.microsoft.com/office/drawing/2014/main" id="{05DA940E-8D9A-46FD-81B8-3CAFD3387AF4}"/>
               </a:ext>
             </a:extLst>
           </p:cNvPr>
@@ -2465,7 +4107,7 @@
           <p:cNvPr id="5" name="closing-title">
             <a:extLst xmlns:a="http://schemas.openxmlformats.org/drawingml/2006/main">
               <a:ext uri="{FF2B5EF4-FFF2-40B4-BE49-F238E27FC236}">
-                <a16:creationId xmlns:a16="http://schemas.microsoft.com/office/drawing/2014/main" id="{DAE90BD3-15C6-4B4A-B1B4-9B837A6D2515}"/>
+                <a16:creationId xmlns:a16="http://schemas.microsoft.com/office/drawing/2014/main" id="{AF56CFB5-FBC6-42B7-867F-9AEF6846955A}"/>
               </a:ext>
             </a:extLst>
           </p:cNvPr>
@@ -2523,7 +4165,7 @@
           <p:cNvPr id="6" name="takeaway-number-1">
             <a:extLst xmlns:a="http://schemas.openxmlformats.org/drawingml/2006/main">
               <a:ext uri="{FF2B5EF4-FFF2-40B4-BE49-F238E27FC236}">
-                <a16:creationId xmlns:a16="http://schemas.microsoft.com/office/drawing/2014/main" id="{C0824A2C-ECD0-4ECB-9B7F-884D0519DD2D}"/>
+                <a16:creationId xmlns:a16="http://schemas.microsoft.com/office/drawing/2014/main" id="{B972D655-F528-4E80-B711-68A698F0F9B2}"/>
               </a:ext>
             </a:extLst>
           </p:cNvPr>
@@ -2581,7 +4223,7 @@
           <p:cNvPr id="7" name="takeaway-1">
             <a:extLst xmlns:a="http://schemas.openxmlformats.org/drawingml/2006/main">
               <a:ext uri="{FF2B5EF4-FFF2-40B4-BE49-F238E27FC236}">
-                <a16:creationId xmlns:a16="http://schemas.microsoft.com/office/drawing/2014/main" id="{24EFF0A1-8C0B-4EAB-90F2-ACB257B37C13}"/>
+                <a16:creationId xmlns:a16="http://schemas.microsoft.com/office/drawing/2014/main" id="{F89ECFC6-F4FE-44E9-B503-CB13D69E0FDD}"/>
               </a:ext>
             </a:extLst>
           </p:cNvPr>
@@ -2639,7 +4281,7 @@
           <p:cNvPr id="8" name="takeaway-number-2">
             <a:extLst xmlns:a="http://schemas.openxmlformats.org/drawingml/2006/main">
               <a:ext uri="{FF2B5EF4-FFF2-40B4-BE49-F238E27FC236}">
-                <a16:creationId xmlns:a16="http://schemas.microsoft.com/office/drawing/2014/main" id="{AC3F2871-A044-47BD-A26F-6B919FED6BF8}"/>
+                <a16:creationId xmlns:a16="http://schemas.microsoft.com/office/drawing/2014/main" id="{1A032F53-B553-470C-99DF-E6034D1517E9}"/>
               </a:ext>
             </a:extLst>
           </p:cNvPr>
@@ -2697,7 +4339,7 @@
           <p:cNvPr id="9" name="takeaway-2">
             <a:extLst xmlns:a="http://schemas.openxmlformats.org/drawingml/2006/main">
               <a:ext uri="{FF2B5EF4-FFF2-40B4-BE49-F238E27FC236}">
-                <a16:creationId xmlns:a16="http://schemas.microsoft.com/office/drawing/2014/main" id="{1D851F6D-6791-4CAD-B724-EFE17C58471A}"/>
+                <a16:creationId xmlns:a16="http://schemas.microsoft.com/office/drawing/2014/main" id="{2965A9B7-FE27-4990-95DC-4475AA65C5F7}"/>
               </a:ext>
             </a:extLst>
           </p:cNvPr>
@@ -2755,7 +4397,7 @@
           <p:cNvPr id="10" name="takeaway-number-3">
             <a:extLst xmlns:a="http://schemas.openxmlformats.org/drawingml/2006/main">
               <a:ext uri="{FF2B5EF4-FFF2-40B4-BE49-F238E27FC236}">
-                <a16:creationId xmlns:a16="http://schemas.microsoft.com/office/drawing/2014/main" id="{A7F16DD3-98C5-49C0-AB1A-15823E999FDB}"/>
+                <a16:creationId xmlns:a16="http://schemas.microsoft.com/office/drawing/2014/main" id="{3B0C9A7A-7C6E-421D-A56C-944096A7C6AC}"/>
               </a:ext>
             </a:extLst>
           </p:cNvPr>
@@ -2813,7 +4455,7 @@
           <p:cNvPr id="11" name="takeaway-3">
             <a:extLst xmlns:a="http://schemas.openxmlformats.org/drawingml/2006/main">
               <a:ext uri="{FF2B5EF4-FFF2-40B4-BE49-F238E27FC236}">
-                <a16:creationId xmlns:a16="http://schemas.microsoft.com/office/drawing/2014/main" id="{82F586A1-0281-4E25-B47F-A0CBA8E58E4E}"/>
+                <a16:creationId xmlns:a16="http://schemas.microsoft.com/office/drawing/2014/main" id="{239FDA4A-D689-4B8C-8A24-97B83C4C2DED}"/>
               </a:ext>
             </a:extLst>
           </p:cNvPr>
@@ -2871,7 +4513,7 @@
           <p:cNvPr id="12" name="takeaway-number-4">
             <a:extLst xmlns:a="http://schemas.openxmlformats.org/drawingml/2006/main">
               <a:ext uri="{FF2B5EF4-FFF2-40B4-BE49-F238E27FC236}">
-                <a16:creationId xmlns:a16="http://schemas.microsoft.com/office/drawing/2014/main" id="{527CFB21-16B4-4257-B6C8-8CA5D4A55C30}"/>
+                <a16:creationId xmlns:a16="http://schemas.microsoft.com/office/drawing/2014/main" id="{87C5CB7F-CD2C-4B19-9C78-27C834188A59}"/>
               </a:ext>
             </a:extLst>
           </p:cNvPr>
@@ -2929,7 +4571,7 @@
           <p:cNvPr id="13" name="takeaway-4">
             <a:extLst xmlns:a="http://schemas.openxmlformats.org/drawingml/2006/main">
               <a:ext uri="{FF2B5EF4-FFF2-40B4-BE49-F238E27FC236}">
-                <a16:creationId xmlns:a16="http://schemas.microsoft.com/office/drawing/2014/main" id="{BBEC37D9-BF2C-4037-A685-34B719647403}"/>
+                <a16:creationId xmlns:a16="http://schemas.microsoft.com/office/drawing/2014/main" id="{6D7C10A3-93CC-4438-BD2A-AD9755DA210D}"/>
               </a:ext>
             </a:extLst>
           </p:cNvPr>
@@ -2985,7 +4627,533 @@
     </p:spTree>
     <p:extLst>
       <p:ext uri="{BB962C8B-B14F-4D97-AF65-F5344CB8AC3E}">
-        <p14:creationId xmlns:p14="http://schemas.microsoft.com/office/powerpoint/2010/main" val="1933811040"/>
+        <p14:creationId xmlns:p14="http://schemas.microsoft.com/office/powerpoint/2010/main" val="539544457"/>
+      </p:ext>
+    </p:extLst>
+  </p:cSld>
+</p:sld>
+</file>
+
+<file path=ppt/slides/slide12.xml><?xml version="1.0" encoding="utf-8"?>
+<p:sld xmlns:p="http://schemas.openxmlformats.org/presentationml/2006/main">
+  <p:cSld>
+    <p:bg>
+      <p:bgPr>
+        <a:solidFill xmlns:a="http://schemas.openxmlformats.org/drawingml/2006/main">
+          <a:srgbClr val="FFFFFF"/>
+        </a:solidFill>
+      </p:bgPr>
+    </p:bg>
+    <p:spTree>
+      <p:nvGrpSpPr>
+        <p:cNvPr id="1" name=""/>
+        <p:cNvGrpSpPr/>
+        <p:nvPr/>
+      </p:nvGrpSpPr>
+      <p:grpSpPr>
+        <a:xfrm xmlns:a="http://schemas.openxmlformats.org/drawingml/2006/main"/>
+      </p:grpSpPr>
+      <p:sp>
+        <p:nvSpPr>
+          <p:cNvPr id="10" name="accent-line">
+            <a:extLst xmlns:a="http://schemas.openxmlformats.org/drawingml/2006/main">
+              <a:ext uri="{FF2B5EF4-FFF2-40B4-BE49-F238E27FC236}">
+                <a16:creationId xmlns:a16="http://schemas.microsoft.com/office/drawing/2014/main" id="{F9E9D9A3-666A-4967-8F1A-CBE3B6B50A94}"/>
+              </a:ext>
+            </a:extLst>
+          </p:cNvPr>
+          <p:cNvSpPr>
+            <a:spLocks xmlns:a="http://schemas.openxmlformats.org/drawingml/2006/main" noGrp="1"/>
+          </p:cNvSpPr>
+          <p:nvPr/>
+        </p:nvSpPr>
+        <p:spPr>
+          <a:xfrm xmlns:a="http://schemas.openxmlformats.org/drawingml/2006/main">
+            <a:off x="390525" y="304800"/>
+            <a:ext cx="11410950" cy="66675"/>
+          </a:xfrm>
+          <a:prstGeom xmlns:a="http://schemas.openxmlformats.org/drawingml/2006/main" prst="rect">
+            <a:avLst/>
+          </a:prstGeom>
+          <a:solidFill xmlns:a="http://schemas.openxmlformats.org/drawingml/2006/main">
+            <a:srgbClr val="FFB45E"/>
+          </a:solidFill>
+          <a:ln xmlns:a="http://schemas.openxmlformats.org/drawingml/2006/main" w="0">
+            <a:solidFill>
+              <a:srgbClr val="FFB45E"/>
+            </a:solidFill>
+            <a:prstDash val="solid"/>
+          </a:ln>
+        </p:spPr>
+      </p:sp>
+      <p:sp>
+        <p:nvSpPr>
+          <p:cNvPr id="2" name="chapter-label">
+            <a:extLst xmlns:a="http://schemas.openxmlformats.org/drawingml/2006/main">
+              <a:ext uri="{FF2B5EF4-FFF2-40B4-BE49-F238E27FC236}">
+                <a16:creationId xmlns:a16="http://schemas.microsoft.com/office/drawing/2014/main" id="{1D188EB3-059B-405A-AE60-15BD58A60CAA}"/>
+              </a:ext>
+            </a:extLst>
+          </p:cNvPr>
+          <p:cNvSpPr>
+            <a:spLocks xmlns:a="http://schemas.openxmlformats.org/drawingml/2006/main" noGrp="1"/>
+          </p:cNvSpPr>
+          <p:nvPr/>
+        </p:nvSpPr>
+        <p:spPr>
+          <a:xfrm xmlns:a="http://schemas.openxmlformats.org/drawingml/2006/main">
+            <a:off x="390525" y="466725"/>
+            <a:ext cx="4953000" cy="323850"/>
+          </a:xfrm>
+          <a:prstGeom xmlns:a="http://schemas.openxmlformats.org/drawingml/2006/main" prst="rect">
+            <a:avLst/>
+          </a:prstGeom>
+          <a:noFill xmlns:a="http://schemas.openxmlformats.org/drawingml/2006/main"/>
+          <a:ln xmlns:a="http://schemas.openxmlformats.org/drawingml/2006/main" w="0">
+            <a:noFill/>
+            <a:prstDash val="solid"/>
+          </a:ln>
+        </p:spPr>
+        <p:txBody>
+          <a:bodyPr xmlns:a="http://schemas.openxmlformats.org/drawingml/2006/main" anchor="t">
+            <a:noAutofit/>
+          </a:bodyPr>
+          <a:lstStyle xmlns:a="http://schemas.openxmlformats.org/drawingml/2006/main"/>
+          <a:p xmlns:a="http://schemas.openxmlformats.org/drawingml/2006/main">
+            <a:pPr algn="l">
+              <a:defRPr sz="1275" b="1">
+                <a:solidFill>
+                  <a:srgbClr val="5B5B57"/>
+                </a:solidFill>
+                <a:latin typeface="Helvetica Neue"/>
+                <a:ea typeface="Helvetica Neue"/>
+                <a:cs typeface="Helvetica Neue"/>
+              </a:defRPr>
+            </a:pPr>
+            <a:r>
+              <a:rPr sz="1275" b="1">
+                <a:solidFill>
+                  <a:srgbClr val="5B5B57"/>
+                </a:solidFill>
+                <a:latin typeface="Helvetica Neue"/>
+                <a:ea typeface="Helvetica Neue"/>
+                <a:cs typeface="Helvetica Neue"/>
+              </a:rPr>
+              <a:t>PRACTICE AND READING  /  09</a:t>
+            </a:r>
+          </a:p>
+        </p:txBody>
+      </p:sp>
+      <p:sp>
+        <p:nvSpPr>
+          <p:cNvPr id="3" name="slide-number">
+            <a:extLst xmlns:a="http://schemas.openxmlformats.org/drawingml/2006/main">
+              <a:ext uri="{FF2B5EF4-FFF2-40B4-BE49-F238E27FC236}">
+                <a16:creationId xmlns:a16="http://schemas.microsoft.com/office/drawing/2014/main" id="{439054BB-E4F1-4F75-9C3F-A6242B2EF28D}"/>
+              </a:ext>
+            </a:extLst>
+          </p:cNvPr>
+          <p:cNvSpPr>
+            <a:spLocks xmlns:a="http://schemas.openxmlformats.org/drawingml/2006/main" noGrp="1"/>
+          </p:cNvSpPr>
+          <p:nvPr/>
+        </p:nvSpPr>
+        <p:spPr>
+          <a:xfrm xmlns:a="http://schemas.openxmlformats.org/drawingml/2006/main">
+            <a:off x="11049000" y="6286500"/>
+            <a:ext cx="742950" cy="266700"/>
+          </a:xfrm>
+          <a:prstGeom xmlns:a="http://schemas.openxmlformats.org/drawingml/2006/main" prst="rect">
+            <a:avLst/>
+          </a:prstGeom>
+          <a:noFill xmlns:a="http://schemas.openxmlformats.org/drawingml/2006/main"/>
+          <a:ln xmlns:a="http://schemas.openxmlformats.org/drawingml/2006/main" w="0">
+            <a:noFill/>
+            <a:prstDash val="solid"/>
+          </a:ln>
+        </p:spPr>
+        <p:txBody>
+          <a:bodyPr xmlns:a="http://schemas.openxmlformats.org/drawingml/2006/main" anchor="t">
+            <a:noAutofit/>
+          </a:bodyPr>
+          <a:lstStyle xmlns:a="http://schemas.openxmlformats.org/drawingml/2006/main"/>
+          <a:p xmlns:a="http://schemas.openxmlformats.org/drawingml/2006/main">
+            <a:pPr algn="r">
+              <a:defRPr sz="1200" b="0">
+                <a:solidFill>
+                  <a:srgbClr val="5B5B57"/>
+                </a:solidFill>
+                <a:latin typeface="Helvetica Neue"/>
+                <a:ea typeface="Helvetica Neue"/>
+                <a:cs typeface="Helvetica Neue"/>
+              </a:defRPr>
+            </a:pPr>
+            <a:r>
+              <a:rPr sz="1200" b="0">
+                <a:solidFill>
+                  <a:srgbClr val="5B5B57"/>
+                </a:solidFill>
+                <a:latin typeface="Helvetica Neue"/>
+                <a:ea typeface="Helvetica Neue"/>
+                <a:cs typeface="Helvetica Neue"/>
+              </a:rPr>
+              <a:t>12</a:t>
+            </a:r>
+          </a:p>
+        </p:txBody>
+      </p:sp>
+      <p:sp>
+        <p:nvSpPr>
+          <p:cNvPr id="4" name="chapter-footer">
+            <a:extLst xmlns:a="http://schemas.openxmlformats.org/drawingml/2006/main">
+              <a:ext uri="{FF2B5EF4-FFF2-40B4-BE49-F238E27FC236}">
+                <a16:creationId xmlns:a16="http://schemas.microsoft.com/office/drawing/2014/main" id="{2D83C5AA-F61D-4C64-99AC-5A2D9A306BDE}"/>
+              </a:ext>
+            </a:extLst>
+          </p:cNvPr>
+          <p:cNvSpPr>
+            <a:spLocks xmlns:a="http://schemas.openxmlformats.org/drawingml/2006/main" noGrp="1"/>
+          </p:cNvSpPr>
+          <p:nvPr/>
+        </p:nvSpPr>
+        <p:spPr>
+          <a:xfrm xmlns:a="http://schemas.openxmlformats.org/drawingml/2006/main">
+            <a:off x="390525" y="6286500"/>
+            <a:ext cx="8191500" cy="266700"/>
+          </a:xfrm>
+          <a:prstGeom xmlns:a="http://schemas.openxmlformats.org/drawingml/2006/main" prst="rect">
+            <a:avLst/>
+          </a:prstGeom>
+          <a:noFill xmlns:a="http://schemas.openxmlformats.org/drawingml/2006/main"/>
+          <a:ln xmlns:a="http://schemas.openxmlformats.org/drawingml/2006/main" w="0">
+            <a:noFill/>
+            <a:prstDash val="solid"/>
+          </a:ln>
+        </p:spPr>
+        <p:txBody>
+          <a:bodyPr xmlns:a="http://schemas.openxmlformats.org/drawingml/2006/main" anchor="t">
+            <a:noAutofit/>
+          </a:bodyPr>
+          <a:lstStyle xmlns:a="http://schemas.openxmlformats.org/drawingml/2006/main"/>
+          <a:p xmlns:a="http://schemas.openxmlformats.org/drawingml/2006/main">
+            <a:pPr algn="l">
+              <a:defRPr sz="1125" b="0">
+                <a:solidFill>
+                  <a:srgbClr val="5B5B57"/>
+                </a:solidFill>
+                <a:latin typeface="Helvetica Neue"/>
+                <a:ea typeface="Helvetica Neue"/>
+                <a:cs typeface="Helvetica Neue"/>
+              </a:defRPr>
+            </a:pPr>
+            <a:r>
+              <a:rPr sz="1125" b="0">
+                <a:solidFill>
+                  <a:srgbClr val="5B5B57"/>
+                </a:solidFill>
+                <a:latin typeface="Helvetica Neue"/>
+                <a:ea typeface="Helvetica Neue"/>
+                <a:cs typeface="Helvetica Neue"/>
+              </a:rPr>
+              <a:t>Multi-Agent Interoperability</a:t>
+            </a:r>
+          </a:p>
+        </p:txBody>
+      </p:sp>
+      <p:sp>
+        <p:nvSpPr>
+          <p:cNvPr id="5" name="practice-title">
+            <a:extLst xmlns:a="http://schemas.openxmlformats.org/drawingml/2006/main">
+              <a:ext uri="{FF2B5EF4-FFF2-40B4-BE49-F238E27FC236}">
+                <a16:creationId xmlns:a16="http://schemas.microsoft.com/office/drawing/2014/main" id="{206C28EB-9F40-41C9-A7E2-B4FA078514C1}"/>
+              </a:ext>
+            </a:extLst>
+          </p:cNvPr>
+          <p:cNvSpPr>
+            <a:spLocks xmlns:a="http://schemas.openxmlformats.org/drawingml/2006/main" noGrp="1"/>
+          </p:cNvSpPr>
+          <p:nvPr/>
+        </p:nvSpPr>
+        <p:spPr>
+          <a:xfrm xmlns:a="http://schemas.openxmlformats.org/drawingml/2006/main">
+            <a:off x="390525" y="1000125"/>
+            <a:ext cx="11144250" cy="666750"/>
+          </a:xfrm>
+          <a:prstGeom xmlns:a="http://schemas.openxmlformats.org/drawingml/2006/main" prst="rect">
+            <a:avLst/>
+          </a:prstGeom>
+          <a:noFill xmlns:a="http://schemas.openxmlformats.org/drawingml/2006/main"/>
+          <a:ln xmlns:a="http://schemas.openxmlformats.org/drawingml/2006/main" w="0">
+            <a:noFill/>
+            <a:prstDash val="solid"/>
+          </a:ln>
+        </p:spPr>
+        <p:txBody>
+          <a:bodyPr xmlns:a="http://schemas.openxmlformats.org/drawingml/2006/main" anchor="t">
+            <a:normAutofit fontScale="100000"/>
+          </a:bodyPr>
+          <a:lstStyle xmlns:a="http://schemas.openxmlformats.org/drawingml/2006/main"/>
+          <a:p xmlns:a="http://schemas.openxmlformats.org/drawingml/2006/main">
+            <a:pPr algn="l">
+              <a:defRPr sz="3000" b="1">
+                <a:solidFill>
+                  <a:srgbClr val="111111"/>
+                </a:solidFill>
+                <a:latin typeface="Helvetica Neue"/>
+                <a:ea typeface="Helvetica Neue"/>
+                <a:cs typeface="Helvetica Neue"/>
+              </a:defRPr>
+            </a:pPr>
+            <a:r>
+              <a:rPr sz="3000" b="1">
+                <a:solidFill>
+                  <a:srgbClr val="111111"/>
+                </a:solidFill>
+                <a:latin typeface="Helvetica Neue"/>
+                <a:ea typeface="Helvetica Neue"/>
+                <a:cs typeface="Helvetica Neue"/>
+              </a:rPr>
+              <a:t>Evidence to submit</a:t>
+            </a:r>
+          </a:p>
+        </p:txBody>
+      </p:sp>
+      <p:sp>
+        <p:nvSpPr>
+          <p:cNvPr id="6" name="practice-task">
+            <a:extLst xmlns:a="http://schemas.openxmlformats.org/drawingml/2006/main">
+              <a:ext uri="{FF2B5EF4-FFF2-40B4-BE49-F238E27FC236}">
+                <a16:creationId xmlns:a16="http://schemas.microsoft.com/office/drawing/2014/main" id="{FBF19A94-10DB-4226-8BF9-C7235C33FA60}"/>
+              </a:ext>
+            </a:extLst>
+          </p:cNvPr>
+          <p:cNvSpPr>
+            <a:spLocks xmlns:a="http://schemas.openxmlformats.org/drawingml/2006/main" noGrp="1"/>
+          </p:cNvSpPr>
+          <p:nvPr/>
+        </p:nvSpPr>
+        <p:spPr>
+          <a:xfrm xmlns:a="http://schemas.openxmlformats.org/drawingml/2006/main">
+            <a:off x="390525" y="2000250"/>
+            <a:ext cx="10953750" cy="1238250"/>
+          </a:xfrm>
+          <a:prstGeom xmlns:a="http://schemas.openxmlformats.org/drawingml/2006/main" prst="rect">
+            <a:avLst/>
+          </a:prstGeom>
+          <a:noFill xmlns:a="http://schemas.openxmlformats.org/drawingml/2006/main"/>
+          <a:ln xmlns:a="http://schemas.openxmlformats.org/drawingml/2006/main" w="0">
+            <a:noFill/>
+            <a:prstDash val="solid"/>
+          </a:ln>
+        </p:spPr>
+        <p:txBody>
+          <a:bodyPr xmlns:a="http://schemas.openxmlformats.org/drawingml/2006/main" anchor="t">
+            <a:normAutofit fontScale="100000"/>
+          </a:bodyPr>
+          <a:lstStyle xmlns:a="http://schemas.openxmlformats.org/drawingml/2006/main"/>
+          <a:p xmlns:a="http://schemas.openxmlformats.org/drawingml/2006/main">
+            <a:pPr algn="l">
+              <a:defRPr sz="1950" b="0">
+                <a:solidFill>
+                  <a:srgbClr val="111111"/>
+                </a:solidFill>
+                <a:latin typeface="Helvetica Neue"/>
+                <a:ea typeface="Helvetica Neue"/>
+                <a:cs typeface="Helvetica Neue"/>
+              </a:defRPr>
+            </a:pPr>
+            <a:r>
+              <a:rPr sz="1950" b="0">
+                <a:solidFill>
+                  <a:srgbClr val="111111"/>
+                </a:solidFill>
+                <a:latin typeface="Helvetica Neue"/>
+                <a:ea typeface="Helvetica Neue"/>
+                <a:cs typeface="Helvetica Neue"/>
+              </a:rPr>
+              <a:t>Trace a delegated catalog task from discovery to completion. Identify the caller, authorization decision, timeout owner, and artifact validator. No remote service deployment is required.</a:t>
+            </a:r>
+          </a:p>
+        </p:txBody>
+      </p:sp>
+      <p:sp>
+        <p:nvSpPr>
+          <p:cNvPr id="7" name="practice-check">
+            <a:extLst xmlns:a="http://schemas.openxmlformats.org/drawingml/2006/main">
+              <a:ext uri="{FF2B5EF4-FFF2-40B4-BE49-F238E27FC236}">
+                <a16:creationId xmlns:a16="http://schemas.microsoft.com/office/drawing/2014/main" id="{E725A29A-35D3-49C6-89F2-470145848A62}"/>
+              </a:ext>
+            </a:extLst>
+          </p:cNvPr>
+          <p:cNvSpPr>
+            <a:spLocks xmlns:a="http://schemas.openxmlformats.org/drawingml/2006/main" noGrp="1"/>
+          </p:cNvSpPr>
+          <p:nvPr/>
+        </p:nvSpPr>
+        <p:spPr>
+          <a:xfrm xmlns:a="http://schemas.openxmlformats.org/drawingml/2006/main">
+            <a:off x="390525" y="3381375"/>
+            <a:ext cx="10953750" cy="1095375"/>
+          </a:xfrm>
+          <a:prstGeom xmlns:a="http://schemas.openxmlformats.org/drawingml/2006/main" prst="rect">
+            <a:avLst/>
+          </a:prstGeom>
+          <a:noFill xmlns:a="http://schemas.openxmlformats.org/drawingml/2006/main"/>
+          <a:ln xmlns:a="http://schemas.openxmlformats.org/drawingml/2006/main" w="0">
+            <a:noFill/>
+            <a:prstDash val="solid"/>
+          </a:ln>
+        </p:spPr>
+        <p:txBody>
+          <a:bodyPr xmlns:a="http://schemas.openxmlformats.org/drawingml/2006/main" anchor="t">
+            <a:normAutofit fontScale="100000"/>
+          </a:bodyPr>
+          <a:lstStyle xmlns:a="http://schemas.openxmlformats.org/drawingml/2006/main"/>
+          <a:p xmlns:a="http://schemas.openxmlformats.org/drawingml/2006/main">
+            <a:pPr algn="l">
+              <a:defRPr sz="1800" b="0">
+                <a:solidFill>
+                  <a:srgbClr val="5B5B57"/>
+                </a:solidFill>
+                <a:latin typeface="Helvetica Neue"/>
+                <a:ea typeface="Helvetica Neue"/>
+                <a:cs typeface="Helvetica Neue"/>
+              </a:defRPr>
+            </a:pPr>
+            <a:r>
+              <a:rPr sz="1800" b="0">
+                <a:solidFill>
+                  <a:srgbClr val="5B5B57"/>
+                </a:solidFill>
+                <a:latin typeface="Helvetica Neue"/>
+                <a:ea typeface="Helvetica Neue"/>
+                <a:cs typeface="Helvetica Neue"/>
+              </a:rPr>
+              <a:t>Use A2A 1.0.0 terminology and distinguish the chosen binding from the abstract task model. Explain what happens after a failed or canceled task.</a:t>
+            </a:r>
+          </a:p>
+        </p:txBody>
+      </p:sp>
+      <p:sp>
+        <p:nvSpPr>
+          <p:cNvPr id="8" name="practice-readings">
+            <a:extLst xmlns:a="http://schemas.openxmlformats.org/drawingml/2006/main">
+              <a:ext uri="{FF2B5EF4-FFF2-40B4-BE49-F238E27FC236}">
+                <a16:creationId xmlns:a16="http://schemas.microsoft.com/office/drawing/2014/main" id="{1F7AD5D0-E499-4C86-8A49-3AA69EEB4E78}"/>
+              </a:ext>
+            </a:extLst>
+          </p:cNvPr>
+          <p:cNvSpPr>
+            <a:spLocks xmlns:a="http://schemas.openxmlformats.org/drawingml/2006/main" noGrp="1"/>
+          </p:cNvSpPr>
+          <p:nvPr/>
+        </p:nvSpPr>
+        <p:spPr>
+          <a:xfrm xmlns:a="http://schemas.openxmlformats.org/drawingml/2006/main">
+            <a:off x="390525" y="4667250"/>
+            <a:ext cx="10953750" cy="1000125"/>
+          </a:xfrm>
+          <a:prstGeom xmlns:a="http://schemas.openxmlformats.org/drawingml/2006/main" prst="rect">
+            <a:avLst/>
+          </a:prstGeom>
+          <a:noFill xmlns:a="http://schemas.openxmlformats.org/drawingml/2006/main"/>
+          <a:ln xmlns:a="http://schemas.openxmlformats.org/drawingml/2006/main" w="0">
+            <a:noFill/>
+            <a:prstDash val="solid"/>
+          </a:ln>
+        </p:spPr>
+        <p:txBody>
+          <a:bodyPr xmlns:a="http://schemas.openxmlformats.org/drawingml/2006/main" anchor="t">
+            <a:normAutofit fontScale="100000"/>
+          </a:bodyPr>
+          <a:lstStyle xmlns:a="http://schemas.openxmlformats.org/drawingml/2006/main"/>
+          <a:p xmlns:a="http://schemas.openxmlformats.org/drawingml/2006/main">
+            <a:pPr algn="l">
+              <a:defRPr sz="1425" b="0">
+                <a:solidFill>
+                  <a:srgbClr val="111111"/>
+                </a:solidFill>
+                <a:latin typeface="Helvetica Neue"/>
+                <a:ea typeface="Helvetica Neue"/>
+                <a:cs typeface="Helvetica Neue"/>
+              </a:defRPr>
+            </a:pPr>
+            <a:r>
+              <a:rPr sz="1425" b="0">
+                <a:solidFill>
+                  <a:srgbClr val="111111"/>
+                </a:solidFill>
+                <a:latin typeface="Helvetica Neue"/>
+                <a:ea typeface="Helvetica Neue"/>
+                <a:cs typeface="Helvetica Neue"/>
+              </a:rPr>
+              <a:t>S6  A2A specification 1.0.0</a:t>
+            </a:r>
+          </a:p>
+        </p:txBody>
+      </p:sp>
+      <p:sp>
+        <p:nvSpPr>
+          <p:cNvPr id="9" name="practice-lab">
+            <a:extLst xmlns:a="http://schemas.openxmlformats.org/drawingml/2006/main">
+              <a:ext uri="{FF2B5EF4-FFF2-40B4-BE49-F238E27FC236}">
+                <a16:creationId xmlns:a16="http://schemas.microsoft.com/office/drawing/2014/main" id="{509532BC-8754-4BCD-9BE9-E2840586FFB7}"/>
+              </a:ext>
+            </a:extLst>
+          </p:cNvPr>
+          <p:cNvSpPr>
+            <a:spLocks xmlns:a="http://schemas.openxmlformats.org/drawingml/2006/main" noGrp="1"/>
+          </p:cNvSpPr>
+          <p:nvPr/>
+        </p:nvSpPr>
+        <p:spPr>
+          <a:xfrm xmlns:a="http://schemas.openxmlformats.org/drawingml/2006/main">
+            <a:off x="390525" y="5857875"/>
+            <a:ext cx="10953750" cy="266700"/>
+          </a:xfrm>
+          <a:prstGeom xmlns:a="http://schemas.openxmlformats.org/drawingml/2006/main" prst="rect">
+            <a:avLst/>
+          </a:prstGeom>
+          <a:noFill xmlns:a="http://schemas.openxmlformats.org/drawingml/2006/main"/>
+          <a:ln xmlns:a="http://schemas.openxmlformats.org/drawingml/2006/main" w="0">
+            <a:noFill/>
+            <a:prstDash val="solid"/>
+          </a:ln>
+        </p:spPr>
+        <p:txBody>
+          <a:bodyPr xmlns:a="http://schemas.openxmlformats.org/drawingml/2006/main" anchor="t">
+            <a:normAutofit fontScale="90196"/>
+          </a:bodyPr>
+          <a:lstStyle xmlns:a="http://schemas.openxmlformats.org/drawingml/2006/main"/>
+          <a:p xmlns:a="http://schemas.openxmlformats.org/drawingml/2006/main">
+            <a:pPr algn="l">
+              <a:defRPr sz="1275" b="0">
+                <a:solidFill>
+                  <a:srgbClr val="5B5B57"/>
+                </a:solidFill>
+                <a:latin typeface="Helvetica Neue"/>
+                <a:ea typeface="Helvetica Neue"/>
+                <a:cs typeface="Helvetica Neue"/>
+              </a:defRPr>
+            </a:pPr>
+            <a:r>
+              <a:rPr sz="1275" b="0">
+                <a:solidFill>
+                  <a:srgbClr val="5B5B57"/>
+                </a:solidFill>
+                <a:latin typeface="Helvetica Neue"/>
+                <a:ea typeface="Helvetica Neue"/>
+                <a:cs typeface="Helvetica Neue"/>
+              </a:rPr>
+              <a:t>labs/08_langgraph_approval_security.ipynb</a:t>
+            </a:r>
+          </a:p>
+        </p:txBody>
+      </p:sp>
+    </p:spTree>
+    <p:extLst>
+      <p:ext uri="{BB962C8B-B14F-4D97-AF65-F5344CB8AC3E}">
+        <p14:creationId xmlns:p14="http://schemas.microsoft.com/office/powerpoint/2010/main" val="1838090862"/>
       </p:ext>
     </p:extLst>
   </p:cSld>
@@ -3016,7 +5184,7 @@
           <p:cNvPr id="14" name="accent-line">
             <a:extLst xmlns:a="http://schemas.openxmlformats.org/drawingml/2006/main">
               <a:ext uri="{FF2B5EF4-FFF2-40B4-BE49-F238E27FC236}">
-                <a16:creationId xmlns:a16="http://schemas.microsoft.com/office/drawing/2014/main" id="{7EA6CAFA-FACF-42DE-A4DE-A3C80F4389F2}"/>
+                <a16:creationId xmlns:a16="http://schemas.microsoft.com/office/drawing/2014/main" id="{DBA921D7-795C-499F-BB74-37608A7D5A46}"/>
               </a:ext>
             </a:extLst>
           </p:cNvPr>
@@ -3049,7 +5217,7 @@
           <p:cNvPr id="2" name="chapter-label">
             <a:extLst xmlns:a="http://schemas.openxmlformats.org/drawingml/2006/main">
               <a:ext uri="{FF2B5EF4-FFF2-40B4-BE49-F238E27FC236}">
-                <a16:creationId xmlns:a16="http://schemas.microsoft.com/office/drawing/2014/main" id="{8FBB8BC8-0FBA-4CEC-B69D-DC2BCDDFB945}"/>
+                <a16:creationId xmlns:a16="http://schemas.microsoft.com/office/drawing/2014/main" id="{04752E80-A782-4262-AE55-57FA813BD396}"/>
               </a:ext>
             </a:extLst>
           </p:cNvPr>
@@ -3107,7 +5275,7 @@
           <p:cNvPr id="3" name="slide-number">
             <a:extLst xmlns:a="http://schemas.openxmlformats.org/drawingml/2006/main">
               <a:ext uri="{FF2B5EF4-FFF2-40B4-BE49-F238E27FC236}">
-                <a16:creationId xmlns:a16="http://schemas.microsoft.com/office/drawing/2014/main" id="{7C86393F-8769-4466-AF7F-BB73B67B155B}"/>
+                <a16:creationId xmlns:a16="http://schemas.microsoft.com/office/drawing/2014/main" id="{23E6C0F8-7133-4850-B1C1-B7EFF41A7F96}"/>
               </a:ext>
             </a:extLst>
           </p:cNvPr>
@@ -3165,7 +5333,7 @@
           <p:cNvPr id="4" name="chapter-footer">
             <a:extLst xmlns:a="http://schemas.openxmlformats.org/drawingml/2006/main">
               <a:ext uri="{FF2B5EF4-FFF2-40B4-BE49-F238E27FC236}">
-                <a16:creationId xmlns:a16="http://schemas.microsoft.com/office/drawing/2014/main" id="{C0B249E2-4755-437D-86C0-5CE3C3DFEC1C}"/>
+                <a16:creationId xmlns:a16="http://schemas.microsoft.com/office/drawing/2014/main" id="{8B1C026C-3224-49EA-87D6-E0A39B472578}"/>
               </a:ext>
             </a:extLst>
           </p:cNvPr>
@@ -3223,7 +5391,7 @@
           <p:cNvPr id="5" name="objectives-title">
             <a:extLst xmlns:a="http://schemas.openxmlformats.org/drawingml/2006/main">
               <a:ext uri="{FF2B5EF4-FFF2-40B4-BE49-F238E27FC236}">
-                <a16:creationId xmlns:a16="http://schemas.microsoft.com/office/drawing/2014/main" id="{5B5E1F23-F654-436E-9E5A-5EB95AB1F13E}"/>
+                <a16:creationId xmlns:a16="http://schemas.microsoft.com/office/drawing/2014/main" id="{88A64AAB-875B-425D-A220-15AC81883D99}"/>
               </a:ext>
             </a:extLst>
           </p:cNvPr>
@@ -3281,7 +5449,7 @@
           <p:cNvPr id="6" name="objective-number-1">
             <a:extLst xmlns:a="http://schemas.openxmlformats.org/drawingml/2006/main">
               <a:ext uri="{FF2B5EF4-FFF2-40B4-BE49-F238E27FC236}">
-                <a16:creationId xmlns:a16="http://schemas.microsoft.com/office/drawing/2014/main" id="{16050268-0FF0-4B02-A5CE-27D93AD15B52}"/>
+                <a16:creationId xmlns:a16="http://schemas.microsoft.com/office/drawing/2014/main" id="{1EB4B2B3-F1E1-4A4F-A3B4-60BFE1557D50}"/>
               </a:ext>
             </a:extLst>
           </p:cNvPr>
@@ -3339,7 +5507,7 @@
           <p:cNvPr id="7" name="objective-1">
             <a:extLst xmlns:a="http://schemas.openxmlformats.org/drawingml/2006/main">
               <a:ext uri="{FF2B5EF4-FFF2-40B4-BE49-F238E27FC236}">
-                <a16:creationId xmlns:a16="http://schemas.microsoft.com/office/drawing/2014/main" id="{98F656A6-D832-4AA3-9881-903A30A1DFFC}"/>
+                <a16:creationId xmlns:a16="http://schemas.microsoft.com/office/drawing/2014/main" id="{C9D54263-298A-4150-8952-02476E90DCA2}"/>
               </a:ext>
             </a:extLst>
           </p:cNvPr>
@@ -3397,7 +5565,7 @@
           <p:cNvPr id="8" name="objective-number-2">
             <a:extLst xmlns:a="http://schemas.openxmlformats.org/drawingml/2006/main">
               <a:ext uri="{FF2B5EF4-FFF2-40B4-BE49-F238E27FC236}">
-                <a16:creationId xmlns:a16="http://schemas.microsoft.com/office/drawing/2014/main" id="{B4203223-53D9-465A-8C3A-AFA45535F103}"/>
+                <a16:creationId xmlns:a16="http://schemas.microsoft.com/office/drawing/2014/main" id="{7CA644E2-2113-4195-968C-BBD87E7B4208}"/>
               </a:ext>
             </a:extLst>
           </p:cNvPr>
@@ -3455,7 +5623,7 @@
           <p:cNvPr id="9" name="objective-2">
             <a:extLst xmlns:a="http://schemas.openxmlformats.org/drawingml/2006/main">
               <a:ext uri="{FF2B5EF4-FFF2-40B4-BE49-F238E27FC236}">
-                <a16:creationId xmlns:a16="http://schemas.microsoft.com/office/drawing/2014/main" id="{5E7FC0F9-40B4-4A03-8F8D-8FFBD062F7D9}"/>
+                <a16:creationId xmlns:a16="http://schemas.microsoft.com/office/drawing/2014/main" id="{7639DCAF-A151-4515-B817-6840DC7D57D5}"/>
               </a:ext>
             </a:extLst>
           </p:cNvPr>
@@ -3513,7 +5681,7 @@
           <p:cNvPr id="10" name="objective-number-3">
             <a:extLst xmlns:a="http://schemas.openxmlformats.org/drawingml/2006/main">
               <a:ext uri="{FF2B5EF4-FFF2-40B4-BE49-F238E27FC236}">
-                <a16:creationId xmlns:a16="http://schemas.microsoft.com/office/drawing/2014/main" id="{28D2387B-84FF-4555-A748-C2EDB3F39A88}"/>
+                <a16:creationId xmlns:a16="http://schemas.microsoft.com/office/drawing/2014/main" id="{B4346DBF-BD1B-4714-A9F2-55EC7D4F2C49}"/>
               </a:ext>
             </a:extLst>
           </p:cNvPr>
@@ -3571,7 +5739,7 @@
           <p:cNvPr id="11" name="objective-3">
             <a:extLst xmlns:a="http://schemas.openxmlformats.org/drawingml/2006/main">
               <a:ext uri="{FF2B5EF4-FFF2-40B4-BE49-F238E27FC236}">
-                <a16:creationId xmlns:a16="http://schemas.microsoft.com/office/drawing/2014/main" id="{39931130-F676-42E2-A912-AD56730E0A05}"/>
+                <a16:creationId xmlns:a16="http://schemas.microsoft.com/office/drawing/2014/main" id="{CA35B261-088F-4F10-A7F6-693F0ACBB397}"/>
               </a:ext>
             </a:extLst>
           </p:cNvPr>
@@ -3629,7 +5797,7 @@
           <p:cNvPr id="12" name="objective-number-4">
             <a:extLst xmlns:a="http://schemas.openxmlformats.org/drawingml/2006/main">
               <a:ext uri="{FF2B5EF4-FFF2-40B4-BE49-F238E27FC236}">
-                <a16:creationId xmlns:a16="http://schemas.microsoft.com/office/drawing/2014/main" id="{A38B0F8B-EFA4-40B1-A34D-8E4401AFE336}"/>
+                <a16:creationId xmlns:a16="http://schemas.microsoft.com/office/drawing/2014/main" id="{39C97D6E-466F-426F-9EF4-F12CC4ACA50C}"/>
               </a:ext>
             </a:extLst>
           </p:cNvPr>
@@ -3687,7 +5855,7 @@
           <p:cNvPr id="13" name="objective-4">
             <a:extLst xmlns:a="http://schemas.openxmlformats.org/drawingml/2006/main">
               <a:ext uri="{FF2B5EF4-FFF2-40B4-BE49-F238E27FC236}">
-                <a16:creationId xmlns:a16="http://schemas.microsoft.com/office/drawing/2014/main" id="{BE381B07-7E62-4CED-89BE-64650716D867}"/>
+                <a16:creationId xmlns:a16="http://schemas.microsoft.com/office/drawing/2014/main" id="{56D9BCDB-439D-4A3F-828F-92BF58C0E241}"/>
               </a:ext>
             </a:extLst>
           </p:cNvPr>
@@ -3743,7 +5911,7 @@
     </p:spTree>
     <p:extLst>
       <p:ext uri="{BB962C8B-B14F-4D97-AF65-F5344CB8AC3E}">
-        <p14:creationId xmlns:p14="http://schemas.microsoft.com/office/powerpoint/2010/main" val="1102255693"/>
+        <p14:creationId xmlns:p14="http://schemas.microsoft.com/office/powerpoint/2010/main" val="598305191"/>
       </p:ext>
     </p:extLst>
   </p:cSld>
@@ -3774,7 +5942,7 @@
           <p:cNvPr id="9" name="accent-line">
             <a:extLst xmlns:a="http://schemas.openxmlformats.org/drawingml/2006/main">
               <a:ext uri="{FF2B5EF4-FFF2-40B4-BE49-F238E27FC236}">
-                <a16:creationId xmlns:a16="http://schemas.microsoft.com/office/drawing/2014/main" id="{5D8F9038-983B-4AF5-8B5C-41C90537EE2D}"/>
+                <a16:creationId xmlns:a16="http://schemas.microsoft.com/office/drawing/2014/main" id="{E913569E-59A3-4C5A-A1D4-51409218E3D5}"/>
               </a:ext>
             </a:extLst>
           </p:cNvPr>
@@ -3807,7 +5975,7 @@
           <p:cNvPr id="2" name="chapter-label">
             <a:extLst xmlns:a="http://schemas.openxmlformats.org/drawingml/2006/main">
               <a:ext uri="{FF2B5EF4-FFF2-40B4-BE49-F238E27FC236}">
-                <a16:creationId xmlns:a16="http://schemas.microsoft.com/office/drawing/2014/main" id="{35AF4DEC-2393-4EE9-8FB5-B25961863949}"/>
+                <a16:creationId xmlns:a16="http://schemas.microsoft.com/office/drawing/2014/main" id="{BD302652-1D05-436F-836C-96277C68D024}"/>
               </a:ext>
             </a:extLst>
           </p:cNvPr>
@@ -3865,7 +6033,7 @@
           <p:cNvPr id="3" name="slide-number">
             <a:extLst xmlns:a="http://schemas.openxmlformats.org/drawingml/2006/main">
               <a:ext uri="{FF2B5EF4-FFF2-40B4-BE49-F238E27FC236}">
-                <a16:creationId xmlns:a16="http://schemas.microsoft.com/office/drawing/2014/main" id="{DF66FC97-BD56-405A-8FA2-647E92549C56}"/>
+                <a16:creationId xmlns:a16="http://schemas.microsoft.com/office/drawing/2014/main" id="{3B5D4E35-2201-43C4-A8BC-F34AFD42A411}"/>
               </a:ext>
             </a:extLst>
           </p:cNvPr>
@@ -3923,7 +6091,7 @@
           <p:cNvPr id="4" name="chapter-footer">
             <a:extLst xmlns:a="http://schemas.openxmlformats.org/drawingml/2006/main">
               <a:ext uri="{FF2B5EF4-FFF2-40B4-BE49-F238E27FC236}">
-                <a16:creationId xmlns:a16="http://schemas.microsoft.com/office/drawing/2014/main" id="{F798671C-0FDA-42A4-939C-A1440D3872E7}"/>
+                <a16:creationId xmlns:a16="http://schemas.microsoft.com/office/drawing/2014/main" id="{169D373B-0E52-4CEB-B2C6-13648F8F366C}"/>
               </a:ext>
             </a:extLst>
           </p:cNvPr>
@@ -3981,7 +6149,7 @@
           <p:cNvPr id="5" name="section-title">
             <a:extLst xmlns:a="http://schemas.openxmlformats.org/drawingml/2006/main">
               <a:ext uri="{FF2B5EF4-FFF2-40B4-BE49-F238E27FC236}">
-                <a16:creationId xmlns:a16="http://schemas.microsoft.com/office/drawing/2014/main" id="{90395E86-3284-414F-BEA2-638D79BB8FAC}"/>
+                <a16:creationId xmlns:a16="http://schemas.microsoft.com/office/drawing/2014/main" id="{38F29783-06D7-49F2-8A42-20BB62E1CE8A}"/>
               </a:ext>
             </a:extLst>
           </p:cNvPr>
@@ -4039,7 +6207,7 @@
           <p:cNvPr id="6" name="section-explanation">
             <a:extLst xmlns:a="http://schemas.openxmlformats.org/drawingml/2006/main">
               <a:ext uri="{FF2B5EF4-FFF2-40B4-BE49-F238E27FC236}">
-                <a16:creationId xmlns:a16="http://schemas.microsoft.com/office/drawing/2014/main" id="{8056EF98-1120-44E0-A38F-240F0C46A91A}"/>
+                <a16:creationId xmlns:a16="http://schemas.microsoft.com/office/drawing/2014/main" id="{CDC1620A-5AF7-4291-8796-8DF29FC7231F}"/>
               </a:ext>
             </a:extLst>
           </p:cNvPr>
@@ -4097,7 +6265,7 @@
           <p:cNvPr id="7" name="column-rule">
             <a:extLst xmlns:a="http://schemas.openxmlformats.org/drawingml/2006/main">
               <a:ext uri="{FF2B5EF4-FFF2-40B4-BE49-F238E27FC236}">
-                <a16:creationId xmlns:a16="http://schemas.microsoft.com/office/drawing/2014/main" id="{19B8B5B6-6FD2-4561-B340-8D39A0A8BA28}"/>
+                <a16:creationId xmlns:a16="http://schemas.microsoft.com/office/drawing/2014/main" id="{FA74BFEB-9137-4C57-B3D2-980E8BD9DE09}"/>
               </a:ext>
             </a:extLst>
           </p:cNvPr>
@@ -4130,7 +6298,7 @@
           <p:cNvPr id="8" name="section-points">
             <a:extLst xmlns:a="http://schemas.openxmlformats.org/drawingml/2006/main">
               <a:ext uri="{FF2B5EF4-FFF2-40B4-BE49-F238E27FC236}">
-                <a16:creationId xmlns:a16="http://schemas.microsoft.com/office/drawing/2014/main" id="{48583344-F54E-44E8-ADEE-58A03BA91198}"/>
+                <a16:creationId xmlns:a16="http://schemas.microsoft.com/office/drawing/2014/main" id="{6C596391-5F4E-4681-8DBC-0192AE90E98F}"/>
               </a:ext>
             </a:extLst>
           </p:cNvPr>
@@ -4242,7 +6410,7 @@
     </p:spTree>
     <p:extLst>
       <p:ext uri="{BB962C8B-B14F-4D97-AF65-F5344CB8AC3E}">
-        <p14:creationId xmlns:p14="http://schemas.microsoft.com/office/powerpoint/2010/main" val="1765742537"/>
+        <p14:creationId xmlns:p14="http://schemas.microsoft.com/office/powerpoint/2010/main" val="2138229759"/>
       </p:ext>
     </p:extLst>
   </p:cSld>
@@ -4273,7 +6441,7 @@
           <p:cNvPr id="15" name="accent-line">
             <a:extLst xmlns:a="http://schemas.openxmlformats.org/drawingml/2006/main">
               <a:ext uri="{FF2B5EF4-FFF2-40B4-BE49-F238E27FC236}">
-                <a16:creationId xmlns:a16="http://schemas.microsoft.com/office/drawing/2014/main" id="{A8D0099A-0788-4AF3-BB7A-7ADB0612A6C7}"/>
+                <a16:creationId xmlns:a16="http://schemas.microsoft.com/office/drawing/2014/main" id="{EF8D7E04-7F95-4BC6-BCCD-1ED98888908B}"/>
               </a:ext>
             </a:extLst>
           </p:cNvPr>
@@ -4306,7 +6474,7 @@
           <p:cNvPr id="2" name="chapter-label">
             <a:extLst xmlns:a="http://schemas.openxmlformats.org/drawingml/2006/main">
               <a:ext uri="{FF2B5EF4-FFF2-40B4-BE49-F238E27FC236}">
-                <a16:creationId xmlns:a16="http://schemas.microsoft.com/office/drawing/2014/main" id="{FC7B0751-A2DC-4872-B96A-483487FECBF0}"/>
+                <a16:creationId xmlns:a16="http://schemas.microsoft.com/office/drawing/2014/main" id="{9FF716EE-3788-4084-B6CA-E53685BF3EB8}"/>
               </a:ext>
             </a:extLst>
           </p:cNvPr>
@@ -4364,7 +6532,7 @@
           <p:cNvPr id="3" name="slide-number">
             <a:extLst xmlns:a="http://schemas.openxmlformats.org/drawingml/2006/main">
               <a:ext uri="{FF2B5EF4-FFF2-40B4-BE49-F238E27FC236}">
-                <a16:creationId xmlns:a16="http://schemas.microsoft.com/office/drawing/2014/main" id="{0C380E07-67D1-4AD9-A108-5A8B6C93D3AA}"/>
+                <a16:creationId xmlns:a16="http://schemas.microsoft.com/office/drawing/2014/main" id="{60243749-0506-4CDE-B722-E5FB70E47EE3}"/>
               </a:ext>
             </a:extLst>
           </p:cNvPr>
@@ -4422,7 +6590,7 @@
           <p:cNvPr id="4" name="chapter-footer">
             <a:extLst xmlns:a="http://schemas.openxmlformats.org/drawingml/2006/main">
               <a:ext uri="{FF2B5EF4-FFF2-40B4-BE49-F238E27FC236}">
-                <a16:creationId xmlns:a16="http://schemas.microsoft.com/office/drawing/2014/main" id="{DEE771EA-4F9C-4D6C-938B-F7DC8EA046FC}"/>
+                <a16:creationId xmlns:a16="http://schemas.microsoft.com/office/drawing/2014/main" id="{9F53ECE8-27BD-4EA1-99D4-AC187E1A9AF8}"/>
               </a:ext>
             </a:extLst>
           </p:cNvPr>
@@ -4480,7 +6648,7 @@
           <p:cNvPr id="5" name="section-title">
             <a:extLst xmlns:a="http://schemas.openxmlformats.org/drawingml/2006/main">
               <a:ext uri="{FF2B5EF4-FFF2-40B4-BE49-F238E27FC236}">
-                <a16:creationId xmlns:a16="http://schemas.microsoft.com/office/drawing/2014/main" id="{C8AAA555-5489-443A-8B52-F4F92C95EDDA}"/>
+                <a16:creationId xmlns:a16="http://schemas.microsoft.com/office/drawing/2014/main" id="{7C137312-F448-43FE-B726-3C664BB78654}"/>
               </a:ext>
             </a:extLst>
           </p:cNvPr>
@@ -4528,7 +6696,7 @@
                 <a:ea typeface="Helvetica Neue"/>
                 <a:cs typeface="Helvetica Neue"/>
               </a:rPr>
-              <a:t>A2A builds agent collaboration on web standards</a:t>
+              <a:t>A2A 1.0.0 separates operations from bindings</a:t>
             </a:r>
           </a:p>
         </p:txBody>
@@ -4538,7 +6706,7 @@
           <p:cNvPr id="6" name="section-explanation">
             <a:extLst xmlns:a="http://schemas.openxmlformats.org/drawingml/2006/main">
               <a:ext uri="{FF2B5EF4-FFF2-40B4-BE49-F238E27FC236}">
-                <a16:creationId xmlns:a16="http://schemas.microsoft.com/office/drawing/2014/main" id="{BEF9EE9B-6C5B-46AE-8848-7268BF4D3BBB}"/>
+                <a16:creationId xmlns:a16="http://schemas.microsoft.com/office/drawing/2014/main" id="{9E009620-8949-48DB-BAD1-07E9C09D548B}"/>
               </a:ext>
             </a:extLst>
           </p:cNvPr>
@@ -4586,7 +6754,7 @@
                 <a:ea typeface="Helvetica Neue"/>
                 <a:cs typeface="Helvetica Neue"/>
               </a:rPr>
-              <a:t>The Agent-to-Agent protocol uses HTTP, JSON-RPC, server-sent events, and standard authentication. Its design supports natural agentic interaction, secure enterprise use, long-running tasks, and multiple modalities.</a:t>
+              <a:t>A2A 1.0.0 defines a task and message model with JSON-RPC, gRPC, and HTTP/REST bindings. This course traces JSON-RPC over HTTP. Select a binding and version explicitly when implementing discovery, streaming, and authentication.</a:t>
             </a:r>
           </a:p>
         </p:txBody>
@@ -4596,7 +6764,7 @@
           <p:cNvPr id="7" name="point-band-1">
             <a:extLst xmlns:a="http://schemas.openxmlformats.org/drawingml/2006/main">
               <a:ext uri="{FF2B5EF4-FFF2-40B4-BE49-F238E27FC236}">
-                <a16:creationId xmlns:a16="http://schemas.microsoft.com/office/drawing/2014/main" id="{88302331-3123-4670-AFD3-B574F611FD2F}"/>
+                <a16:creationId xmlns:a16="http://schemas.microsoft.com/office/drawing/2014/main" id="{6C83DFB3-0960-4CA4-BC7F-7B732C687F94}"/>
               </a:ext>
             </a:extLst>
           </p:cNvPr>
@@ -4629,7 +6797,7 @@
           <p:cNvPr id="8" name="point-1">
             <a:extLst xmlns:a="http://schemas.openxmlformats.org/drawingml/2006/main">
               <a:ext uri="{FF2B5EF4-FFF2-40B4-BE49-F238E27FC236}">
-                <a16:creationId xmlns:a16="http://schemas.microsoft.com/office/drawing/2014/main" id="{9EF4145B-1388-40EF-8EED-C2D3AF66B9D2}"/>
+                <a16:creationId xmlns:a16="http://schemas.microsoft.com/office/drawing/2014/main" id="{339EB329-882F-4741-BE28-B223CF10DC6B}"/>
               </a:ext>
             </a:extLst>
           </p:cNvPr>
@@ -4677,7 +6845,7 @@
                 <a:ea typeface="Helvetica Neue"/>
                 <a:cs typeface="Helvetica Neue"/>
               </a:rPr>
-              <a:t>HTTP provides transport.</a:t>
+              <a:t>This course uses the JSON-RPC binding over HTTP.</a:t>
             </a:r>
           </a:p>
         </p:txBody>
@@ -4687,7 +6855,7 @@
           <p:cNvPr id="9" name="point-band-2">
             <a:extLst xmlns:a="http://schemas.openxmlformats.org/drawingml/2006/main">
               <a:ext uri="{FF2B5EF4-FFF2-40B4-BE49-F238E27FC236}">
-                <a16:creationId xmlns:a16="http://schemas.microsoft.com/office/drawing/2014/main" id="{CAEC9C72-2E26-444F-B35E-A6C78A3C865F}"/>
+                <a16:creationId xmlns:a16="http://schemas.microsoft.com/office/drawing/2014/main" id="{085B30CC-BAF0-4793-B628-80B5AFC12744}"/>
               </a:ext>
             </a:extLst>
           </p:cNvPr>
@@ -4720,7 +6888,7 @@
           <p:cNvPr id="10" name="point-2">
             <a:extLst xmlns:a="http://schemas.openxmlformats.org/drawingml/2006/main">
               <a:ext uri="{FF2B5EF4-FFF2-40B4-BE49-F238E27FC236}">
-                <a16:creationId xmlns:a16="http://schemas.microsoft.com/office/drawing/2014/main" id="{7D6C1E28-3E91-4E39-B0AD-5FCE4F60DA45}"/>
+                <a16:creationId xmlns:a16="http://schemas.microsoft.com/office/drawing/2014/main" id="{8F7DD6C5-9A52-4178-89D7-F054297DF878}"/>
               </a:ext>
             </a:extLst>
           </p:cNvPr>
@@ -4768,7 +6936,7 @@
                 <a:ea typeface="Helvetica Neue"/>
                 <a:cs typeface="Helvetica Neue"/>
               </a:rPr>
-              <a:t>JSON-RPC structures requests and responses.</a:t>
+              <a:t>Other defined bindings include gRPC and HTTP/REST.</a:t>
             </a:r>
           </a:p>
         </p:txBody>
@@ -4778,7 +6946,7 @@
           <p:cNvPr id="11" name="point-band-3">
             <a:extLst xmlns:a="http://schemas.openxmlformats.org/drawingml/2006/main">
               <a:ext uri="{FF2B5EF4-FFF2-40B4-BE49-F238E27FC236}">
-                <a16:creationId xmlns:a16="http://schemas.microsoft.com/office/drawing/2014/main" id="{BAF0AF81-F361-4DD3-B064-27175A715F0A}"/>
+                <a16:creationId xmlns:a16="http://schemas.microsoft.com/office/drawing/2014/main" id="{A75404FB-97E3-46ED-A4C2-EBFF8751BAD0}"/>
               </a:ext>
             </a:extLst>
           </p:cNvPr>
@@ -4811,7 +6979,7 @@
           <p:cNvPr id="12" name="point-3">
             <a:extLst xmlns:a="http://schemas.openxmlformats.org/drawingml/2006/main">
               <a:ext uri="{FF2B5EF4-FFF2-40B4-BE49-F238E27FC236}">
-                <a16:creationId xmlns:a16="http://schemas.microsoft.com/office/drawing/2014/main" id="{3F82B1FF-9D36-4C75-B20B-66EA385907F2}"/>
+                <a16:creationId xmlns:a16="http://schemas.microsoft.com/office/drawing/2014/main" id="{C382220E-99A1-46CB-949F-47EAD2B9AD7E}"/>
               </a:ext>
             </a:extLst>
           </p:cNvPr>
@@ -4859,7 +7027,7 @@
                 <a:ea typeface="Helvetica Neue"/>
                 <a:cs typeface="Helvetica Neue"/>
               </a:rPr>
-              <a:t>SSE streams task updates.</a:t>
+              <a:t>The JSON-RPC streaming path uses server-sent events.</a:t>
             </a:r>
           </a:p>
         </p:txBody>
@@ -4869,7 +7037,7 @@
           <p:cNvPr id="13" name="point-band-4">
             <a:extLst xmlns:a="http://schemas.openxmlformats.org/drawingml/2006/main">
               <a:ext uri="{FF2B5EF4-FFF2-40B4-BE49-F238E27FC236}">
-                <a16:creationId xmlns:a16="http://schemas.microsoft.com/office/drawing/2014/main" id="{2559D737-DCDA-471C-AE35-B8713A919AE0}"/>
+                <a16:creationId xmlns:a16="http://schemas.microsoft.com/office/drawing/2014/main" id="{BD734EE3-EFBE-49F8-A332-7817417CA80C}"/>
               </a:ext>
             </a:extLst>
           </p:cNvPr>
@@ -4902,7 +7070,7 @@
           <p:cNvPr id="14" name="point-4">
             <a:extLst xmlns:a="http://schemas.openxmlformats.org/drawingml/2006/main">
               <a:ext uri="{FF2B5EF4-FFF2-40B4-BE49-F238E27FC236}">
-                <a16:creationId xmlns:a16="http://schemas.microsoft.com/office/drawing/2014/main" id="{17E64C12-688C-44E1-B4AB-32346B06A9E4}"/>
+                <a16:creationId xmlns:a16="http://schemas.microsoft.com/office/drawing/2014/main" id="{DB045329-3DDE-4255-BE22-4940E7E03E11}"/>
               </a:ext>
             </a:extLst>
           </p:cNvPr>
@@ -4950,7 +7118,7 @@
                 <a:ea typeface="Helvetica Neue"/>
                 <a:cs typeface="Helvetica Neue"/>
               </a:rPr>
-              <a:t>Standard authentication lowers integration friction.</a:t>
+              <a:t>The application authenticates and authorizes each caller.</a:t>
             </a:r>
           </a:p>
         </p:txBody>
@@ -4958,7 +7126,7 @@
     </p:spTree>
     <p:extLst>
       <p:ext uri="{BB962C8B-B14F-4D97-AF65-F5344CB8AC3E}">
-        <p14:creationId xmlns:p14="http://schemas.microsoft.com/office/powerpoint/2010/main" val="1646762644"/>
+        <p14:creationId xmlns:p14="http://schemas.microsoft.com/office/powerpoint/2010/main" val="1560225279"/>
       </p:ext>
     </p:extLst>
   </p:cSld>
@@ -4989,7 +7157,7 @@
           <p:cNvPr id="9" name="accent-line">
             <a:extLst xmlns:a="http://schemas.openxmlformats.org/drawingml/2006/main">
               <a:ext uri="{FF2B5EF4-FFF2-40B4-BE49-F238E27FC236}">
-                <a16:creationId xmlns:a16="http://schemas.microsoft.com/office/drawing/2014/main" id="{B6A5EB25-56E6-40C7-A64B-75BF1998032B}"/>
+                <a16:creationId xmlns:a16="http://schemas.microsoft.com/office/drawing/2014/main" id="{A00483F4-94DB-4A9C-9042-9F1B63ACD59E}"/>
               </a:ext>
             </a:extLst>
           </p:cNvPr>
@@ -5022,7 +7190,7 @@
           <p:cNvPr id="2" name="chapter-label">
             <a:extLst xmlns:a="http://schemas.openxmlformats.org/drawingml/2006/main">
               <a:ext uri="{FF2B5EF4-FFF2-40B4-BE49-F238E27FC236}">
-                <a16:creationId xmlns:a16="http://schemas.microsoft.com/office/drawing/2014/main" id="{E561F377-1220-40D4-9A06-231ACC5DCF3F}"/>
+                <a16:creationId xmlns:a16="http://schemas.microsoft.com/office/drawing/2014/main" id="{2C3A17FD-27BE-49BC-8094-EFDD683AD53F}"/>
               </a:ext>
             </a:extLst>
           </p:cNvPr>
@@ -5080,7 +7248,7 @@
           <p:cNvPr id="3" name="slide-number">
             <a:extLst xmlns:a="http://schemas.openxmlformats.org/drawingml/2006/main">
               <a:ext uri="{FF2B5EF4-FFF2-40B4-BE49-F238E27FC236}">
-                <a16:creationId xmlns:a16="http://schemas.microsoft.com/office/drawing/2014/main" id="{A3217B9A-D03A-4216-99A5-7E7BD5404E29}"/>
+                <a16:creationId xmlns:a16="http://schemas.microsoft.com/office/drawing/2014/main" id="{570B68CA-FDEC-46AA-A504-CFC318752EA8}"/>
               </a:ext>
             </a:extLst>
           </p:cNvPr>
@@ -5138,7 +7306,7 @@
           <p:cNvPr id="4" name="chapter-footer">
             <a:extLst xmlns:a="http://schemas.openxmlformats.org/drawingml/2006/main">
               <a:ext uri="{FF2B5EF4-FFF2-40B4-BE49-F238E27FC236}">
-                <a16:creationId xmlns:a16="http://schemas.microsoft.com/office/drawing/2014/main" id="{88FEEC75-0B3F-4E05-9EFE-236160F36189}"/>
+                <a16:creationId xmlns:a16="http://schemas.microsoft.com/office/drawing/2014/main" id="{1BFD02EB-F342-473F-9874-E5DF712D103E}"/>
               </a:ext>
             </a:extLst>
           </p:cNvPr>
@@ -5196,7 +7364,7 @@
           <p:cNvPr id="5" name="section-title">
             <a:extLst xmlns:a="http://schemas.openxmlformats.org/drawingml/2006/main">
               <a:ext uri="{FF2B5EF4-FFF2-40B4-BE49-F238E27FC236}">
-                <a16:creationId xmlns:a16="http://schemas.microsoft.com/office/drawing/2014/main" id="{43944EC5-D3BC-48FD-A0D3-770E00546421}"/>
+                <a16:creationId xmlns:a16="http://schemas.microsoft.com/office/drawing/2014/main" id="{A26BEC0B-6702-47C9-8B41-1475AB420732}"/>
               </a:ext>
             </a:extLst>
           </p:cNvPr>
@@ -5254,7 +7422,7 @@
           <p:cNvPr id="6" name="section-explanation">
             <a:extLst xmlns:a="http://schemas.openxmlformats.org/drawingml/2006/main">
               <a:ext uri="{FF2B5EF4-FFF2-40B4-BE49-F238E27FC236}">
-                <a16:creationId xmlns:a16="http://schemas.microsoft.com/office/drawing/2014/main" id="{33C411DF-FDA1-495E-ABA5-8A91EDFC973F}"/>
+                <a16:creationId xmlns:a16="http://schemas.microsoft.com/office/drawing/2014/main" id="{4A8A7D20-9A35-48E6-8AC4-A57C0DDBEF9A}"/>
               </a:ext>
             </a:extLst>
           </p:cNvPr>
@@ -5312,7 +7480,7 @@
           <p:cNvPr id="7" name="column-rule">
             <a:extLst xmlns:a="http://schemas.openxmlformats.org/drawingml/2006/main">
               <a:ext uri="{FF2B5EF4-FFF2-40B4-BE49-F238E27FC236}">
-                <a16:creationId xmlns:a16="http://schemas.microsoft.com/office/drawing/2014/main" id="{7DF5B8B9-68DE-40C9-98FA-6FF178FA5E18}"/>
+                <a16:creationId xmlns:a16="http://schemas.microsoft.com/office/drawing/2014/main" id="{9015BC1E-1BC1-4003-9135-560A518A915B}"/>
               </a:ext>
             </a:extLst>
           </p:cNvPr>
@@ -5345,7 +7513,7 @@
           <p:cNvPr id="8" name="section-points">
             <a:extLst xmlns:a="http://schemas.openxmlformats.org/drawingml/2006/main">
               <a:ext uri="{FF2B5EF4-FFF2-40B4-BE49-F238E27FC236}">
-                <a16:creationId xmlns:a16="http://schemas.microsoft.com/office/drawing/2014/main" id="{21B628B2-52D5-472F-B5CE-8DB0EC522CDA}"/>
+                <a16:creationId xmlns:a16="http://schemas.microsoft.com/office/drawing/2014/main" id="{10891E6C-BC83-4058-9E8A-F551CE0AB0FD}"/>
               </a:ext>
             </a:extLst>
           </p:cNvPr>
@@ -5457,7 +7625,7 @@
     </p:spTree>
     <p:extLst>
       <p:ext uri="{BB962C8B-B14F-4D97-AF65-F5344CB8AC3E}">
-        <p14:creationId xmlns:p14="http://schemas.microsoft.com/office/powerpoint/2010/main" val="1923015922"/>
+        <p14:creationId xmlns:p14="http://schemas.microsoft.com/office/powerpoint/2010/main" val="2142205111"/>
       </p:ext>
     </p:extLst>
   </p:cSld>
@@ -5488,7 +7656,7 @@
           <p:cNvPr id="15" name="accent-line">
             <a:extLst xmlns:a="http://schemas.openxmlformats.org/drawingml/2006/main">
               <a:ext uri="{FF2B5EF4-FFF2-40B4-BE49-F238E27FC236}">
-                <a16:creationId xmlns:a16="http://schemas.microsoft.com/office/drawing/2014/main" id="{7F54FACF-903B-4A5C-B81C-73A82EE2B969}"/>
+                <a16:creationId xmlns:a16="http://schemas.microsoft.com/office/drawing/2014/main" id="{39079289-BE12-4EE7-8405-A5D928457B3D}"/>
               </a:ext>
             </a:extLst>
           </p:cNvPr>
@@ -5521,7 +7689,7 @@
           <p:cNvPr id="2" name="chapter-label">
             <a:extLst xmlns:a="http://schemas.openxmlformats.org/drawingml/2006/main">
               <a:ext uri="{FF2B5EF4-FFF2-40B4-BE49-F238E27FC236}">
-                <a16:creationId xmlns:a16="http://schemas.microsoft.com/office/drawing/2014/main" id="{0ABDC18F-B0DA-4759-AA1C-15F1A3679098}"/>
+                <a16:creationId xmlns:a16="http://schemas.microsoft.com/office/drawing/2014/main" id="{9FABB581-CDB3-4E44-BF38-A3451894CBCF}"/>
               </a:ext>
             </a:extLst>
           </p:cNvPr>
@@ -5579,7 +7747,7 @@
           <p:cNvPr id="3" name="slide-number">
             <a:extLst xmlns:a="http://schemas.openxmlformats.org/drawingml/2006/main">
               <a:ext uri="{FF2B5EF4-FFF2-40B4-BE49-F238E27FC236}">
-                <a16:creationId xmlns:a16="http://schemas.microsoft.com/office/drawing/2014/main" id="{B7644F41-22B1-4E8D-96ED-0FFD2B72EF8D}"/>
+                <a16:creationId xmlns:a16="http://schemas.microsoft.com/office/drawing/2014/main" id="{36908F44-E428-4A77-A8C8-64DCBD1D9521}"/>
               </a:ext>
             </a:extLst>
           </p:cNvPr>
@@ -5637,7 +7805,7 @@
           <p:cNvPr id="4" name="chapter-footer">
             <a:extLst xmlns:a="http://schemas.openxmlformats.org/drawingml/2006/main">
               <a:ext uri="{FF2B5EF4-FFF2-40B4-BE49-F238E27FC236}">
-                <a16:creationId xmlns:a16="http://schemas.microsoft.com/office/drawing/2014/main" id="{29BB611C-E35F-4CB6-802C-62C2F63CF785}"/>
+                <a16:creationId xmlns:a16="http://schemas.microsoft.com/office/drawing/2014/main" id="{09E1DA30-9D3E-41C9-AB38-A305F9021AD8}"/>
               </a:ext>
             </a:extLst>
           </p:cNvPr>
@@ -5695,7 +7863,7 @@
           <p:cNvPr id="5" name="section-title">
             <a:extLst xmlns:a="http://schemas.openxmlformats.org/drawingml/2006/main">
               <a:ext uri="{FF2B5EF4-FFF2-40B4-BE49-F238E27FC236}">
-                <a16:creationId xmlns:a16="http://schemas.microsoft.com/office/drawing/2014/main" id="{03B44D19-0251-44BB-8D64-5B2A3085F82B}"/>
+                <a16:creationId xmlns:a16="http://schemas.microsoft.com/office/drawing/2014/main" id="{CE37210D-5E28-4D18-98FE-F448BB9E5823}"/>
               </a:ext>
             </a:extLst>
           </p:cNvPr>
@@ -5753,7 +7921,7 @@
           <p:cNvPr id="6" name="section-explanation">
             <a:extLst xmlns:a="http://schemas.openxmlformats.org/drawingml/2006/main">
               <a:ext uri="{FF2B5EF4-FFF2-40B4-BE49-F238E27FC236}">
-                <a16:creationId xmlns:a16="http://schemas.microsoft.com/office/drawing/2014/main" id="{3E2AF17E-19CC-4D15-9E56-C41F2F723BEB}"/>
+                <a16:creationId xmlns:a16="http://schemas.microsoft.com/office/drawing/2014/main" id="{55112C45-0A10-4F47-BB35-20CD3B33BCDC}"/>
               </a:ext>
             </a:extLst>
           </p:cNvPr>
@@ -5811,7 +7979,7 @@
           <p:cNvPr id="7" name="point-band-1">
             <a:extLst xmlns:a="http://schemas.openxmlformats.org/drawingml/2006/main">
               <a:ext uri="{FF2B5EF4-FFF2-40B4-BE49-F238E27FC236}">
-                <a16:creationId xmlns:a16="http://schemas.microsoft.com/office/drawing/2014/main" id="{E75A54FB-E4AA-4163-83E4-2C0C6480F38E}"/>
+                <a16:creationId xmlns:a16="http://schemas.microsoft.com/office/drawing/2014/main" id="{84724C10-B747-4398-97C5-01F249A61685}"/>
               </a:ext>
             </a:extLst>
           </p:cNvPr>
@@ -5844,7 +8012,7 @@
           <p:cNvPr id="8" name="point-1">
             <a:extLst xmlns:a="http://schemas.openxmlformats.org/drawingml/2006/main">
               <a:ext uri="{FF2B5EF4-FFF2-40B4-BE49-F238E27FC236}">
-                <a16:creationId xmlns:a16="http://schemas.microsoft.com/office/drawing/2014/main" id="{D908848D-9786-4F8F-8302-A1D68C2D31C6}"/>
+                <a16:creationId xmlns:a16="http://schemas.microsoft.com/office/drawing/2014/main" id="{920E1DE7-30B8-491C-BCE8-771DEC175DF0}"/>
               </a:ext>
             </a:extLst>
           </p:cNvPr>
@@ -5902,7 +8070,7 @@
           <p:cNvPr id="9" name="point-band-2">
             <a:extLst xmlns:a="http://schemas.openxmlformats.org/drawingml/2006/main">
               <a:ext uri="{FF2B5EF4-FFF2-40B4-BE49-F238E27FC236}">
-                <a16:creationId xmlns:a16="http://schemas.microsoft.com/office/drawing/2014/main" id="{007B9245-8434-4D5C-9EB5-22680A4C2EBE}"/>
+                <a16:creationId xmlns:a16="http://schemas.microsoft.com/office/drawing/2014/main" id="{14D69761-C4E1-43CA-ACF8-EE9F7D0434DA}"/>
               </a:ext>
             </a:extLst>
           </p:cNvPr>
@@ -5935,7 +8103,7 @@
           <p:cNvPr id="10" name="point-2">
             <a:extLst xmlns:a="http://schemas.openxmlformats.org/drawingml/2006/main">
               <a:ext uri="{FF2B5EF4-FFF2-40B4-BE49-F238E27FC236}">
-                <a16:creationId xmlns:a16="http://schemas.microsoft.com/office/drawing/2014/main" id="{1969A41F-098A-4938-8B34-889AA33430E8}"/>
+                <a16:creationId xmlns:a16="http://schemas.microsoft.com/office/drawing/2014/main" id="{54DA0294-E8EE-42DA-B612-044C4BDA334D}"/>
               </a:ext>
             </a:extLst>
           </p:cNvPr>
@@ -5993,7 +8161,7 @@
           <p:cNvPr id="11" name="point-band-3">
             <a:extLst xmlns:a="http://schemas.openxmlformats.org/drawingml/2006/main">
               <a:ext uri="{FF2B5EF4-FFF2-40B4-BE49-F238E27FC236}">
-                <a16:creationId xmlns:a16="http://schemas.microsoft.com/office/drawing/2014/main" id="{0F91C834-18E1-4B38-AFB5-D2C3A5121D2A}"/>
+                <a16:creationId xmlns:a16="http://schemas.microsoft.com/office/drawing/2014/main" id="{F005206D-5CB1-46AD-A5DF-94B6D35F0105}"/>
               </a:ext>
             </a:extLst>
           </p:cNvPr>
@@ -6026,7 +8194,7 @@
           <p:cNvPr id="12" name="point-3">
             <a:extLst xmlns:a="http://schemas.openxmlformats.org/drawingml/2006/main">
               <a:ext uri="{FF2B5EF4-FFF2-40B4-BE49-F238E27FC236}">
-                <a16:creationId xmlns:a16="http://schemas.microsoft.com/office/drawing/2014/main" id="{664DF763-5C59-4D64-82E6-43C6B926AD92}"/>
+                <a16:creationId xmlns:a16="http://schemas.microsoft.com/office/drawing/2014/main" id="{2EF0D453-D91E-4371-BC77-5740B4B891F4}"/>
               </a:ext>
             </a:extLst>
           </p:cNvPr>
@@ -6084,7 +8252,7 @@
           <p:cNvPr id="13" name="point-band-4">
             <a:extLst xmlns:a="http://schemas.openxmlformats.org/drawingml/2006/main">
               <a:ext uri="{FF2B5EF4-FFF2-40B4-BE49-F238E27FC236}">
-                <a16:creationId xmlns:a16="http://schemas.microsoft.com/office/drawing/2014/main" id="{DA49F2B4-7BB8-4AEA-90AA-B3DA1284DB52}"/>
+                <a16:creationId xmlns:a16="http://schemas.microsoft.com/office/drawing/2014/main" id="{3DB4BE67-6A53-44E8-B155-D775ABDFF5D3}"/>
               </a:ext>
             </a:extLst>
           </p:cNvPr>
@@ -6117,7 +8285,7 @@
           <p:cNvPr id="14" name="point-4">
             <a:extLst xmlns:a="http://schemas.openxmlformats.org/drawingml/2006/main">
               <a:ext uri="{FF2B5EF4-FFF2-40B4-BE49-F238E27FC236}">
-                <a16:creationId xmlns:a16="http://schemas.microsoft.com/office/drawing/2014/main" id="{AA8B001C-9FD5-4A86-ABDE-B1303F63A378}"/>
+                <a16:creationId xmlns:a16="http://schemas.microsoft.com/office/drawing/2014/main" id="{E734285F-8548-4CAF-9774-ED892AADAABE}"/>
               </a:ext>
             </a:extLst>
           </p:cNvPr>
@@ -6173,7 +8341,7 @@
     </p:spTree>
     <p:extLst>
       <p:ext uri="{BB962C8B-B14F-4D97-AF65-F5344CB8AC3E}">
-        <p14:creationId xmlns:p14="http://schemas.microsoft.com/office/powerpoint/2010/main" val="1061937247"/>
+        <p14:creationId xmlns:p14="http://schemas.microsoft.com/office/powerpoint/2010/main" val="1310895322"/>
       </p:ext>
     </p:extLst>
   </p:cSld>
@@ -6204,7 +8372,7 @@
           <p:cNvPr id="9" name="accent-line">
             <a:extLst xmlns:a="http://schemas.openxmlformats.org/drawingml/2006/main">
               <a:ext uri="{FF2B5EF4-FFF2-40B4-BE49-F238E27FC236}">
-                <a16:creationId xmlns:a16="http://schemas.microsoft.com/office/drawing/2014/main" id="{584F8A84-42DF-444D-8FF7-B71201A056C8}"/>
+                <a16:creationId xmlns:a16="http://schemas.microsoft.com/office/drawing/2014/main" id="{27F87110-3726-463F-A820-4EEC29D93573}"/>
               </a:ext>
             </a:extLst>
           </p:cNvPr>
@@ -6237,7 +8405,7 @@
           <p:cNvPr id="2" name="chapter-label">
             <a:extLst xmlns:a="http://schemas.openxmlformats.org/drawingml/2006/main">
               <a:ext uri="{FF2B5EF4-FFF2-40B4-BE49-F238E27FC236}">
-                <a16:creationId xmlns:a16="http://schemas.microsoft.com/office/drawing/2014/main" id="{26760A0C-F4D5-4E0B-BBB7-6F12B54138E2}"/>
+                <a16:creationId xmlns:a16="http://schemas.microsoft.com/office/drawing/2014/main" id="{A8EAA780-F15E-4913-BC96-146D5F28BDC0}"/>
               </a:ext>
             </a:extLst>
           </p:cNvPr>
@@ -6295,7 +8463,7 @@
           <p:cNvPr id="3" name="slide-number">
             <a:extLst xmlns:a="http://schemas.openxmlformats.org/drawingml/2006/main">
               <a:ext uri="{FF2B5EF4-FFF2-40B4-BE49-F238E27FC236}">
-                <a16:creationId xmlns:a16="http://schemas.microsoft.com/office/drawing/2014/main" id="{729AE1D9-C7B7-4FE8-A921-4584CD5EE2CD}"/>
+                <a16:creationId xmlns:a16="http://schemas.microsoft.com/office/drawing/2014/main" id="{AEEC1FCB-820B-488D-B968-5ED1427D53A5}"/>
               </a:ext>
             </a:extLst>
           </p:cNvPr>
@@ -6353,7 +8521,7 @@
           <p:cNvPr id="4" name="chapter-footer">
             <a:extLst xmlns:a="http://schemas.openxmlformats.org/drawingml/2006/main">
               <a:ext uri="{FF2B5EF4-FFF2-40B4-BE49-F238E27FC236}">
-                <a16:creationId xmlns:a16="http://schemas.microsoft.com/office/drawing/2014/main" id="{AAF0EAE5-71B0-49D1-81D0-6B58F33D4A48}"/>
+                <a16:creationId xmlns:a16="http://schemas.microsoft.com/office/drawing/2014/main" id="{1CFF78C9-194E-4898-9EA6-678F2EEF595D}"/>
               </a:ext>
             </a:extLst>
           </p:cNvPr>
@@ -6411,7 +8579,7 @@
           <p:cNvPr id="5" name="section-title">
             <a:extLst xmlns:a="http://schemas.openxmlformats.org/drawingml/2006/main">
               <a:ext uri="{FF2B5EF4-FFF2-40B4-BE49-F238E27FC236}">
-                <a16:creationId xmlns:a16="http://schemas.microsoft.com/office/drawing/2014/main" id="{BDE03027-FAEC-4BBC-81C3-E09C63DB6EA3}"/>
+                <a16:creationId xmlns:a16="http://schemas.microsoft.com/office/drawing/2014/main" id="{C8CDC144-E65C-4FF6-A774-7E7F216BCF78}"/>
               </a:ext>
             </a:extLst>
           </p:cNvPr>
@@ -6469,7 +8637,7 @@
           <p:cNvPr id="6" name="section-explanation">
             <a:extLst xmlns:a="http://schemas.openxmlformats.org/drawingml/2006/main">
               <a:ext uri="{FF2B5EF4-FFF2-40B4-BE49-F238E27FC236}">
-                <a16:creationId xmlns:a16="http://schemas.microsoft.com/office/drawing/2014/main" id="{BC046546-C835-4264-840D-6E3B24674D32}"/>
+                <a16:creationId xmlns:a16="http://schemas.microsoft.com/office/drawing/2014/main" id="{FB0C5617-52AB-429E-B629-E395E11F7014}"/>
               </a:ext>
             </a:extLst>
           </p:cNvPr>
@@ -6527,7 +8695,7 @@
           <p:cNvPr id="7" name="column-rule">
             <a:extLst xmlns:a="http://schemas.openxmlformats.org/drawingml/2006/main">
               <a:ext uri="{FF2B5EF4-FFF2-40B4-BE49-F238E27FC236}">
-                <a16:creationId xmlns:a16="http://schemas.microsoft.com/office/drawing/2014/main" id="{B87BDFBB-2A17-41F3-896C-E5A47E1C0BED}"/>
+                <a16:creationId xmlns:a16="http://schemas.microsoft.com/office/drawing/2014/main" id="{DBC513AE-EE8C-468C-81C8-D4245AB5FC16}"/>
               </a:ext>
             </a:extLst>
           </p:cNvPr>
@@ -6560,7 +8728,7 @@
           <p:cNvPr id="8" name="section-points">
             <a:extLst xmlns:a="http://schemas.openxmlformats.org/drawingml/2006/main">
               <a:ext uri="{FF2B5EF4-FFF2-40B4-BE49-F238E27FC236}">
-                <a16:creationId xmlns:a16="http://schemas.microsoft.com/office/drawing/2014/main" id="{A22F6DAB-BC63-44F2-AB24-AB02F0FCB99B}"/>
+                <a16:creationId xmlns:a16="http://schemas.microsoft.com/office/drawing/2014/main" id="{E31A8A53-DF15-4370-A847-2F68A789EFFC}"/>
               </a:ext>
             </a:extLst>
           </p:cNvPr>
@@ -6672,7 +8840,7 @@
     </p:spTree>
     <p:extLst>
       <p:ext uri="{BB962C8B-B14F-4D97-AF65-F5344CB8AC3E}">
-        <p14:creationId xmlns:p14="http://schemas.microsoft.com/office/powerpoint/2010/main" val="2030556776"/>
+        <p14:creationId xmlns:p14="http://schemas.microsoft.com/office/powerpoint/2010/main" val="16504930"/>
       </p:ext>
     </p:extLst>
   </p:cSld>
@@ -6703,7 +8871,7 @@
           <p:cNvPr id="15" name="accent-line">
             <a:extLst xmlns:a="http://schemas.openxmlformats.org/drawingml/2006/main">
               <a:ext uri="{FF2B5EF4-FFF2-40B4-BE49-F238E27FC236}">
-                <a16:creationId xmlns:a16="http://schemas.microsoft.com/office/drawing/2014/main" id="{FACA8A81-3AD0-4A45-A653-1128B3D78E7C}"/>
+                <a16:creationId xmlns:a16="http://schemas.microsoft.com/office/drawing/2014/main" id="{BF310CCD-A87A-44CC-A27B-3182ABE33B7A}"/>
               </a:ext>
             </a:extLst>
           </p:cNvPr>
@@ -6736,7 +8904,7 @@
           <p:cNvPr id="2" name="chapter-label">
             <a:extLst xmlns:a="http://schemas.openxmlformats.org/drawingml/2006/main">
               <a:ext uri="{FF2B5EF4-FFF2-40B4-BE49-F238E27FC236}">
-                <a16:creationId xmlns:a16="http://schemas.microsoft.com/office/drawing/2014/main" id="{7536A8B2-B17E-4381-86E5-00E6C35A788E}"/>
+                <a16:creationId xmlns:a16="http://schemas.microsoft.com/office/drawing/2014/main" id="{B8B306BA-C65E-4CF9-9FFC-D20C80D1036D}"/>
               </a:ext>
             </a:extLst>
           </p:cNvPr>
@@ -6794,7 +8962,7 @@
           <p:cNvPr id="3" name="slide-number">
             <a:extLst xmlns:a="http://schemas.openxmlformats.org/drawingml/2006/main">
               <a:ext uri="{FF2B5EF4-FFF2-40B4-BE49-F238E27FC236}">
-                <a16:creationId xmlns:a16="http://schemas.microsoft.com/office/drawing/2014/main" id="{5656F57B-DC10-43A6-8F92-76A69BCDF638}"/>
+                <a16:creationId xmlns:a16="http://schemas.microsoft.com/office/drawing/2014/main" id="{918C3DF8-36BB-4F8F-A6A3-12C89FCA34A1}"/>
               </a:ext>
             </a:extLst>
           </p:cNvPr>
@@ -6852,7 +9020,7 @@
           <p:cNvPr id="4" name="chapter-footer">
             <a:extLst xmlns:a="http://schemas.openxmlformats.org/drawingml/2006/main">
               <a:ext uri="{FF2B5EF4-FFF2-40B4-BE49-F238E27FC236}">
-                <a16:creationId xmlns:a16="http://schemas.microsoft.com/office/drawing/2014/main" id="{3827AE9C-F298-4FD0-85DB-D129A1621F60}"/>
+                <a16:creationId xmlns:a16="http://schemas.microsoft.com/office/drawing/2014/main" id="{3310F70F-FDC1-4C0C-AC10-EF0CD5CBE8E0}"/>
               </a:ext>
             </a:extLst>
           </p:cNvPr>
@@ -6910,7 +9078,7 @@
           <p:cNvPr id="5" name="section-title">
             <a:extLst xmlns:a="http://schemas.openxmlformats.org/drawingml/2006/main">
               <a:ext uri="{FF2B5EF4-FFF2-40B4-BE49-F238E27FC236}">
-                <a16:creationId xmlns:a16="http://schemas.microsoft.com/office/drawing/2014/main" id="{3C7B624B-93DD-4BFC-8AF0-72388969CC37}"/>
+                <a16:creationId xmlns:a16="http://schemas.microsoft.com/office/drawing/2014/main" id="{8ECA3979-EEDA-465F-9FBF-AFAFB3F8A4AE}"/>
               </a:ext>
             </a:extLst>
           </p:cNvPr>
@@ -6968,7 +9136,7 @@
           <p:cNvPr id="6" name="section-explanation">
             <a:extLst xmlns:a="http://schemas.openxmlformats.org/drawingml/2006/main">
               <a:ext uri="{FF2B5EF4-FFF2-40B4-BE49-F238E27FC236}">
-                <a16:creationId xmlns:a16="http://schemas.microsoft.com/office/drawing/2014/main" id="{92B60078-A317-4D23-8302-7957900D80F5}"/>
+                <a16:creationId xmlns:a16="http://schemas.microsoft.com/office/drawing/2014/main" id="{46D37D45-1C2F-42C6-8FC7-44BB06C15235}"/>
               </a:ext>
             </a:extLst>
           </p:cNvPr>
@@ -7026,7 +9194,7 @@
           <p:cNvPr id="7" name="point-band-1">
             <a:extLst xmlns:a="http://schemas.openxmlformats.org/drawingml/2006/main">
               <a:ext uri="{FF2B5EF4-FFF2-40B4-BE49-F238E27FC236}">
-                <a16:creationId xmlns:a16="http://schemas.microsoft.com/office/drawing/2014/main" id="{50B07605-7416-4EEF-BE99-EE11BC2381CD}"/>
+                <a16:creationId xmlns:a16="http://schemas.microsoft.com/office/drawing/2014/main" id="{8AE04E56-CD85-4DE6-8A86-0454379C36B3}"/>
               </a:ext>
             </a:extLst>
           </p:cNvPr>
@@ -7059,7 +9227,7 @@
           <p:cNvPr id="8" name="point-1">
             <a:extLst xmlns:a="http://schemas.openxmlformats.org/drawingml/2006/main">
               <a:ext uri="{FF2B5EF4-FFF2-40B4-BE49-F238E27FC236}">
-                <a16:creationId xmlns:a16="http://schemas.microsoft.com/office/drawing/2014/main" id="{0E26FCE8-12A3-4277-B755-4B9A1B2C9D3A}"/>
+                <a16:creationId xmlns:a16="http://schemas.microsoft.com/office/drawing/2014/main" id="{99FE894B-E1F6-4D91-8B09-76F99B7EAD30}"/>
               </a:ext>
             </a:extLst>
           </p:cNvPr>
@@ -7117,7 +9285,7 @@
           <p:cNvPr id="9" name="point-band-2">
             <a:extLst xmlns:a="http://schemas.openxmlformats.org/drawingml/2006/main">
               <a:ext uri="{FF2B5EF4-FFF2-40B4-BE49-F238E27FC236}">
-                <a16:creationId xmlns:a16="http://schemas.microsoft.com/office/drawing/2014/main" id="{84BA3A23-534B-4552-B817-CFA105D50A78}"/>
+                <a16:creationId xmlns:a16="http://schemas.microsoft.com/office/drawing/2014/main" id="{8AE8B489-335F-44A3-B05D-615ECDFF9B06}"/>
               </a:ext>
             </a:extLst>
           </p:cNvPr>
@@ -7150,7 +9318,7 @@
           <p:cNvPr id="10" name="point-2">
             <a:extLst xmlns:a="http://schemas.openxmlformats.org/drawingml/2006/main">
               <a:ext uri="{FF2B5EF4-FFF2-40B4-BE49-F238E27FC236}">
-                <a16:creationId xmlns:a16="http://schemas.microsoft.com/office/drawing/2014/main" id="{B9F90D71-E79C-41A9-8E6B-E45C41879E92}"/>
+                <a16:creationId xmlns:a16="http://schemas.microsoft.com/office/drawing/2014/main" id="{D90970D3-B766-4F70-A954-DF0BE94E62B5}"/>
               </a:ext>
             </a:extLst>
           </p:cNvPr>
@@ -7208,7 +9376,7 @@
           <p:cNvPr id="11" name="point-band-3">
             <a:extLst xmlns:a="http://schemas.openxmlformats.org/drawingml/2006/main">
               <a:ext uri="{FF2B5EF4-FFF2-40B4-BE49-F238E27FC236}">
-                <a16:creationId xmlns:a16="http://schemas.microsoft.com/office/drawing/2014/main" id="{0C6C2DC5-3BAC-4535-8DE0-13F094BC0B2E}"/>
+                <a16:creationId xmlns:a16="http://schemas.microsoft.com/office/drawing/2014/main" id="{5B3E6C8E-24D0-467D-BB96-A0E8C5155C01}"/>
               </a:ext>
             </a:extLst>
           </p:cNvPr>
@@ -7241,7 +9409,7 @@
           <p:cNvPr id="12" name="point-3">
             <a:extLst xmlns:a="http://schemas.openxmlformats.org/drawingml/2006/main">
               <a:ext uri="{FF2B5EF4-FFF2-40B4-BE49-F238E27FC236}">
-                <a16:creationId xmlns:a16="http://schemas.microsoft.com/office/drawing/2014/main" id="{DC5862D7-2A72-4331-A203-C7A7138F6A6C}"/>
+                <a16:creationId xmlns:a16="http://schemas.microsoft.com/office/drawing/2014/main" id="{A3D4C554-B7FC-4EF3-9168-A6A97FDB53A9}"/>
               </a:ext>
             </a:extLst>
           </p:cNvPr>
@@ -7299,7 +9467,7 @@
           <p:cNvPr id="13" name="point-band-4">
             <a:extLst xmlns:a="http://schemas.openxmlformats.org/drawingml/2006/main">
               <a:ext uri="{FF2B5EF4-FFF2-40B4-BE49-F238E27FC236}">
-                <a16:creationId xmlns:a16="http://schemas.microsoft.com/office/drawing/2014/main" id="{EE359CF7-6D5B-46C5-9255-5592BAF04374}"/>
+                <a16:creationId xmlns:a16="http://schemas.microsoft.com/office/drawing/2014/main" id="{1DBD188F-64A4-4B51-996C-AA8F13BE8130}"/>
               </a:ext>
             </a:extLst>
           </p:cNvPr>
@@ -7332,7 +9500,7 @@
           <p:cNvPr id="14" name="point-4">
             <a:extLst xmlns:a="http://schemas.openxmlformats.org/drawingml/2006/main">
               <a:ext uri="{FF2B5EF4-FFF2-40B4-BE49-F238E27FC236}">
-                <a16:creationId xmlns:a16="http://schemas.microsoft.com/office/drawing/2014/main" id="{2D630104-8A97-4A22-842B-A7DF83AB8092}"/>
+                <a16:creationId xmlns:a16="http://schemas.microsoft.com/office/drawing/2014/main" id="{3B3F8F84-6F7C-47AD-8FA3-4840829FDF78}"/>
               </a:ext>
             </a:extLst>
           </p:cNvPr>
@@ -7388,7 +9556,7 @@
     </p:spTree>
     <p:extLst>
       <p:ext uri="{BB962C8B-B14F-4D97-AF65-F5344CB8AC3E}">
-        <p14:creationId xmlns:p14="http://schemas.microsoft.com/office/powerpoint/2010/main" val="1249086999"/>
+        <p14:creationId xmlns:p14="http://schemas.microsoft.com/office/powerpoint/2010/main" val="828721919"/>
       </p:ext>
     </p:extLst>
   </p:cSld>
@@ -7416,10 +9584,10 @@
       </p:grpSpPr>
       <p:sp>
         <p:nvSpPr>
-          <p:cNvPr id="18" name="accent-line">
-            <a:extLst xmlns:a="http://schemas.openxmlformats.org/drawingml/2006/main">
-              <a:ext uri="{FF2B5EF4-FFF2-40B4-BE49-F238E27FC236}">
-                <a16:creationId xmlns:a16="http://schemas.microsoft.com/office/drawing/2014/main" id="{440539EB-BEFE-46C3-828A-E97C7942D104}"/>
+          <p:cNvPr id="9" name="accent-line">
+            <a:extLst xmlns:a="http://schemas.openxmlformats.org/drawingml/2006/main">
+              <a:ext uri="{FF2B5EF4-FFF2-40B4-BE49-F238E27FC236}">
+                <a16:creationId xmlns:a16="http://schemas.microsoft.com/office/drawing/2014/main" id="{07359100-CCAB-478B-BC68-0078924A6D46}"/>
               </a:ext>
             </a:extLst>
           </p:cNvPr>
@@ -7452,7 +9620,7 @@
           <p:cNvPr id="2" name="chapter-label">
             <a:extLst xmlns:a="http://schemas.openxmlformats.org/drawingml/2006/main">
               <a:ext uri="{FF2B5EF4-FFF2-40B4-BE49-F238E27FC236}">
-                <a16:creationId xmlns:a16="http://schemas.microsoft.com/office/drawing/2014/main" id="{D7C90532-6930-4623-891E-37EA9BB59B49}"/>
+                <a16:creationId xmlns:a16="http://schemas.microsoft.com/office/drawing/2014/main" id="{AF9F7326-85B4-49F5-A88E-83093E52E520}"/>
               </a:ext>
             </a:extLst>
           </p:cNvPr>
@@ -7500,7 +9668,7 @@
                 <a:ea typeface="Helvetica Neue"/>
                 <a:cs typeface="Helvetica Neue"/>
               </a:rPr>
-              <a:t>EXAM CHECK  /  09</a:t>
+              <a:t>CORE IDEA 07  /  09</a:t>
             </a:r>
           </a:p>
         </p:txBody>
@@ -7510,7 +9678,7 @@
           <p:cNvPr id="3" name="slide-number">
             <a:extLst xmlns:a="http://schemas.openxmlformats.org/drawingml/2006/main">
               <a:ext uri="{FF2B5EF4-FFF2-40B4-BE49-F238E27FC236}">
-                <a16:creationId xmlns:a16="http://schemas.microsoft.com/office/drawing/2014/main" id="{E33EA243-2026-4A9B-992C-28FD82E9B7DD}"/>
+                <a16:creationId xmlns:a16="http://schemas.microsoft.com/office/drawing/2014/main" id="{B2EF5060-E07F-4E59-9680-C46AAC8B798C}"/>
               </a:ext>
             </a:extLst>
           </p:cNvPr>
@@ -7568,7 +9736,7 @@
           <p:cNvPr id="4" name="chapter-footer">
             <a:extLst xmlns:a="http://schemas.openxmlformats.org/drawingml/2006/main">
               <a:ext uri="{FF2B5EF4-FFF2-40B4-BE49-F238E27FC236}">
-                <a16:creationId xmlns:a16="http://schemas.microsoft.com/office/drawing/2014/main" id="{947E6E9C-29AA-4E6C-857D-3F93B3B3C6EA}"/>
+                <a16:creationId xmlns:a16="http://schemas.microsoft.com/office/drawing/2014/main" id="{493490B4-7622-4879-BA2A-8B7FAA435F05}"/>
               </a:ext>
             </a:extLst>
           </p:cNvPr>
@@ -7623,138 +9791,22 @@
       </p:sp>
       <p:sp>
         <p:nvSpPr>
-          <p:cNvPr id="5" name="exam-title">
-            <a:extLst xmlns:a="http://schemas.openxmlformats.org/drawingml/2006/main">
-              <a:ext uri="{FF2B5EF4-FFF2-40B4-BE49-F238E27FC236}">
-                <a16:creationId xmlns:a16="http://schemas.microsoft.com/office/drawing/2014/main" id="{CF4CEA9E-91D7-4BA3-B04D-7F19C356F3FE}"/>
-              </a:ext>
-            </a:extLst>
-          </p:cNvPr>
-          <p:cNvSpPr>
-            <a:spLocks xmlns:a="http://schemas.openxmlformats.org/drawingml/2006/main" noGrp="1"/>
-          </p:cNvSpPr>
-          <p:nvPr/>
-        </p:nvSpPr>
-        <p:spPr>
-          <a:xfrm xmlns:a="http://schemas.openxmlformats.org/drawingml/2006/main">
-            <a:off x="390525" y="981075"/>
-            <a:ext cx="10668000" cy="781050"/>
-          </a:xfrm>
-          <a:prstGeom xmlns:a="http://schemas.openxmlformats.org/drawingml/2006/main" prst="rect">
-            <a:avLst/>
-          </a:prstGeom>
-          <a:noFill xmlns:a="http://schemas.openxmlformats.org/drawingml/2006/main"/>
-          <a:ln xmlns:a="http://schemas.openxmlformats.org/drawingml/2006/main" w="0">
-            <a:noFill/>
-            <a:prstDash val="solid"/>
-          </a:ln>
-        </p:spPr>
-        <p:txBody>
-          <a:bodyPr xmlns:a="http://schemas.openxmlformats.org/drawingml/2006/main" anchor="t">
-            <a:noAutofit/>
-          </a:bodyPr>
-          <a:lstStyle xmlns:a="http://schemas.openxmlformats.org/drawingml/2006/main"/>
-          <a:p xmlns:a="http://schemas.openxmlformats.org/drawingml/2006/main">
-            <a:pPr algn="l">
-              <a:defRPr sz="3150" b="1">
-                <a:solidFill>
-                  <a:srgbClr val="111111"/>
-                </a:solidFill>
-                <a:latin typeface="Helvetica Neue"/>
-                <a:ea typeface="Helvetica Neue"/>
-                <a:cs typeface="Helvetica Neue"/>
-              </a:defRPr>
-            </a:pPr>
-            <a:r>
-              <a:rPr sz="3150" b="1">
-                <a:solidFill>
-                  <a:srgbClr val="111111"/>
-                </a:solidFill>
-                <a:latin typeface="Helvetica Neue"/>
-                <a:ea typeface="Helvetica Neue"/>
-                <a:cs typeface="Helvetica Neue"/>
-              </a:rPr>
-              <a:t>Can you answer these without notes?</a:t>
-            </a:r>
-          </a:p>
-        </p:txBody>
-      </p:sp>
-      <p:sp>
-        <p:nvSpPr>
-          <p:cNvPr id="6" name="exam-number-1">
-            <a:extLst xmlns:a="http://schemas.openxmlformats.org/drawingml/2006/main">
-              <a:ext uri="{FF2B5EF4-FFF2-40B4-BE49-F238E27FC236}">
-                <a16:creationId xmlns:a16="http://schemas.microsoft.com/office/drawing/2014/main" id="{3EA3C723-FC7F-405B-8329-B21CA4705EEC}"/>
-              </a:ext>
-            </a:extLst>
-          </p:cNvPr>
-          <p:cNvSpPr>
-            <a:spLocks xmlns:a="http://schemas.openxmlformats.org/drawingml/2006/main" noGrp="1"/>
-          </p:cNvSpPr>
-          <p:nvPr/>
-        </p:nvSpPr>
-        <p:spPr>
-          <a:xfrm xmlns:a="http://schemas.openxmlformats.org/drawingml/2006/main">
-            <a:off x="390525" y="2238375"/>
-            <a:ext cx="590550" cy="400050"/>
-          </a:xfrm>
-          <a:prstGeom xmlns:a="http://schemas.openxmlformats.org/drawingml/2006/main" prst="rect">
-            <a:avLst/>
-          </a:prstGeom>
-          <a:noFill xmlns:a="http://schemas.openxmlformats.org/drawingml/2006/main"/>
-          <a:ln xmlns:a="http://schemas.openxmlformats.org/drawingml/2006/main" w="0">
-            <a:noFill/>
-            <a:prstDash val="solid"/>
-          </a:ln>
-        </p:spPr>
-        <p:txBody>
-          <a:bodyPr xmlns:a="http://schemas.openxmlformats.org/drawingml/2006/main" anchor="t">
-            <a:noAutofit/>
-          </a:bodyPr>
-          <a:lstStyle xmlns:a="http://schemas.openxmlformats.org/drawingml/2006/main"/>
-          <a:p xmlns:a="http://schemas.openxmlformats.org/drawingml/2006/main">
-            <a:pPr algn="l">
-              <a:defRPr sz="1725" b="1">
-                <a:solidFill>
-                  <a:srgbClr val="FFB45E"/>
-                </a:solidFill>
-                <a:latin typeface="Helvetica Neue"/>
-                <a:ea typeface="Helvetica Neue"/>
-                <a:cs typeface="Helvetica Neue"/>
-              </a:defRPr>
-            </a:pPr>
-            <a:r>
-              <a:rPr sz="1725" b="1">
-                <a:solidFill>
-                  <a:srgbClr val="FFB45E"/>
-                </a:solidFill>
-                <a:latin typeface="Helvetica Neue"/>
-                <a:ea typeface="Helvetica Neue"/>
-                <a:cs typeface="Helvetica Neue"/>
-              </a:rPr>
-              <a:t>01</a:t>
-            </a:r>
-          </a:p>
-        </p:txBody>
-      </p:sp>
-      <p:sp>
-        <p:nvSpPr>
-          <p:cNvPr id="7" name="exam-question-1">
-            <a:extLst xmlns:a="http://schemas.openxmlformats.org/drawingml/2006/main">
-              <a:ext uri="{FF2B5EF4-FFF2-40B4-BE49-F238E27FC236}">
-                <a16:creationId xmlns:a16="http://schemas.microsoft.com/office/drawing/2014/main" id="{D1CEB8AD-F6C5-4A65-8554-0338ECB4A5F8}"/>
-              </a:ext>
-            </a:extLst>
-          </p:cNvPr>
-          <p:cNvSpPr>
-            <a:spLocks xmlns:a="http://schemas.openxmlformats.org/drawingml/2006/main" noGrp="1"/>
-          </p:cNvSpPr>
-          <p:nvPr/>
-        </p:nvSpPr>
-        <p:spPr>
-          <a:xfrm xmlns:a="http://schemas.openxmlformats.org/drawingml/2006/main">
-            <a:off x="1076325" y="2238375"/>
-            <a:ext cx="4762500" cy="895350"/>
+          <p:cNvPr id="5" name="section-title">
+            <a:extLst xmlns:a="http://schemas.openxmlformats.org/drawingml/2006/main">
+              <a:ext uri="{FF2B5EF4-FFF2-40B4-BE49-F238E27FC236}">
+                <a16:creationId xmlns:a16="http://schemas.microsoft.com/office/drawing/2014/main" id="{E025C2C0-208D-4415-B772-ED0BA1644EA3}"/>
+              </a:ext>
+            </a:extLst>
+          </p:cNvPr>
+          <p:cNvSpPr>
+            <a:spLocks xmlns:a="http://schemas.openxmlformats.org/drawingml/2006/main" noGrp="1"/>
+          </p:cNvSpPr>
+          <p:nvPr/>
+        </p:nvSpPr>
+        <p:spPr>
+          <a:xfrm xmlns:a="http://schemas.openxmlformats.org/drawingml/2006/main">
+            <a:off x="390525" y="971550"/>
+            <a:ext cx="11144250" cy="971550"/>
           </a:xfrm>
           <a:prstGeom xmlns:a="http://schemas.openxmlformats.org/drawingml/2006/main" prst="rect">
             <a:avLst/>
@@ -7772,105 +9824,47 @@
           <a:lstStyle xmlns:a="http://schemas.openxmlformats.org/drawingml/2006/main"/>
           <a:p xmlns:a="http://schemas.openxmlformats.org/drawingml/2006/main">
             <a:pPr algn="l">
-              <a:defRPr sz="1575" b="1">
-                <a:solidFill>
-                  <a:srgbClr val="111111"/>
-                </a:solidFill>
-                <a:latin typeface="Helvetica Neue"/>
-                <a:ea typeface="Helvetica Neue"/>
-                <a:cs typeface="Helvetica Neue"/>
-              </a:defRPr>
-            </a:pPr>
-            <a:r>
-              <a:rPr sz="1575" b="1">
-                <a:solidFill>
-                  <a:srgbClr val="111111"/>
-                </a:solidFill>
-                <a:latin typeface="Helvetica Neue"/>
-                <a:ea typeface="Helvetica Neue"/>
-                <a:cs typeface="Helvetica Neue"/>
-              </a:rPr>
-              <a:t>Why is an agent not equivalent to a simple REST endpoint?</a:t>
-            </a:r>
-          </a:p>
-        </p:txBody>
-      </p:sp>
-      <p:sp>
-        <p:nvSpPr>
-          <p:cNvPr id="8" name="exam-number-2">
-            <a:extLst xmlns:a="http://schemas.openxmlformats.org/drawingml/2006/main">
-              <a:ext uri="{FF2B5EF4-FFF2-40B4-BE49-F238E27FC236}">
-                <a16:creationId xmlns:a16="http://schemas.microsoft.com/office/drawing/2014/main" id="{FD4209F8-A26B-4BA7-91AB-2E9D310827DF}"/>
-              </a:ext>
-            </a:extLst>
-          </p:cNvPr>
-          <p:cNvSpPr>
-            <a:spLocks xmlns:a="http://schemas.openxmlformats.org/drawingml/2006/main" noGrp="1"/>
-          </p:cNvSpPr>
-          <p:nvPr/>
-        </p:nvSpPr>
-        <p:spPr>
-          <a:xfrm xmlns:a="http://schemas.openxmlformats.org/drawingml/2006/main">
-            <a:off x="6191250" y="2238375"/>
-            <a:ext cx="590550" cy="400050"/>
-          </a:xfrm>
-          <a:prstGeom xmlns:a="http://schemas.openxmlformats.org/drawingml/2006/main" prst="rect">
-            <a:avLst/>
-          </a:prstGeom>
-          <a:noFill xmlns:a="http://schemas.openxmlformats.org/drawingml/2006/main"/>
-          <a:ln xmlns:a="http://schemas.openxmlformats.org/drawingml/2006/main" w="0">
-            <a:noFill/>
-            <a:prstDash val="solid"/>
-          </a:ln>
-        </p:spPr>
-        <p:txBody>
-          <a:bodyPr xmlns:a="http://schemas.openxmlformats.org/drawingml/2006/main" anchor="t">
-            <a:noAutofit/>
-          </a:bodyPr>
-          <a:lstStyle xmlns:a="http://schemas.openxmlformats.org/drawingml/2006/main"/>
-          <a:p xmlns:a="http://schemas.openxmlformats.org/drawingml/2006/main">
-            <a:pPr algn="l">
-              <a:defRPr sz="1725" b="1">
-                <a:solidFill>
-                  <a:srgbClr val="FFB45E"/>
-                </a:solidFill>
-                <a:latin typeface="Helvetica Neue"/>
-                <a:ea typeface="Helvetica Neue"/>
-                <a:cs typeface="Helvetica Neue"/>
-              </a:defRPr>
-            </a:pPr>
-            <a:r>
-              <a:rPr sz="1725" b="1">
-                <a:solidFill>
-                  <a:srgbClr val="FFB45E"/>
-                </a:solidFill>
-                <a:latin typeface="Helvetica Neue"/>
-                <a:ea typeface="Helvetica Neue"/>
-                <a:cs typeface="Helvetica Neue"/>
-              </a:rPr>
-              <a:t>02</a:t>
-            </a:r>
-          </a:p>
-        </p:txBody>
-      </p:sp>
-      <p:sp>
-        <p:nvSpPr>
-          <p:cNvPr id="9" name="exam-question-2">
-            <a:extLst xmlns:a="http://schemas.openxmlformats.org/drawingml/2006/main">
-              <a:ext uri="{FF2B5EF4-FFF2-40B4-BE49-F238E27FC236}">
-                <a16:creationId xmlns:a16="http://schemas.microsoft.com/office/drawing/2014/main" id="{311C2ECC-EDE8-42C6-8F5B-B7813BFF0546}"/>
-              </a:ext>
-            </a:extLst>
-          </p:cNvPr>
-          <p:cNvSpPr>
-            <a:spLocks xmlns:a="http://schemas.openxmlformats.org/drawingml/2006/main" noGrp="1"/>
-          </p:cNvSpPr>
-          <p:nvPr/>
-        </p:nvSpPr>
-        <p:spPr>
-          <a:xfrm xmlns:a="http://schemas.openxmlformats.org/drawingml/2006/main">
-            <a:off x="6877050" y="2238375"/>
-            <a:ext cx="4762500" cy="895350"/>
+              <a:defRPr sz="3000" b="1">
+                <a:solidFill>
+                  <a:srgbClr val="111111"/>
+                </a:solidFill>
+                <a:latin typeface="Helvetica Neue"/>
+                <a:ea typeface="Helvetica Neue"/>
+                <a:cs typeface="Helvetica Neue"/>
+              </a:defRPr>
+            </a:pPr>
+            <a:r>
+              <a:rPr sz="3000" b="1">
+                <a:solidFill>
+                  <a:srgbClr val="111111"/>
+                </a:solidFill>
+                <a:latin typeface="Helvetica Neue"/>
+                <a:ea typeface="Helvetica Neue"/>
+                <a:cs typeface="Helvetica Neue"/>
+              </a:rPr>
+              <a:t>Delegation needs a versioned contract</a:t>
+            </a:r>
+          </a:p>
+        </p:txBody>
+      </p:sp>
+      <p:sp>
+        <p:nvSpPr>
+          <p:cNvPr id="6" name="section-explanation">
+            <a:extLst xmlns:a="http://schemas.openxmlformats.org/drawingml/2006/main">
+              <a:ext uri="{FF2B5EF4-FFF2-40B4-BE49-F238E27FC236}">
+                <a16:creationId xmlns:a16="http://schemas.microsoft.com/office/drawing/2014/main" id="{80A0F8C8-B41C-4471-BCFC-6D7806E819C1}"/>
+              </a:ext>
+            </a:extLst>
+          </p:cNvPr>
+          <p:cNvSpPr>
+            <a:spLocks xmlns:a="http://schemas.openxmlformats.org/drawingml/2006/main" noGrp="1"/>
+          </p:cNvSpPr>
+          <p:nvPr/>
+        </p:nvSpPr>
+        <p:spPr>
+          <a:xfrm xmlns:a="http://schemas.openxmlformats.org/drawingml/2006/main">
+            <a:off x="390525" y="2381250"/>
+            <a:ext cx="4524375" cy="2905125"/>
           </a:xfrm>
           <a:prstGeom xmlns:a="http://schemas.openxmlformats.org/drawingml/2006/main" prst="rect">
             <a:avLst/>
@@ -7888,105 +9882,80 @@
           <a:lstStyle xmlns:a="http://schemas.openxmlformats.org/drawingml/2006/main"/>
           <a:p xmlns:a="http://schemas.openxmlformats.org/drawingml/2006/main">
             <a:pPr algn="l">
-              <a:defRPr sz="1575" b="1">
-                <a:solidFill>
-                  <a:srgbClr val="111111"/>
-                </a:solidFill>
-                <a:latin typeface="Helvetica Neue"/>
-                <a:ea typeface="Helvetica Neue"/>
-                <a:cs typeface="Helvetica Neue"/>
-              </a:defRPr>
-            </a:pPr>
-            <a:r>
-              <a:rPr sz="1575" b="1">
-                <a:solidFill>
-                  <a:srgbClr val="111111"/>
-                </a:solidFill>
-                <a:latin typeface="Helvetica Neue"/>
-                <a:ea typeface="Helvetica Neue"/>
-                <a:cs typeface="Helvetica Neue"/>
-              </a:rPr>
-              <a:t>What information belongs in an Agent Card?</a:t>
-            </a:r>
-          </a:p>
-        </p:txBody>
-      </p:sp>
-      <p:sp>
-        <p:nvSpPr>
-          <p:cNvPr id="10" name="exam-number-3">
-            <a:extLst xmlns:a="http://schemas.openxmlformats.org/drawingml/2006/main">
-              <a:ext uri="{FF2B5EF4-FFF2-40B4-BE49-F238E27FC236}">
-                <a16:creationId xmlns:a16="http://schemas.microsoft.com/office/drawing/2014/main" id="{51B7A4AB-01DE-4387-91D5-762AD8B22CEE}"/>
-              </a:ext>
-            </a:extLst>
-          </p:cNvPr>
-          <p:cNvSpPr>
-            <a:spLocks xmlns:a="http://schemas.openxmlformats.org/drawingml/2006/main" noGrp="1"/>
-          </p:cNvSpPr>
-          <p:nvPr/>
-        </p:nvSpPr>
-        <p:spPr>
-          <a:xfrm xmlns:a="http://schemas.openxmlformats.org/drawingml/2006/main">
-            <a:off x="390525" y="3495675"/>
-            <a:ext cx="590550" cy="400050"/>
-          </a:xfrm>
-          <a:prstGeom xmlns:a="http://schemas.openxmlformats.org/drawingml/2006/main" prst="rect">
-            <a:avLst/>
-          </a:prstGeom>
-          <a:noFill xmlns:a="http://schemas.openxmlformats.org/drawingml/2006/main"/>
-          <a:ln xmlns:a="http://schemas.openxmlformats.org/drawingml/2006/main" w="0">
-            <a:noFill/>
-            <a:prstDash val="solid"/>
-          </a:ln>
-        </p:spPr>
-        <p:txBody>
-          <a:bodyPr xmlns:a="http://schemas.openxmlformats.org/drawingml/2006/main" anchor="t">
-            <a:noAutofit/>
-          </a:bodyPr>
-          <a:lstStyle xmlns:a="http://schemas.openxmlformats.org/drawingml/2006/main"/>
-          <a:p xmlns:a="http://schemas.openxmlformats.org/drawingml/2006/main">
-            <a:pPr algn="l">
-              <a:defRPr sz="1725" b="1">
-                <a:solidFill>
-                  <a:srgbClr val="FFB45E"/>
-                </a:solidFill>
-                <a:latin typeface="Helvetica Neue"/>
-                <a:ea typeface="Helvetica Neue"/>
-                <a:cs typeface="Helvetica Neue"/>
-              </a:defRPr>
-            </a:pPr>
-            <a:r>
-              <a:rPr sz="1725" b="1">
-                <a:solidFill>
-                  <a:srgbClr val="FFB45E"/>
-                </a:solidFill>
-                <a:latin typeface="Helvetica Neue"/>
-                <a:ea typeface="Helvetica Neue"/>
-                <a:cs typeface="Helvetica Neue"/>
-              </a:rPr>
-              <a:t>03</a:t>
-            </a:r>
-          </a:p>
-        </p:txBody>
-      </p:sp>
-      <p:sp>
-        <p:nvSpPr>
-          <p:cNvPr id="11" name="exam-question-3">
-            <a:extLst xmlns:a="http://schemas.openxmlformats.org/drawingml/2006/main">
-              <a:ext uri="{FF2B5EF4-FFF2-40B4-BE49-F238E27FC236}">
-                <a16:creationId xmlns:a16="http://schemas.microsoft.com/office/drawing/2014/main" id="{1CE0E4D0-A11F-461B-ADB0-6D910C7E5907}"/>
-              </a:ext>
-            </a:extLst>
-          </p:cNvPr>
-          <p:cNvSpPr>
-            <a:spLocks xmlns:a="http://schemas.openxmlformats.org/drawingml/2006/main" noGrp="1"/>
-          </p:cNvSpPr>
-          <p:nvPr/>
-        </p:nvSpPr>
-        <p:spPr>
-          <a:xfrm xmlns:a="http://schemas.openxmlformats.org/drawingml/2006/main">
-            <a:off x="1076325" y="3495675"/>
-            <a:ext cx="4762500" cy="895350"/>
+              <a:defRPr sz="1875" b="0">
+                <a:solidFill>
+                  <a:srgbClr val="5B5B57"/>
+                </a:solidFill>
+                <a:latin typeface="Helvetica Neue"/>
+                <a:ea typeface="Helvetica Neue"/>
+                <a:cs typeface="Helvetica Neue"/>
+              </a:defRPr>
+            </a:pPr>
+            <a:r>
+              <a:rPr sz="1875" b="0">
+                <a:solidFill>
+                  <a:srgbClr val="5B5B57"/>
+                </a:solidFill>
+                <a:latin typeface="Helvetica Neue"/>
+                <a:ea typeface="Helvetica Neue"/>
+                <a:cs typeface="Helvetica Neue"/>
+              </a:rPr>
+              <a:t>This chapter uses A2A 1.0.0 and traces its JSON-RPC binding. The specification also defines gRPC and HTTP/REST bindings. Identity, permission, and the validity of a returned artifact remain separate checks.</a:t>
+            </a:r>
+          </a:p>
+        </p:txBody>
+      </p:sp>
+      <p:sp>
+        <p:nvSpPr>
+          <p:cNvPr id="7" name="column-rule">
+            <a:extLst xmlns:a="http://schemas.openxmlformats.org/drawingml/2006/main">
+              <a:ext uri="{FF2B5EF4-FFF2-40B4-BE49-F238E27FC236}">
+                <a16:creationId xmlns:a16="http://schemas.microsoft.com/office/drawing/2014/main" id="{B2F4569C-5E70-4C51-92DB-C11ADAFE826C}"/>
+              </a:ext>
+            </a:extLst>
+          </p:cNvPr>
+          <p:cNvSpPr>
+            <a:spLocks xmlns:a="http://schemas.openxmlformats.org/drawingml/2006/main" noGrp="1"/>
+          </p:cNvSpPr>
+          <p:nvPr/>
+        </p:nvSpPr>
+        <p:spPr>
+          <a:xfrm xmlns:a="http://schemas.openxmlformats.org/drawingml/2006/main">
+            <a:off x="5334000" y="2343150"/>
+            <a:ext cx="47625" cy="3257550"/>
+          </a:xfrm>
+          <a:prstGeom xmlns:a="http://schemas.openxmlformats.org/drawingml/2006/main" prst="rect">
+            <a:avLst/>
+          </a:prstGeom>
+          <a:solidFill xmlns:a="http://schemas.openxmlformats.org/drawingml/2006/main">
+            <a:srgbClr val="FFB45E"/>
+          </a:solidFill>
+          <a:ln xmlns:a="http://schemas.openxmlformats.org/drawingml/2006/main" w="0">
+            <a:solidFill>
+              <a:srgbClr val="FFB45E"/>
+            </a:solidFill>
+            <a:prstDash val="solid"/>
+          </a:ln>
+        </p:spPr>
+      </p:sp>
+      <p:sp>
+        <p:nvSpPr>
+          <p:cNvPr id="8" name="section-points">
+            <a:extLst xmlns:a="http://schemas.openxmlformats.org/drawingml/2006/main">
+              <a:ext uri="{FF2B5EF4-FFF2-40B4-BE49-F238E27FC236}">
+                <a16:creationId xmlns:a16="http://schemas.microsoft.com/office/drawing/2014/main" id="{12704C45-8D72-42B0-9B42-E0AE518961FB}"/>
+              </a:ext>
+            </a:extLst>
+          </p:cNvPr>
+          <p:cNvSpPr>
+            <a:spLocks xmlns:a="http://schemas.openxmlformats.org/drawingml/2006/main" noGrp="1"/>
+          </p:cNvSpPr>
+          <p:nvPr/>
+        </p:nvSpPr>
+        <p:spPr>
+          <a:xfrm xmlns:a="http://schemas.openxmlformats.org/drawingml/2006/main">
+            <a:off x="5857875" y="2343150"/>
+            <a:ext cx="5572125" cy="3429000"/>
           </a:xfrm>
           <a:prstGeom xmlns:a="http://schemas.openxmlformats.org/drawingml/2006/main" prst="rect">
             <a:avLst/>
@@ -8004,67 +9973,37 @@
           <a:lstStyle xmlns:a="http://schemas.openxmlformats.org/drawingml/2006/main"/>
           <a:p xmlns:a="http://schemas.openxmlformats.org/drawingml/2006/main">
             <a:pPr algn="l">
-              <a:defRPr sz="1575" b="1">
-                <a:solidFill>
-                  <a:srgbClr val="111111"/>
-                </a:solidFill>
-                <a:latin typeface="Helvetica Neue"/>
-                <a:ea typeface="Helvetica Neue"/>
-                <a:cs typeface="Helvetica Neue"/>
-              </a:defRPr>
-            </a:pPr>
-            <a:r>
-              <a:rPr sz="1575" b="1">
-                <a:solidFill>
-                  <a:srgbClr val="111111"/>
-                </a:solidFill>
-                <a:latin typeface="Helvetica Neue"/>
-                <a:ea typeface="Helvetica Neue"/>
-                <a:cs typeface="Helvetica Neue"/>
-              </a:rPr>
-              <a:t>Define task, message, part, and artifact.</a:t>
-            </a:r>
-          </a:p>
-        </p:txBody>
-      </p:sp>
-      <p:sp>
-        <p:nvSpPr>
-          <p:cNvPr id="12" name="exam-number-4">
-            <a:extLst xmlns:a="http://schemas.openxmlformats.org/drawingml/2006/main">
-              <a:ext uri="{FF2B5EF4-FFF2-40B4-BE49-F238E27FC236}">
-                <a16:creationId xmlns:a16="http://schemas.microsoft.com/office/drawing/2014/main" id="{2D43ED4F-B0FC-41D5-83EB-7B564016C5B0}"/>
-              </a:ext>
-            </a:extLst>
-          </p:cNvPr>
-          <p:cNvSpPr>
-            <a:spLocks xmlns:a="http://schemas.openxmlformats.org/drawingml/2006/main" noGrp="1"/>
-          </p:cNvSpPr>
-          <p:nvPr/>
-        </p:nvSpPr>
-        <p:spPr>
-          <a:xfrm xmlns:a="http://schemas.openxmlformats.org/drawingml/2006/main">
-            <a:off x="6191250" y="3495675"/>
-            <a:ext cx="590550" cy="400050"/>
-          </a:xfrm>
-          <a:prstGeom xmlns:a="http://schemas.openxmlformats.org/drawingml/2006/main" prst="rect">
-            <a:avLst/>
-          </a:prstGeom>
-          <a:noFill xmlns:a="http://schemas.openxmlformats.org/drawingml/2006/main"/>
-          <a:ln xmlns:a="http://schemas.openxmlformats.org/drawingml/2006/main" w="0">
-            <a:noFill/>
-            <a:prstDash val="solid"/>
-          </a:ln>
-        </p:spPr>
-        <p:txBody>
-          <a:bodyPr xmlns:a="http://schemas.openxmlformats.org/drawingml/2006/main" anchor="t">
-            <a:noAutofit/>
-          </a:bodyPr>
-          <a:lstStyle xmlns:a="http://schemas.openxmlformats.org/drawingml/2006/main"/>
+              <a:defRPr sz="1725" b="1">
+                <a:solidFill>
+                  <a:srgbClr val="111111"/>
+                </a:solidFill>
+                <a:latin typeface="Helvetica Neue"/>
+                <a:ea typeface="Helvetica Neue"/>
+                <a:cs typeface="Helvetica Neue"/>
+              </a:defRPr>
+            </a:pPr>
+            <a:r>
+              <a:rPr sz="1725" b="1">
+                <a:solidFill>
+                  <a:srgbClr val="111111"/>
+                </a:solidFill>
+                <a:latin typeface="Helvetica Neue"/>
+                <a:ea typeface="Helvetica Neue"/>
+                <a:cs typeface="Helvetica Neue"/>
+              </a:rPr>
+              <a:t>01  Record the protocol version and selected binding.</a:t>
+            </a:r>
+          </a:p>
+          <a:p xmlns:a="http://schemas.openxmlformats.org/drawingml/2006/main">
+            <a:r>
+              <a:t/>
+            </a:r>
+          </a:p>
           <a:p xmlns:a="http://schemas.openxmlformats.org/drawingml/2006/main">
             <a:pPr algn="l">
               <a:defRPr sz="1725" b="1">
                 <a:solidFill>
-                  <a:srgbClr val="FFB45E"/>
+                  <a:srgbClr val="111111"/>
                 </a:solidFill>
                 <a:latin typeface="Helvetica Neue"/>
                 <a:ea typeface="Helvetica Neue"/>
@@ -8074,113 +10013,25 @@
             <a:r>
               <a:rPr sz="1725" b="1">
                 <a:solidFill>
-                  <a:srgbClr val="FFB45E"/>
-                </a:solidFill>
-                <a:latin typeface="Helvetica Neue"/>
-                <a:ea typeface="Helvetica Neue"/>
-                <a:cs typeface="Helvetica Neue"/>
-              </a:rPr>
-              <a:t>04</a:t>
-            </a:r>
-          </a:p>
-        </p:txBody>
-      </p:sp>
-      <p:sp>
-        <p:nvSpPr>
-          <p:cNvPr id="13" name="exam-question-4">
-            <a:extLst xmlns:a="http://schemas.openxmlformats.org/drawingml/2006/main">
-              <a:ext uri="{FF2B5EF4-FFF2-40B4-BE49-F238E27FC236}">
-                <a16:creationId xmlns:a16="http://schemas.microsoft.com/office/drawing/2014/main" id="{80E2E2E1-33EF-4FAD-9C52-1B11D99FDAA4}"/>
-              </a:ext>
-            </a:extLst>
-          </p:cNvPr>
-          <p:cNvSpPr>
-            <a:spLocks xmlns:a="http://schemas.openxmlformats.org/drawingml/2006/main" noGrp="1"/>
-          </p:cNvSpPr>
-          <p:nvPr/>
-        </p:nvSpPr>
-        <p:spPr>
-          <a:xfrm xmlns:a="http://schemas.openxmlformats.org/drawingml/2006/main">
-            <a:off x="6877050" y="3495675"/>
-            <a:ext cx="4762500" cy="895350"/>
-          </a:xfrm>
-          <a:prstGeom xmlns:a="http://schemas.openxmlformats.org/drawingml/2006/main" prst="rect">
-            <a:avLst/>
-          </a:prstGeom>
-          <a:noFill xmlns:a="http://schemas.openxmlformats.org/drawingml/2006/main"/>
-          <a:ln xmlns:a="http://schemas.openxmlformats.org/drawingml/2006/main" w="0">
-            <a:noFill/>
-            <a:prstDash val="solid"/>
-          </a:ln>
-        </p:spPr>
-        <p:txBody>
-          <a:bodyPr xmlns:a="http://schemas.openxmlformats.org/drawingml/2006/main" anchor="t">
-            <a:normAutofit fontScale="100000"/>
-          </a:bodyPr>
-          <a:lstStyle xmlns:a="http://schemas.openxmlformats.org/drawingml/2006/main"/>
-          <a:p xmlns:a="http://schemas.openxmlformats.org/drawingml/2006/main">
-            <a:pPr algn="l">
-              <a:defRPr sz="1575" b="1">
-                <a:solidFill>
-                  <a:srgbClr val="111111"/>
-                </a:solidFill>
-                <a:latin typeface="Helvetica Neue"/>
-                <a:ea typeface="Helvetica Neue"/>
-                <a:cs typeface="Helvetica Neue"/>
-              </a:defRPr>
-            </a:pPr>
-            <a:r>
-              <a:rPr sz="1575" b="1">
-                <a:solidFill>
-                  <a:srgbClr val="111111"/>
-                </a:solidFill>
-                <a:latin typeface="Helvetica Neue"/>
-                <a:ea typeface="Helvetica Neue"/>
-                <a:cs typeface="Helvetica Neue"/>
-              </a:rPr>
-              <a:t>How does A2A support long-running work?</a:t>
-            </a:r>
-          </a:p>
-        </p:txBody>
-      </p:sp>
-      <p:sp>
-        <p:nvSpPr>
-          <p:cNvPr id="14" name="exam-number-5">
-            <a:extLst xmlns:a="http://schemas.openxmlformats.org/drawingml/2006/main">
-              <a:ext uri="{FF2B5EF4-FFF2-40B4-BE49-F238E27FC236}">
-                <a16:creationId xmlns:a16="http://schemas.microsoft.com/office/drawing/2014/main" id="{1ACA1592-0990-401A-A0A7-0B00AEB0D9EA}"/>
-              </a:ext>
-            </a:extLst>
-          </p:cNvPr>
-          <p:cNvSpPr>
-            <a:spLocks xmlns:a="http://schemas.openxmlformats.org/drawingml/2006/main" noGrp="1"/>
-          </p:cNvSpPr>
-          <p:nvPr/>
-        </p:nvSpPr>
-        <p:spPr>
-          <a:xfrm xmlns:a="http://schemas.openxmlformats.org/drawingml/2006/main">
-            <a:off x="390525" y="4752975"/>
-            <a:ext cx="590550" cy="400050"/>
-          </a:xfrm>
-          <a:prstGeom xmlns:a="http://schemas.openxmlformats.org/drawingml/2006/main" prst="rect">
-            <a:avLst/>
-          </a:prstGeom>
-          <a:noFill xmlns:a="http://schemas.openxmlformats.org/drawingml/2006/main"/>
-          <a:ln xmlns:a="http://schemas.openxmlformats.org/drawingml/2006/main" w="0">
-            <a:noFill/>
-            <a:prstDash val="solid"/>
-          </a:ln>
-        </p:spPr>
-        <p:txBody>
-          <a:bodyPr xmlns:a="http://schemas.openxmlformats.org/drawingml/2006/main" anchor="t">
-            <a:noAutofit/>
-          </a:bodyPr>
-          <a:lstStyle xmlns:a="http://schemas.openxmlformats.org/drawingml/2006/main"/>
+                  <a:srgbClr val="111111"/>
+                </a:solidFill>
+                <a:latin typeface="Helvetica Neue"/>
+                <a:ea typeface="Helvetica Neue"/>
+                <a:cs typeface="Helvetica Neue"/>
+              </a:rPr>
+              <a:t>02  Authenticate the caller before assigning authority.</a:t>
+            </a:r>
+          </a:p>
+          <a:p xmlns:a="http://schemas.openxmlformats.org/drawingml/2006/main">
+            <a:r>
+              <a:t/>
+            </a:r>
+          </a:p>
           <a:p xmlns:a="http://schemas.openxmlformats.org/drawingml/2006/main">
             <a:pPr algn="l">
               <a:defRPr sz="1725" b="1">
                 <a:solidFill>
-                  <a:srgbClr val="FFB45E"/>
+                  <a:srgbClr val="111111"/>
                 </a:solidFill>
                 <a:latin typeface="Helvetica Neue"/>
                 <a:ea typeface="Helvetica Neue"/>
@@ -8190,187 +10041,13 @@
             <a:r>
               <a:rPr sz="1725" b="1">
                 <a:solidFill>
-                  <a:srgbClr val="FFB45E"/>
-                </a:solidFill>
-                <a:latin typeface="Helvetica Neue"/>
-                <a:ea typeface="Helvetica Neue"/>
-                <a:cs typeface="Helvetica Neue"/>
-              </a:rPr>
-              <a:t>05</a:t>
-            </a:r>
-          </a:p>
-        </p:txBody>
-      </p:sp>
-      <p:sp>
-        <p:nvSpPr>
-          <p:cNvPr id="15" name="exam-question-5">
-            <a:extLst xmlns:a="http://schemas.openxmlformats.org/drawingml/2006/main">
-              <a:ext uri="{FF2B5EF4-FFF2-40B4-BE49-F238E27FC236}">
-                <a16:creationId xmlns:a16="http://schemas.microsoft.com/office/drawing/2014/main" id="{1633BDAA-B359-4201-BDD1-72420451BF8C}"/>
-              </a:ext>
-            </a:extLst>
-          </p:cNvPr>
-          <p:cNvSpPr>
-            <a:spLocks xmlns:a="http://schemas.openxmlformats.org/drawingml/2006/main" noGrp="1"/>
-          </p:cNvSpPr>
-          <p:nvPr/>
-        </p:nvSpPr>
-        <p:spPr>
-          <a:xfrm xmlns:a="http://schemas.openxmlformats.org/drawingml/2006/main">
-            <a:off x="1076325" y="4752975"/>
-            <a:ext cx="4762500" cy="895350"/>
-          </a:xfrm>
-          <a:prstGeom xmlns:a="http://schemas.openxmlformats.org/drawingml/2006/main" prst="rect">
-            <a:avLst/>
-          </a:prstGeom>
-          <a:noFill xmlns:a="http://schemas.openxmlformats.org/drawingml/2006/main"/>
-          <a:ln xmlns:a="http://schemas.openxmlformats.org/drawingml/2006/main" w="0">
-            <a:noFill/>
-            <a:prstDash val="solid"/>
-          </a:ln>
-        </p:spPr>
-        <p:txBody>
-          <a:bodyPr xmlns:a="http://schemas.openxmlformats.org/drawingml/2006/main" anchor="t">
-            <a:normAutofit fontScale="100000"/>
-          </a:bodyPr>
-          <a:lstStyle xmlns:a="http://schemas.openxmlformats.org/drawingml/2006/main"/>
-          <a:p xmlns:a="http://schemas.openxmlformats.org/drawingml/2006/main">
-            <a:pPr algn="l">
-              <a:defRPr sz="1575" b="1">
-                <a:solidFill>
-                  <a:srgbClr val="111111"/>
-                </a:solidFill>
-                <a:latin typeface="Helvetica Neue"/>
-                <a:ea typeface="Helvetica Neue"/>
-                <a:cs typeface="Helvetica Neue"/>
-              </a:defRPr>
-            </a:pPr>
-            <a:r>
-              <a:rPr sz="1575" b="1">
-                <a:solidFill>
-                  <a:srgbClr val="111111"/>
-                </a:solidFill>
-                <a:latin typeface="Helvetica Neue"/>
-                <a:ea typeface="Helvetica Neue"/>
-                <a:cs typeface="Helvetica Neue"/>
-              </a:rPr>
-              <a:t>Compare MCP and A2A with a concrete example.</a:t>
-            </a:r>
-          </a:p>
-        </p:txBody>
-      </p:sp>
-      <p:sp>
-        <p:nvSpPr>
-          <p:cNvPr id="16" name="exam-number-6">
-            <a:extLst xmlns:a="http://schemas.openxmlformats.org/drawingml/2006/main">
-              <a:ext uri="{FF2B5EF4-FFF2-40B4-BE49-F238E27FC236}">
-                <a16:creationId xmlns:a16="http://schemas.microsoft.com/office/drawing/2014/main" id="{3CF93377-7A10-4958-8BFD-6CAA32A245F4}"/>
-              </a:ext>
-            </a:extLst>
-          </p:cNvPr>
-          <p:cNvSpPr>
-            <a:spLocks xmlns:a="http://schemas.openxmlformats.org/drawingml/2006/main" noGrp="1"/>
-          </p:cNvSpPr>
-          <p:nvPr/>
-        </p:nvSpPr>
-        <p:spPr>
-          <a:xfrm xmlns:a="http://schemas.openxmlformats.org/drawingml/2006/main">
-            <a:off x="6191250" y="4752975"/>
-            <a:ext cx="590550" cy="400050"/>
-          </a:xfrm>
-          <a:prstGeom xmlns:a="http://schemas.openxmlformats.org/drawingml/2006/main" prst="rect">
-            <a:avLst/>
-          </a:prstGeom>
-          <a:noFill xmlns:a="http://schemas.openxmlformats.org/drawingml/2006/main"/>
-          <a:ln xmlns:a="http://schemas.openxmlformats.org/drawingml/2006/main" w="0">
-            <a:noFill/>
-            <a:prstDash val="solid"/>
-          </a:ln>
-        </p:spPr>
-        <p:txBody>
-          <a:bodyPr xmlns:a="http://schemas.openxmlformats.org/drawingml/2006/main" anchor="t">
-            <a:noAutofit/>
-          </a:bodyPr>
-          <a:lstStyle xmlns:a="http://schemas.openxmlformats.org/drawingml/2006/main"/>
-          <a:p xmlns:a="http://schemas.openxmlformats.org/drawingml/2006/main">
-            <a:pPr algn="l">
-              <a:defRPr sz="1725" b="1">
-                <a:solidFill>
-                  <a:srgbClr val="FFB45E"/>
-                </a:solidFill>
-                <a:latin typeface="Helvetica Neue"/>
-                <a:ea typeface="Helvetica Neue"/>
-                <a:cs typeface="Helvetica Neue"/>
-              </a:defRPr>
-            </a:pPr>
-            <a:r>
-              <a:rPr sz="1725" b="1">
-                <a:solidFill>
-                  <a:srgbClr val="FFB45E"/>
-                </a:solidFill>
-                <a:latin typeface="Helvetica Neue"/>
-                <a:ea typeface="Helvetica Neue"/>
-                <a:cs typeface="Helvetica Neue"/>
-              </a:rPr>
-              <a:t>06</a:t>
-            </a:r>
-          </a:p>
-        </p:txBody>
-      </p:sp>
-      <p:sp>
-        <p:nvSpPr>
-          <p:cNvPr id="17" name="exam-question-6">
-            <a:extLst xmlns:a="http://schemas.openxmlformats.org/drawingml/2006/main">
-              <a:ext uri="{FF2B5EF4-FFF2-40B4-BE49-F238E27FC236}">
-                <a16:creationId xmlns:a16="http://schemas.microsoft.com/office/drawing/2014/main" id="{C9A00C7C-8B3E-421F-B867-4C95484ACC64}"/>
-              </a:ext>
-            </a:extLst>
-          </p:cNvPr>
-          <p:cNvSpPr>
-            <a:spLocks xmlns:a="http://schemas.openxmlformats.org/drawingml/2006/main" noGrp="1"/>
-          </p:cNvSpPr>
-          <p:nvPr/>
-        </p:nvSpPr>
-        <p:spPr>
-          <a:xfrm xmlns:a="http://schemas.openxmlformats.org/drawingml/2006/main">
-            <a:off x="6877050" y="4752975"/>
-            <a:ext cx="4762500" cy="895350"/>
-          </a:xfrm>
-          <a:prstGeom xmlns:a="http://schemas.openxmlformats.org/drawingml/2006/main" prst="rect">
-            <a:avLst/>
-          </a:prstGeom>
-          <a:noFill xmlns:a="http://schemas.openxmlformats.org/drawingml/2006/main"/>
-          <a:ln xmlns:a="http://schemas.openxmlformats.org/drawingml/2006/main" w="0">
-            <a:noFill/>
-            <a:prstDash val="solid"/>
-          </a:ln>
-        </p:spPr>
-        <p:txBody>
-          <a:bodyPr xmlns:a="http://schemas.openxmlformats.org/drawingml/2006/main" anchor="t">
-            <a:normAutofit fontScale="100000"/>
-          </a:bodyPr>
-          <a:lstStyle xmlns:a="http://schemas.openxmlformats.org/drawingml/2006/main"/>
-          <a:p xmlns:a="http://schemas.openxmlformats.org/drawingml/2006/main">
-            <a:pPr algn="l">
-              <a:defRPr sz="1575" b="1">
-                <a:solidFill>
-                  <a:srgbClr val="111111"/>
-                </a:solidFill>
-                <a:latin typeface="Helvetica Neue"/>
-                <a:ea typeface="Helvetica Neue"/>
-                <a:cs typeface="Helvetica Neue"/>
-              </a:defRPr>
-            </a:pPr>
-            <a:r>
-              <a:rPr sz="1575" b="1">
-                <a:solidFill>
-                  <a:srgbClr val="111111"/>
-                </a:solidFill>
-                <a:latin typeface="Helvetica Neue"/>
-                <a:ea typeface="Helvetica Neue"/>
-                <a:cs typeface="Helvetica Neue"/>
-              </a:rPr>
-              <a:t>Threat-model a delegated task across organizations.</a:t>
+                  <a:srgbClr val="111111"/>
+                </a:solidFill>
+                <a:latin typeface="Helvetica Neue"/>
+                <a:ea typeface="Helvetica Neue"/>
+                <a:cs typeface="Helvetica Neue"/>
+              </a:rPr>
+              <a:t>03  Treat returned content as untrusted evidence.</a:t>
             </a:r>
           </a:p>
         </p:txBody>
@@ -8378,7 +10055,7 @@
     </p:spTree>
     <p:extLst>
       <p:ext uri="{BB962C8B-B14F-4D97-AF65-F5344CB8AC3E}">
-        <p14:creationId xmlns:p14="http://schemas.microsoft.com/office/powerpoint/2010/main" val="161958261"/>
+        <p14:creationId xmlns:p14="http://schemas.microsoft.com/office/powerpoint/2010/main" val="524522845"/>
       </p:ext>
     </p:extLst>
   </p:cSld>
@@ -8386,9 +10063,9 @@
 </file>
 
 <file path=ppt/theme/theme1.xml><?xml version="1.0" encoding="utf-8"?>
-<a:theme xmlns:a="http://schemas.openxmlformats.org/drawingml/2006/main" name="ChatGPT">
+<a:theme xmlns:a="http://schemas.openxmlformats.org/drawingml/2006/main" name="Course">
   <a:themeElements>
-    <a:clrScheme name="ChatGPT">
+    <a:clrScheme name="Course">
       <a:dk1>
         <a:srgbClr val="000000"/>
       </a:dk1>
@@ -8438,7 +10115,7 @@
         <a:cs typeface="Calibri"/>
       </a:minorFont>
     </a:fontScheme>
-    <a:fmtScheme name="ChatGPT">
+    <a:fmtScheme name="Course">
       <a:fillStyleLst>
         <a:solidFill>
           <a:schemeClr val="phClr"/>
